--- a/RAGSY- CODE_TO_VISUALIZER.pptx
+++ b/RAGSY- CODE_TO_VISUALIZER.pptx
@@ -5,10 +5,10 @@
     <p:sldMasterId id="2147483660" r:id="rId1"/>
   </p:sldMasterIdLst>
   <p:notesMasterIdLst>
-    <p:notesMasterId r:id="rId14"/>
+    <p:notesMasterId r:id="rId15"/>
   </p:notesMasterIdLst>
   <p:handoutMasterIdLst>
-    <p:handoutMasterId r:id="rId15"/>
+    <p:handoutMasterId r:id="rId16"/>
   </p:handoutMasterIdLst>
   <p:sldIdLst>
     <p:sldId id="256" r:id="rId2"/>
@@ -21,28 +21,29 @@
     <p:sldId id="266" r:id="rId9"/>
     <p:sldId id="259" r:id="rId10"/>
     <p:sldId id="261" r:id="rId11"/>
-    <p:sldId id="275" r:id="rId12"/>
-    <p:sldId id="271" r:id="rId13"/>
+    <p:sldId id="276" r:id="rId12"/>
+    <p:sldId id="275" r:id="rId13"/>
+    <p:sldId id="271" r:id="rId14"/>
   </p:sldIdLst>
   <p:sldSz cx="14630400" cy="8229600"/>
   <p:notesSz cx="8229600" cy="14630400"/>
   <p:embeddedFontLst>
     <p:embeddedFont>
       <p:font typeface="Abadi" panose="020B0604020104020204" pitchFamily="34" charset="0"/>
-      <p:regular r:id="rId16"/>
-      <p:bold r:id="rId17"/>
-      <p:italic r:id="rId18"/>
-      <p:boldItalic r:id="rId19"/>
+      <p:regular r:id="rId17"/>
+      <p:bold r:id="rId18"/>
+      <p:italic r:id="rId19"/>
+      <p:boldItalic r:id="rId20"/>
     </p:embeddedFont>
     <p:embeddedFont>
       <p:font typeface="Garamond" panose="02020404030301010803" pitchFamily="18" charset="0"/>
-      <p:regular r:id="rId20"/>
-      <p:bold r:id="rId21"/>
-      <p:italic r:id="rId22"/>
+      <p:regular r:id="rId21"/>
+      <p:bold r:id="rId22"/>
+      <p:italic r:id="rId23"/>
     </p:embeddedFont>
     <p:embeddedFont>
       <p:font typeface="Lato Bold" panose="020B0604020202020204" charset="0"/>
-      <p:bold r:id="rId23"/>
+      <p:bold r:id="rId24"/>
     </p:embeddedFont>
   </p:embeddedFontLst>
   <p:defaultTextStyle>
@@ -245,7 +246,7 @@
           <a:p>
             <a:fld id="{1B513CE3-D9A5-4051-8901-5CD2DD1DC6DE}" type="datetimeFigureOut">
               <a:rPr lang="en-US" smtClean="0"/>
-              <a:t>4/24/2026</a:t>
+              <a:t>4/25/2026</a:t>
             </a:fld>
             <a:endParaRPr lang="en-US"/>
           </a:p>
@@ -1109,7 +1110,7 @@
                 </a:solidFill>
               </a:rPr>
               <a:pPr/>
-              <a:t>24-Apr-26</a:t>
+              <a:t>25-Apr-26</a:t>
             </a:fld>
             <a:endParaRPr lang="en-IN" dirty="0">
               <a:solidFill>
@@ -1312,7 +1313,7 @@
                 </a:solidFill>
               </a:rPr>
               <a:pPr/>
-              <a:t>24-Apr-26</a:t>
+              <a:t>25-Apr-26</a:t>
             </a:fld>
             <a:endParaRPr lang="en-IN" dirty="0">
               <a:solidFill>
@@ -1525,7 +1526,7 @@
                 </a:solidFill>
               </a:rPr>
               <a:pPr/>
-              <a:t>24-Apr-26</a:t>
+              <a:t>25-Apr-26</a:t>
             </a:fld>
             <a:endParaRPr lang="en-IN" dirty="0">
               <a:solidFill>
@@ -1780,7 +1781,7 @@
               <a:pPr eaLnBrk="1" hangingPunct="1">
                 <a:defRPr/>
               </a:pPr>
-              <a:t>24 April 2026</a:t>
+              <a:t>25 April 2026</a:t>
             </a:fld>
             <a:endParaRPr lang="en-IN" sz="2160" dirty="0">
               <a:solidFill>
@@ -2100,7 +2101,7 @@
                 </a:solidFill>
               </a:rPr>
               <a:pPr/>
-              <a:t>24-Apr-26</a:t>
+              <a:t>25-Apr-26</a:t>
             </a:fld>
             <a:endParaRPr lang="en-IN" dirty="0">
               <a:solidFill>
@@ -2377,7 +2378,7 @@
                 </a:solidFill>
               </a:rPr>
               <a:pPr/>
-              <a:t>24-Apr-26</a:t>
+              <a:t>25-Apr-26</a:t>
             </a:fld>
             <a:endParaRPr lang="en-IN" dirty="0">
               <a:solidFill>
@@ -2642,7 +2643,7 @@
                 </a:solidFill>
               </a:rPr>
               <a:pPr/>
-              <a:t>24-Apr-26</a:t>
+              <a:t>25-Apr-26</a:t>
             </a:fld>
             <a:endParaRPr lang="en-IN" dirty="0">
               <a:solidFill>
@@ -3042,7 +3043,7 @@
                 </a:solidFill>
               </a:rPr>
               <a:pPr/>
-              <a:t>24-Apr-26</a:t>
+              <a:t>25-Apr-26</a:t>
             </a:fld>
             <a:endParaRPr lang="en-IN" dirty="0">
               <a:solidFill>
@@ -3193,7 +3194,7 @@
                 </a:solidFill>
               </a:rPr>
               <a:pPr/>
-              <a:t>24-Apr-26</a:t>
+              <a:t>25-Apr-26</a:t>
             </a:fld>
             <a:endParaRPr lang="en-IN" dirty="0">
               <a:solidFill>
@@ -3321,7 +3322,7 @@
                 </a:solidFill>
               </a:rPr>
               <a:pPr/>
-              <a:t>24-Apr-26</a:t>
+              <a:t>25-Apr-26</a:t>
             </a:fld>
             <a:endParaRPr lang="en-IN" dirty="0">
               <a:solidFill>
@@ -3631,7 +3632,7 @@
                 </a:solidFill>
               </a:rPr>
               <a:pPr/>
-              <a:t>24-Apr-26</a:t>
+              <a:t>25-Apr-26</a:t>
             </a:fld>
             <a:endParaRPr lang="en-IN" dirty="0">
               <a:solidFill>
@@ -3921,7 +3922,7 @@
                 </a:solidFill>
               </a:rPr>
               <a:pPr/>
-              <a:t>24-Apr-26</a:t>
+              <a:t>25-Apr-26</a:t>
             </a:fld>
             <a:endParaRPr lang="en-IN" dirty="0">
               <a:solidFill>
@@ -4167,7 +4168,7 @@
                 </a:solidFill>
               </a:rPr>
               <a:pPr/>
-              <a:t>24-Apr-26</a:t>
+              <a:t>25-Apr-26</a:t>
             </a:fld>
             <a:endParaRPr lang="en-US" dirty="0">
               <a:solidFill>
@@ -5542,6 +5543,2341 @@
           <p:cNvPr id="2" name="Title 1">
             <a:extLst>
               <a:ext uri="{FF2B5EF4-FFF2-40B4-BE49-F238E27FC236}">
+                <a16:creationId xmlns:a16="http://schemas.microsoft.com/office/drawing/2014/main" id="{AF2EA3AE-9108-9DAD-42F9-DE1E9BDEAC06}"/>
+              </a:ext>
+            </a:extLst>
+          </p:cNvPr>
+          <p:cNvSpPr>
+            <a:spLocks noGrp="1"/>
+          </p:cNvSpPr>
+          <p:nvPr>
+            <p:ph type="title"/>
+          </p:nvPr>
+        </p:nvSpPr>
+        <p:spPr/>
+        <p:txBody>
+          <a:bodyPr>
+            <a:normAutofit/>
+          </a:bodyPr>
+          <a:lstStyle/>
+          <a:p>
+            <a:r>
+              <a:rPr lang="en-IN" sz="2600" b="1" dirty="0"/>
+              <a:t>Algorithms:</a:t>
+            </a:r>
+          </a:p>
+        </p:txBody>
+      </p:sp>
+      <p:graphicFrame>
+        <p:nvGraphicFramePr>
+          <p:cNvPr id="4" name="Content Placeholder 3">
+            <a:extLst>
+              <a:ext uri="{FF2B5EF4-FFF2-40B4-BE49-F238E27FC236}">
+                <a16:creationId xmlns:a16="http://schemas.microsoft.com/office/drawing/2014/main" id="{C1A275A7-053B-34F8-02D2-220BE5E19FF5}"/>
+              </a:ext>
+            </a:extLst>
+          </p:cNvPr>
+          <p:cNvGraphicFramePr>
+            <a:graphicFrameLocks noGrp="1"/>
+          </p:cNvGraphicFramePr>
+          <p:nvPr>
+            <p:ph idx="1"/>
+            <p:extLst>
+              <p:ext uri="{D42A27DB-BD31-4B8C-83A1-F6EECF244321}">
+                <p14:modId xmlns:p14="http://schemas.microsoft.com/office/powerpoint/2010/main" val="4009724170"/>
+              </p:ext>
+            </p:extLst>
+          </p:nvPr>
+        </p:nvGraphicFramePr>
+        <p:xfrm>
+          <a:off x="1006475" y="1695449"/>
+          <a:ext cx="12617451" cy="6340760"/>
+        </p:xfrm>
+        <a:graphic>
+          <a:graphicData uri="http://schemas.openxmlformats.org/drawingml/2006/table">
+            <a:tbl>
+              <a:tblPr/>
+              <a:tblGrid>
+                <a:gridCol w="4205817">
+                  <a:extLst>
+                    <a:ext uri="{9D8B030D-6E8A-4147-A177-3AD203B41FA5}">
+                      <a16:colId xmlns:a16="http://schemas.microsoft.com/office/drawing/2014/main" val="1753071766"/>
+                    </a:ext>
+                  </a:extLst>
+                </a:gridCol>
+                <a:gridCol w="4205817">
+                  <a:extLst>
+                    <a:ext uri="{9D8B030D-6E8A-4147-A177-3AD203B41FA5}">
+                      <a16:colId xmlns:a16="http://schemas.microsoft.com/office/drawing/2014/main" val="3097947666"/>
+                    </a:ext>
+                  </a:extLst>
+                </a:gridCol>
+                <a:gridCol w="4205817">
+                  <a:extLst>
+                    <a:ext uri="{9D8B030D-6E8A-4147-A177-3AD203B41FA5}">
+                      <a16:colId xmlns:a16="http://schemas.microsoft.com/office/drawing/2014/main" val="238821683"/>
+                    </a:ext>
+                  </a:extLst>
+                </a:gridCol>
+              </a:tblGrid>
+              <a:tr h="517236">
+                <a:tc>
+                  <a:txBody>
+                    <a:bodyPr/>
+                    <a:lstStyle/>
+                    <a:p>
+                      <a:pPr fontAlgn="t">
+                        <a:buNone/>
+                      </a:pPr>
+                      <a:r>
+                        <a:rPr lang="en-IN" sz="2200" b="0">
+                          <a:solidFill>
+                            <a:schemeClr val="bg2"/>
+                          </a:solidFill>
+                          <a:effectLst/>
+                        </a:rPr>
+                        <a:t>Algorithm</a:t>
+                      </a:r>
+                    </a:p>
+                  </a:txBody>
+                  <a:tcPr>
+                    <a:lnL w="12700" cap="flat" cmpd="sng" algn="ctr">
+                      <a:solidFill>
+                        <a:srgbClr val="B05199"/>
+                      </a:solidFill>
+                      <a:prstDash val="solid"/>
+                      <a:round/>
+                      <a:headEnd type="none" w="med" len="med"/>
+                      <a:tailEnd type="none" w="med" len="med"/>
+                    </a:lnL>
+                    <a:lnR w="12700" cap="flat" cmpd="sng" algn="ctr">
+                      <a:solidFill>
+                        <a:srgbClr val="B04A99"/>
+                      </a:solidFill>
+                      <a:prstDash val="solid"/>
+                      <a:round/>
+                      <a:headEnd type="none" w="med" len="med"/>
+                      <a:tailEnd type="none" w="med" len="med"/>
+                    </a:lnR>
+                    <a:lnT w="12700" cap="flat" cmpd="sng" algn="ctr">
+                      <a:solidFill>
+                        <a:srgbClr val="B05199"/>
+                      </a:solidFill>
+                      <a:prstDash val="solid"/>
+                      <a:round/>
+                      <a:headEnd type="none" w="med" len="med"/>
+                      <a:tailEnd type="none" w="med" len="med"/>
+                    </a:lnT>
+                    <a:lnB w="12700" cap="flat" cmpd="sng" algn="ctr">
+                      <a:solidFill>
+                        <a:srgbClr val="606EA9"/>
+                      </a:solidFill>
+                      <a:prstDash val="solid"/>
+                      <a:round/>
+                      <a:headEnd type="none" w="med" len="med"/>
+                      <a:tailEnd type="none" w="med" len="med"/>
+                    </a:lnB>
+                    <a:solidFill>
+                      <a:srgbClr val="1F1F1E"/>
+                    </a:solidFill>
+                  </a:tcPr>
+                </a:tc>
+                <a:tc>
+                  <a:txBody>
+                    <a:bodyPr/>
+                    <a:lstStyle/>
+                    <a:p>
+                      <a:pPr fontAlgn="t">
+                        <a:buNone/>
+                      </a:pPr>
+                      <a:r>
+                        <a:rPr lang="en-IN" sz="2200" b="0">
+                          <a:solidFill>
+                            <a:schemeClr val="bg2"/>
+                          </a:solidFill>
+                          <a:effectLst/>
+                        </a:rPr>
+                        <a:t>Where Used</a:t>
+                      </a:r>
+                    </a:p>
+                  </a:txBody>
+                  <a:tcPr>
+                    <a:lnL w="12700" cap="flat" cmpd="sng" algn="ctr">
+                      <a:solidFill>
+                        <a:srgbClr val="B04A99"/>
+                      </a:solidFill>
+                      <a:prstDash val="solid"/>
+                      <a:round/>
+                      <a:headEnd type="none" w="med" len="med"/>
+                      <a:tailEnd type="none" w="med" len="med"/>
+                    </a:lnL>
+                    <a:lnR w="12700" cap="flat" cmpd="sng" algn="ctr">
+                      <a:solidFill>
+                        <a:srgbClr val="F05799"/>
+                      </a:solidFill>
+                      <a:prstDash val="solid"/>
+                      <a:round/>
+                      <a:headEnd type="none" w="med" len="med"/>
+                      <a:tailEnd type="none" w="med" len="med"/>
+                    </a:lnR>
+                    <a:lnT w="12700" cap="flat" cmpd="sng" algn="ctr">
+                      <a:solidFill>
+                        <a:srgbClr val="B04A99"/>
+                      </a:solidFill>
+                      <a:prstDash val="solid"/>
+                      <a:round/>
+                      <a:headEnd type="none" w="med" len="med"/>
+                      <a:tailEnd type="none" w="med" len="med"/>
+                    </a:lnT>
+                    <a:lnB w="12700" cap="flat" cmpd="sng" algn="ctr">
+                      <a:solidFill>
+                        <a:srgbClr val="606EA9"/>
+                      </a:solidFill>
+                      <a:prstDash val="solid"/>
+                      <a:round/>
+                      <a:headEnd type="none" w="med" len="med"/>
+                      <a:tailEnd type="none" w="med" len="med"/>
+                    </a:lnB>
+                    <a:solidFill>
+                      <a:srgbClr val="1F1F1E"/>
+                    </a:solidFill>
+                  </a:tcPr>
+                </a:tc>
+                <a:tc>
+                  <a:txBody>
+                    <a:bodyPr/>
+                    <a:lstStyle/>
+                    <a:p>
+                      <a:pPr fontAlgn="t">
+                        <a:buNone/>
+                      </a:pPr>
+                      <a:r>
+                        <a:rPr lang="en-IN" sz="2200" b="0">
+                          <a:solidFill>
+                            <a:schemeClr val="bg2"/>
+                          </a:solidFill>
+                          <a:effectLst/>
+                        </a:rPr>
+                        <a:t>Purpose</a:t>
+                      </a:r>
+                    </a:p>
+                  </a:txBody>
+                  <a:tcPr>
+                    <a:lnL w="12700" cap="flat" cmpd="sng" algn="ctr">
+                      <a:solidFill>
+                        <a:srgbClr val="F05799"/>
+                      </a:solidFill>
+                      <a:prstDash val="solid"/>
+                      <a:round/>
+                      <a:headEnd type="none" w="med" len="med"/>
+                      <a:tailEnd type="none" w="med" len="med"/>
+                    </a:lnL>
+                    <a:lnR w="12700" cap="flat" cmpd="sng" algn="ctr">
+                      <a:solidFill>
+                        <a:srgbClr val="F05799"/>
+                      </a:solidFill>
+                      <a:prstDash val="solid"/>
+                      <a:round/>
+                      <a:headEnd type="none" w="med" len="med"/>
+                      <a:tailEnd type="none" w="med" len="med"/>
+                    </a:lnR>
+                    <a:lnT w="12700" cap="flat" cmpd="sng" algn="ctr">
+                      <a:solidFill>
+                        <a:srgbClr val="F05799"/>
+                      </a:solidFill>
+                      <a:prstDash val="solid"/>
+                      <a:round/>
+                      <a:headEnd type="none" w="med" len="med"/>
+                      <a:tailEnd type="none" w="med" len="med"/>
+                    </a:lnT>
+                    <a:lnB w="12700" cap="flat" cmpd="sng" algn="ctr">
+                      <a:solidFill>
+                        <a:srgbClr val="A072A9"/>
+                      </a:solidFill>
+                      <a:prstDash val="solid"/>
+                      <a:round/>
+                      <a:headEnd type="none" w="med" len="med"/>
+                      <a:tailEnd type="none" w="med" len="med"/>
+                    </a:lnB>
+                    <a:solidFill>
+                      <a:srgbClr val="1F1F1E"/>
+                    </a:solidFill>
+                  </a:tcPr>
+                </a:tc>
+                <a:extLst>
+                  <a:ext uri="{0D108BD9-81ED-4DB2-BD59-A6C34878D82A}">
+                    <a16:rowId xmlns:a16="http://schemas.microsoft.com/office/drawing/2014/main" val="1235403304"/>
+                  </a:ext>
+                </a:extLst>
+              </a:tr>
+              <a:tr h="517236">
+                <a:tc>
+                  <a:txBody>
+                    <a:bodyPr/>
+                    <a:lstStyle/>
+                    <a:p>
+                      <a:pPr fontAlgn="t">
+                        <a:buNone/>
+                      </a:pPr>
+                      <a:r>
+                        <a:rPr lang="en-IN" sz="2200">
+                          <a:solidFill>
+                            <a:schemeClr val="bg2"/>
+                          </a:solidFill>
+                          <a:effectLst/>
+                        </a:rPr>
+                        <a:t>AST Parsing</a:t>
+                      </a:r>
+                    </a:p>
+                  </a:txBody>
+                  <a:tcPr>
+                    <a:lnL w="12700" cap="flat" cmpd="sng" algn="ctr">
+                      <a:solidFill>
+                        <a:srgbClr val="606EA9"/>
+                      </a:solidFill>
+                      <a:prstDash val="solid"/>
+                      <a:round/>
+                      <a:headEnd type="none" w="med" len="med"/>
+                      <a:tailEnd type="none" w="med" len="med"/>
+                    </a:lnL>
+                    <a:lnR w="12700" cap="flat" cmpd="sng" algn="ctr">
+                      <a:solidFill>
+                        <a:srgbClr val="606EA9"/>
+                      </a:solidFill>
+                      <a:prstDash val="solid"/>
+                      <a:round/>
+                      <a:headEnd type="none" w="med" len="med"/>
+                      <a:tailEnd type="none" w="med" len="med"/>
+                    </a:lnR>
+                    <a:lnT w="12700" cap="flat" cmpd="sng" algn="ctr">
+                      <a:solidFill>
+                        <a:srgbClr val="606EA9"/>
+                      </a:solidFill>
+                      <a:prstDash val="solid"/>
+                      <a:round/>
+                      <a:headEnd type="none" w="med" len="med"/>
+                      <a:tailEnd type="none" w="med" len="med"/>
+                    </a:lnT>
+                    <a:lnB w="12700" cap="flat" cmpd="sng" algn="ctr">
+                      <a:solidFill>
+                        <a:srgbClr val="E077A9"/>
+                      </a:solidFill>
+                      <a:prstDash val="solid"/>
+                      <a:round/>
+                      <a:headEnd type="none" w="med" len="med"/>
+                      <a:tailEnd type="none" w="med" len="med"/>
+                    </a:lnB>
+                    <a:solidFill>
+                      <a:srgbClr val="1F1F1E"/>
+                    </a:solidFill>
+                  </a:tcPr>
+                </a:tc>
+                <a:tc>
+                  <a:txBody>
+                    <a:bodyPr/>
+                    <a:lstStyle/>
+                    <a:p>
+                      <a:pPr fontAlgn="t">
+                        <a:buNone/>
+                      </a:pPr>
+                      <a:r>
+                        <a:rPr lang="en-IN" sz="2200">
+                          <a:solidFill>
+                            <a:schemeClr val="bg2"/>
+                          </a:solidFill>
+                          <a:effectLst/>
+                          <a:latin typeface="Anthropic Mono"/>
+                        </a:rPr>
+                        <a:t>ast.parse()</a:t>
+                      </a:r>
+                      <a:endParaRPr lang="en-IN" sz="2200">
+                        <a:solidFill>
+                          <a:schemeClr val="bg2"/>
+                        </a:solidFill>
+                        <a:effectLst/>
+                      </a:endParaRPr>
+                    </a:p>
+                  </a:txBody>
+                  <a:tcPr>
+                    <a:lnL w="12700" cap="flat" cmpd="sng" algn="ctr">
+                      <a:solidFill>
+                        <a:srgbClr val="606EA9"/>
+                      </a:solidFill>
+                      <a:prstDash val="solid"/>
+                      <a:round/>
+                      <a:headEnd type="none" w="med" len="med"/>
+                      <a:tailEnd type="none" w="med" len="med"/>
+                    </a:lnL>
+                    <a:lnR w="12700" cap="flat" cmpd="sng" algn="ctr">
+                      <a:solidFill>
+                        <a:srgbClr val="A072A9"/>
+                      </a:solidFill>
+                      <a:prstDash val="solid"/>
+                      <a:round/>
+                      <a:headEnd type="none" w="med" len="med"/>
+                      <a:tailEnd type="none" w="med" len="med"/>
+                    </a:lnR>
+                    <a:lnT w="12700" cap="flat" cmpd="sng" algn="ctr">
+                      <a:solidFill>
+                        <a:srgbClr val="606EA9"/>
+                      </a:solidFill>
+                      <a:prstDash val="solid"/>
+                      <a:round/>
+                      <a:headEnd type="none" w="med" len="med"/>
+                      <a:tailEnd type="none" w="med" len="med"/>
+                    </a:lnT>
+                    <a:lnB w="12700" cap="flat" cmpd="sng" algn="ctr">
+                      <a:solidFill>
+                        <a:srgbClr val="702445"/>
+                      </a:solidFill>
+                      <a:prstDash val="solid"/>
+                      <a:round/>
+                      <a:headEnd type="none" w="med" len="med"/>
+                      <a:tailEnd type="none" w="med" len="med"/>
+                    </a:lnB>
+                    <a:solidFill>
+                      <a:srgbClr val="1F1F1E"/>
+                    </a:solidFill>
+                  </a:tcPr>
+                </a:tc>
+                <a:tc>
+                  <a:txBody>
+                    <a:bodyPr/>
+                    <a:lstStyle/>
+                    <a:p>
+                      <a:pPr fontAlgn="t">
+                        <a:buNone/>
+                      </a:pPr>
+                      <a:r>
+                        <a:rPr lang="en-US" sz="2200">
+                          <a:solidFill>
+                            <a:schemeClr val="bg2"/>
+                          </a:solidFill>
+                          <a:effectLst/>
+                        </a:rPr>
+                        <a:t>Read and understand Python code</a:t>
+                      </a:r>
+                    </a:p>
+                  </a:txBody>
+                  <a:tcPr>
+                    <a:lnL w="12700" cap="flat" cmpd="sng" algn="ctr">
+                      <a:solidFill>
+                        <a:srgbClr val="A072A9"/>
+                      </a:solidFill>
+                      <a:prstDash val="solid"/>
+                      <a:round/>
+                      <a:headEnd type="none" w="med" len="med"/>
+                      <a:tailEnd type="none" w="med" len="med"/>
+                    </a:lnL>
+                    <a:lnR w="12700" cap="flat" cmpd="sng" algn="ctr">
+                      <a:solidFill>
+                        <a:srgbClr val="A072A9"/>
+                      </a:solidFill>
+                      <a:prstDash val="solid"/>
+                      <a:round/>
+                      <a:headEnd type="none" w="med" len="med"/>
+                      <a:tailEnd type="none" w="med" len="med"/>
+                    </a:lnR>
+                    <a:lnT w="12700" cap="flat" cmpd="sng" algn="ctr">
+                      <a:solidFill>
+                        <a:srgbClr val="A072A9"/>
+                      </a:solidFill>
+                      <a:prstDash val="solid"/>
+                      <a:round/>
+                      <a:headEnd type="none" w="med" len="med"/>
+                      <a:tailEnd type="none" w="med" len="med"/>
+                    </a:lnT>
+                    <a:lnB w="12700" cap="flat" cmpd="sng" algn="ctr">
+                      <a:solidFill>
+                        <a:srgbClr val="9058AC"/>
+                      </a:solidFill>
+                      <a:prstDash val="solid"/>
+                      <a:round/>
+                      <a:headEnd type="none" w="med" len="med"/>
+                      <a:tailEnd type="none" w="med" len="med"/>
+                    </a:lnB>
+                    <a:solidFill>
+                      <a:srgbClr val="1F1F1E"/>
+                    </a:solidFill>
+                  </a:tcPr>
+                </a:tc>
+                <a:extLst>
+                  <a:ext uri="{0D108BD9-81ED-4DB2-BD59-A6C34878D82A}">
+                    <a16:rowId xmlns:a16="http://schemas.microsoft.com/office/drawing/2014/main" val="3564176120"/>
+                  </a:ext>
+                </a:extLst>
+              </a:tr>
+              <a:tr h="517236">
+                <a:tc>
+                  <a:txBody>
+                    <a:bodyPr/>
+                    <a:lstStyle/>
+                    <a:p>
+                      <a:pPr fontAlgn="t">
+                        <a:buNone/>
+                      </a:pPr>
+                      <a:r>
+                        <a:rPr lang="en-IN" sz="2200" dirty="0">
+                          <a:solidFill>
+                            <a:schemeClr val="bg2"/>
+                          </a:solidFill>
+                          <a:effectLst/>
+                        </a:rPr>
+                        <a:t>DFS (Depth first search) Tree Traversal</a:t>
+                      </a:r>
+                    </a:p>
+                  </a:txBody>
+                  <a:tcPr>
+                    <a:lnL w="12700" cap="flat" cmpd="sng" algn="ctr">
+                      <a:solidFill>
+                        <a:srgbClr val="E077A9"/>
+                      </a:solidFill>
+                      <a:prstDash val="solid"/>
+                      <a:round/>
+                      <a:headEnd type="none" w="med" len="med"/>
+                      <a:tailEnd type="none" w="med" len="med"/>
+                    </a:lnL>
+                    <a:lnR w="12700" cap="flat" cmpd="sng" algn="ctr">
+                      <a:solidFill>
+                        <a:srgbClr val="702445"/>
+                      </a:solidFill>
+                      <a:prstDash val="solid"/>
+                      <a:round/>
+                      <a:headEnd type="none" w="med" len="med"/>
+                      <a:tailEnd type="none" w="med" len="med"/>
+                    </a:lnR>
+                    <a:lnT w="12700" cap="flat" cmpd="sng" algn="ctr">
+                      <a:solidFill>
+                        <a:srgbClr val="E077A9"/>
+                      </a:solidFill>
+                      <a:prstDash val="solid"/>
+                      <a:round/>
+                      <a:headEnd type="none" w="med" len="med"/>
+                      <a:tailEnd type="none" w="med" len="med"/>
+                    </a:lnT>
+                    <a:lnB w="12700" cap="flat" cmpd="sng" algn="ctr">
+                      <a:solidFill>
+                        <a:srgbClr val="207AA9"/>
+                      </a:solidFill>
+                      <a:prstDash val="solid"/>
+                      <a:round/>
+                      <a:headEnd type="none" w="med" len="med"/>
+                      <a:tailEnd type="none" w="med" len="med"/>
+                    </a:lnB>
+                    <a:solidFill>
+                      <a:srgbClr val="1F1F1E"/>
+                    </a:solidFill>
+                  </a:tcPr>
+                </a:tc>
+                <a:tc>
+                  <a:txBody>
+                    <a:bodyPr/>
+                    <a:lstStyle/>
+                    <a:p>
+                      <a:pPr fontAlgn="t">
+                        <a:buNone/>
+                      </a:pPr>
+                      <a:r>
+                        <a:rPr lang="en-IN" sz="2200">
+                          <a:solidFill>
+                            <a:schemeClr val="bg2"/>
+                          </a:solidFill>
+                          <a:effectLst/>
+                          <a:latin typeface="Anthropic Mono"/>
+                        </a:rPr>
+                        <a:t>parse_statements()</a:t>
+                      </a:r>
+                      <a:endParaRPr lang="en-IN" sz="2200">
+                        <a:solidFill>
+                          <a:schemeClr val="bg2"/>
+                        </a:solidFill>
+                        <a:effectLst/>
+                      </a:endParaRPr>
+                    </a:p>
+                  </a:txBody>
+                  <a:tcPr>
+                    <a:lnL w="12700" cap="flat" cmpd="sng" algn="ctr">
+                      <a:solidFill>
+                        <a:srgbClr val="702445"/>
+                      </a:solidFill>
+                      <a:prstDash val="solid"/>
+                      <a:round/>
+                      <a:headEnd type="none" w="med" len="med"/>
+                      <a:tailEnd type="none" w="med" len="med"/>
+                    </a:lnL>
+                    <a:lnR w="12700" cap="flat" cmpd="sng" algn="ctr">
+                      <a:solidFill>
+                        <a:srgbClr val="9058AC"/>
+                      </a:solidFill>
+                      <a:prstDash val="solid"/>
+                      <a:round/>
+                      <a:headEnd type="none" w="med" len="med"/>
+                      <a:tailEnd type="none" w="med" len="med"/>
+                    </a:lnR>
+                    <a:lnT w="12700" cap="flat" cmpd="sng" algn="ctr">
+                      <a:solidFill>
+                        <a:srgbClr val="702445"/>
+                      </a:solidFill>
+                      <a:prstDash val="solid"/>
+                      <a:round/>
+                      <a:headEnd type="none" w="med" len="med"/>
+                      <a:tailEnd type="none" w="med" len="med"/>
+                    </a:lnT>
+                    <a:lnB w="12700" cap="flat" cmpd="sng" algn="ctr">
+                      <a:solidFill>
+                        <a:srgbClr val="305699"/>
+                      </a:solidFill>
+                      <a:prstDash val="solid"/>
+                      <a:round/>
+                      <a:headEnd type="none" w="med" len="med"/>
+                      <a:tailEnd type="none" w="med" len="med"/>
+                    </a:lnB>
+                    <a:solidFill>
+                      <a:srgbClr val="1F1F1E"/>
+                    </a:solidFill>
+                  </a:tcPr>
+                </a:tc>
+                <a:tc>
+                  <a:txBody>
+                    <a:bodyPr/>
+                    <a:lstStyle/>
+                    <a:p>
+                      <a:pPr fontAlgn="t">
+                        <a:buNone/>
+                      </a:pPr>
+                      <a:r>
+                        <a:rPr lang="en-IN" sz="2200">
+                          <a:solidFill>
+                            <a:schemeClr val="bg2"/>
+                          </a:solidFill>
+                          <a:effectLst/>
+                        </a:rPr>
+                        <a:t>Walk through code structure</a:t>
+                      </a:r>
+                    </a:p>
+                  </a:txBody>
+                  <a:tcPr>
+                    <a:lnL w="12700" cap="flat" cmpd="sng" algn="ctr">
+                      <a:solidFill>
+                        <a:srgbClr val="9058AC"/>
+                      </a:solidFill>
+                      <a:prstDash val="solid"/>
+                      <a:round/>
+                      <a:headEnd type="none" w="med" len="med"/>
+                      <a:tailEnd type="none" w="med" len="med"/>
+                    </a:lnL>
+                    <a:lnR w="12700" cap="flat" cmpd="sng" algn="ctr">
+                      <a:solidFill>
+                        <a:srgbClr val="9058AC"/>
+                      </a:solidFill>
+                      <a:prstDash val="solid"/>
+                      <a:round/>
+                      <a:headEnd type="none" w="med" len="med"/>
+                      <a:tailEnd type="none" w="med" len="med"/>
+                    </a:lnR>
+                    <a:lnT w="12700" cap="flat" cmpd="sng" algn="ctr">
+                      <a:solidFill>
+                        <a:srgbClr val="9058AC"/>
+                      </a:solidFill>
+                      <a:prstDash val="solid"/>
+                      <a:round/>
+                      <a:headEnd type="none" w="med" len="med"/>
+                      <a:tailEnd type="none" w="med" len="med"/>
+                    </a:lnT>
+                    <a:lnB w="12700" cap="flat" cmpd="sng" algn="ctr">
+                      <a:solidFill>
+                        <a:srgbClr val="F02745"/>
+                      </a:solidFill>
+                      <a:prstDash val="solid"/>
+                      <a:round/>
+                      <a:headEnd type="none" w="med" len="med"/>
+                      <a:tailEnd type="none" w="med" len="med"/>
+                    </a:lnB>
+                    <a:solidFill>
+                      <a:srgbClr val="1F1F1E"/>
+                    </a:solidFill>
+                  </a:tcPr>
+                </a:tc>
+                <a:extLst>
+                  <a:ext uri="{0D108BD9-81ED-4DB2-BD59-A6C34878D82A}">
+                    <a16:rowId xmlns:a16="http://schemas.microsoft.com/office/drawing/2014/main" val="3200068910"/>
+                  </a:ext>
+                </a:extLst>
+              </a:tr>
+              <a:tr h="517236">
+                <a:tc>
+                  <a:txBody>
+                    <a:bodyPr/>
+                    <a:lstStyle/>
+                    <a:p>
+                      <a:pPr fontAlgn="t">
+                        <a:buNone/>
+                      </a:pPr>
+                      <a:r>
+                        <a:rPr lang="en-IN" sz="2200" dirty="0">
+                          <a:solidFill>
+                            <a:schemeClr val="bg2"/>
+                          </a:solidFill>
+                          <a:effectLst/>
+                        </a:rPr>
+                        <a:t>Graph Construction</a:t>
+                      </a:r>
+                    </a:p>
+                  </a:txBody>
+                  <a:tcPr>
+                    <a:lnL w="12700" cap="flat" cmpd="sng" algn="ctr">
+                      <a:solidFill>
+                        <a:srgbClr val="207AA9"/>
+                      </a:solidFill>
+                      <a:prstDash val="solid"/>
+                      <a:round/>
+                      <a:headEnd type="none" w="med" len="med"/>
+                      <a:tailEnd type="none" w="med" len="med"/>
+                    </a:lnL>
+                    <a:lnR w="12700" cap="flat" cmpd="sng" algn="ctr">
+                      <a:solidFill>
+                        <a:srgbClr val="305699"/>
+                      </a:solidFill>
+                      <a:prstDash val="solid"/>
+                      <a:round/>
+                      <a:headEnd type="none" w="med" len="med"/>
+                      <a:tailEnd type="none" w="med" len="med"/>
+                    </a:lnR>
+                    <a:lnT w="12700" cap="flat" cmpd="sng" algn="ctr">
+                      <a:solidFill>
+                        <a:srgbClr val="207AA9"/>
+                      </a:solidFill>
+                      <a:prstDash val="solid"/>
+                      <a:round/>
+                      <a:headEnd type="none" w="med" len="med"/>
+                      <a:tailEnd type="none" w="med" len="med"/>
+                    </a:lnT>
+                    <a:lnB w="12700" cap="flat" cmpd="sng" algn="ctr">
+                      <a:solidFill>
+                        <a:srgbClr val="F0411C"/>
+                      </a:solidFill>
+                      <a:prstDash val="solid"/>
+                      <a:round/>
+                      <a:headEnd type="none" w="med" len="med"/>
+                      <a:tailEnd type="none" w="med" len="med"/>
+                    </a:lnB>
+                    <a:solidFill>
+                      <a:srgbClr val="1F1F1E"/>
+                    </a:solidFill>
+                  </a:tcPr>
+                </a:tc>
+                <a:tc>
+                  <a:txBody>
+                    <a:bodyPr/>
+                    <a:lstStyle/>
+                    <a:p>
+                      <a:pPr fontAlgn="t">
+                        <a:buNone/>
+                      </a:pPr>
+                      <a:r>
+                        <a:rPr lang="en-IN" sz="2200" dirty="0" err="1">
+                          <a:solidFill>
+                            <a:schemeClr val="bg2"/>
+                          </a:solidFill>
+                          <a:effectLst/>
+                          <a:latin typeface="Anthropic Mono"/>
+                        </a:rPr>
+                        <a:t>make_node</a:t>
+                      </a:r>
+                      <a:r>
+                        <a:rPr lang="en-IN" sz="2200" dirty="0">
+                          <a:solidFill>
+                            <a:schemeClr val="bg2"/>
+                          </a:solidFill>
+                          <a:effectLst/>
+                          <a:latin typeface="Anthropic Mono"/>
+                        </a:rPr>
+                        <a:t>()</a:t>
+                      </a:r>
+                      <a:r>
+                        <a:rPr lang="en-IN" sz="2200" dirty="0">
+                          <a:solidFill>
+                            <a:schemeClr val="bg2"/>
+                          </a:solidFill>
+                          <a:effectLst/>
+                        </a:rPr>
+                        <a:t>, </a:t>
+                      </a:r>
+                      <a:r>
+                        <a:rPr lang="en-IN" sz="2200" dirty="0" err="1">
+                          <a:solidFill>
+                            <a:schemeClr val="bg2"/>
+                          </a:solidFill>
+                          <a:effectLst/>
+                          <a:latin typeface="Anthropic Mono"/>
+                        </a:rPr>
+                        <a:t>make_edge</a:t>
+                      </a:r>
+                      <a:r>
+                        <a:rPr lang="en-IN" sz="2200" dirty="0">
+                          <a:solidFill>
+                            <a:schemeClr val="bg2"/>
+                          </a:solidFill>
+                          <a:effectLst/>
+                          <a:latin typeface="Anthropic Mono"/>
+                        </a:rPr>
+                        <a:t>()</a:t>
+                      </a:r>
+                      <a:endParaRPr lang="en-IN" sz="2200" dirty="0">
+                        <a:solidFill>
+                          <a:schemeClr val="bg2"/>
+                        </a:solidFill>
+                        <a:effectLst/>
+                      </a:endParaRPr>
+                    </a:p>
+                  </a:txBody>
+                  <a:tcPr>
+                    <a:lnL w="12700" cap="flat" cmpd="sng" algn="ctr">
+                      <a:solidFill>
+                        <a:srgbClr val="305699"/>
+                      </a:solidFill>
+                      <a:prstDash val="solid"/>
+                      <a:round/>
+                      <a:headEnd type="none" w="med" len="med"/>
+                      <a:tailEnd type="none" w="med" len="med"/>
+                    </a:lnL>
+                    <a:lnR w="12700" cap="flat" cmpd="sng" algn="ctr">
+                      <a:solidFill>
+                        <a:srgbClr val="F02745"/>
+                      </a:solidFill>
+                      <a:prstDash val="solid"/>
+                      <a:round/>
+                      <a:headEnd type="none" w="med" len="med"/>
+                      <a:tailEnd type="none" w="med" len="med"/>
+                    </a:lnR>
+                    <a:lnT w="12700" cap="flat" cmpd="sng" algn="ctr">
+                      <a:solidFill>
+                        <a:srgbClr val="305699"/>
+                      </a:solidFill>
+                      <a:prstDash val="solid"/>
+                      <a:round/>
+                      <a:headEnd type="none" w="med" len="med"/>
+                      <a:tailEnd type="none" w="med" len="med"/>
+                    </a:lnT>
+                    <a:lnB w="12700" cap="flat" cmpd="sng" algn="ctr">
+                      <a:solidFill>
+                        <a:srgbClr val="D06BC8"/>
+                      </a:solidFill>
+                      <a:prstDash val="solid"/>
+                      <a:round/>
+                      <a:headEnd type="none" w="med" len="med"/>
+                      <a:tailEnd type="none" w="med" len="med"/>
+                    </a:lnB>
+                    <a:solidFill>
+                      <a:srgbClr val="1F1F1E"/>
+                    </a:solidFill>
+                  </a:tcPr>
+                </a:tc>
+                <a:tc>
+                  <a:txBody>
+                    <a:bodyPr/>
+                    <a:lstStyle/>
+                    <a:p>
+                      <a:pPr fontAlgn="t">
+                        <a:buNone/>
+                      </a:pPr>
+                      <a:r>
+                        <a:rPr lang="en-IN" sz="2200">
+                          <a:solidFill>
+                            <a:schemeClr val="bg2"/>
+                          </a:solidFill>
+                          <a:effectLst/>
+                        </a:rPr>
+                        <a:t>Build flowchart diagram</a:t>
+                      </a:r>
+                    </a:p>
+                  </a:txBody>
+                  <a:tcPr>
+                    <a:lnL w="12700" cap="flat" cmpd="sng" algn="ctr">
+                      <a:solidFill>
+                        <a:srgbClr val="F02745"/>
+                      </a:solidFill>
+                      <a:prstDash val="solid"/>
+                      <a:round/>
+                      <a:headEnd type="none" w="med" len="med"/>
+                      <a:tailEnd type="none" w="med" len="med"/>
+                    </a:lnL>
+                    <a:lnR w="12700" cap="flat" cmpd="sng" algn="ctr">
+                      <a:solidFill>
+                        <a:srgbClr val="F02745"/>
+                      </a:solidFill>
+                      <a:prstDash val="solid"/>
+                      <a:round/>
+                      <a:headEnd type="none" w="med" len="med"/>
+                      <a:tailEnd type="none" w="med" len="med"/>
+                    </a:lnR>
+                    <a:lnT w="12700" cap="flat" cmpd="sng" algn="ctr">
+                      <a:solidFill>
+                        <a:srgbClr val="F02745"/>
+                      </a:solidFill>
+                      <a:prstDash val="solid"/>
+                      <a:round/>
+                      <a:headEnd type="none" w="med" len="med"/>
+                      <a:tailEnd type="none" w="med" len="med"/>
+                    </a:lnT>
+                    <a:lnB w="12700" cap="flat" cmpd="sng" algn="ctr">
+                      <a:solidFill>
+                        <a:srgbClr val="302B45"/>
+                      </a:solidFill>
+                      <a:prstDash val="solid"/>
+                      <a:round/>
+                      <a:headEnd type="none" w="med" len="med"/>
+                      <a:tailEnd type="none" w="med" len="med"/>
+                    </a:lnB>
+                    <a:solidFill>
+                      <a:srgbClr val="1F1F1E"/>
+                    </a:solidFill>
+                  </a:tcPr>
+                </a:tc>
+                <a:extLst>
+                  <a:ext uri="{0D108BD9-81ED-4DB2-BD59-A6C34878D82A}">
+                    <a16:rowId xmlns:a16="http://schemas.microsoft.com/office/drawing/2014/main" val="1052558194"/>
+                  </a:ext>
+                </a:extLst>
+              </a:tr>
+              <a:tr h="517236">
+                <a:tc>
+                  <a:txBody>
+                    <a:bodyPr/>
+                    <a:lstStyle/>
+                    <a:p>
+                      <a:pPr fontAlgn="t">
+                        <a:buNone/>
+                      </a:pPr>
+                      <a:r>
+                        <a:rPr lang="en-IN" sz="2200" dirty="0">
+                          <a:solidFill>
+                            <a:schemeClr val="bg2"/>
+                          </a:solidFill>
+                          <a:effectLst/>
+                        </a:rPr>
+                        <a:t>Static Input Detection</a:t>
+                      </a:r>
+                    </a:p>
+                  </a:txBody>
+                  <a:tcPr>
+                    <a:lnL w="12700" cap="flat" cmpd="sng" algn="ctr">
+                      <a:solidFill>
+                        <a:srgbClr val="F0411C"/>
+                      </a:solidFill>
+                      <a:prstDash val="solid"/>
+                      <a:round/>
+                      <a:headEnd type="none" w="med" len="med"/>
+                      <a:tailEnd type="none" w="med" len="med"/>
+                    </a:lnL>
+                    <a:lnR w="12700" cap="flat" cmpd="sng" algn="ctr">
+                      <a:solidFill>
+                        <a:srgbClr val="D06BC8"/>
+                      </a:solidFill>
+                      <a:prstDash val="solid"/>
+                      <a:round/>
+                      <a:headEnd type="none" w="med" len="med"/>
+                      <a:tailEnd type="none" w="med" len="med"/>
+                    </a:lnR>
+                    <a:lnT w="12700" cap="flat" cmpd="sng" algn="ctr">
+                      <a:solidFill>
+                        <a:srgbClr val="F0411C"/>
+                      </a:solidFill>
+                      <a:prstDash val="solid"/>
+                      <a:round/>
+                      <a:headEnd type="none" w="med" len="med"/>
+                      <a:tailEnd type="none" w="med" len="med"/>
+                    </a:lnT>
+                    <a:lnB w="12700" cap="flat" cmpd="sng" algn="ctr">
+                      <a:solidFill>
+                        <a:srgbClr val="304D99"/>
+                      </a:solidFill>
+                      <a:prstDash val="solid"/>
+                      <a:round/>
+                      <a:headEnd type="none" w="med" len="med"/>
+                      <a:tailEnd type="none" w="med" len="med"/>
+                    </a:lnB>
+                    <a:solidFill>
+                      <a:srgbClr val="1F1F1E"/>
+                    </a:solidFill>
+                  </a:tcPr>
+                </a:tc>
+                <a:tc>
+                  <a:txBody>
+                    <a:bodyPr/>
+                    <a:lstStyle/>
+                    <a:p>
+                      <a:pPr fontAlgn="t">
+                        <a:buNone/>
+                      </a:pPr>
+                      <a:r>
+                        <a:rPr lang="en-IN" sz="2200" dirty="0" err="1">
+                          <a:solidFill>
+                            <a:schemeClr val="bg2"/>
+                          </a:solidFill>
+                          <a:effectLst/>
+                          <a:latin typeface="Anthropic Mono"/>
+                        </a:rPr>
+                        <a:t>scan_input_calls</a:t>
+                      </a:r>
+                      <a:r>
+                        <a:rPr lang="en-IN" sz="2200" dirty="0">
+                          <a:solidFill>
+                            <a:schemeClr val="bg2"/>
+                          </a:solidFill>
+                          <a:effectLst/>
+                          <a:latin typeface="Anthropic Mono"/>
+                        </a:rPr>
+                        <a:t>()</a:t>
+                      </a:r>
+                      <a:endParaRPr lang="en-IN" sz="2200" dirty="0">
+                        <a:solidFill>
+                          <a:schemeClr val="bg2"/>
+                        </a:solidFill>
+                        <a:effectLst/>
+                      </a:endParaRPr>
+                    </a:p>
+                  </a:txBody>
+                  <a:tcPr>
+                    <a:lnL w="12700" cap="flat" cmpd="sng" algn="ctr">
+                      <a:solidFill>
+                        <a:srgbClr val="D06BC8"/>
+                      </a:solidFill>
+                      <a:prstDash val="solid"/>
+                      <a:round/>
+                      <a:headEnd type="none" w="med" len="med"/>
+                      <a:tailEnd type="none" w="med" len="med"/>
+                    </a:lnL>
+                    <a:lnR w="12700" cap="flat" cmpd="sng" algn="ctr">
+                      <a:solidFill>
+                        <a:srgbClr val="302B45"/>
+                      </a:solidFill>
+                      <a:prstDash val="solid"/>
+                      <a:round/>
+                      <a:headEnd type="none" w="med" len="med"/>
+                      <a:tailEnd type="none" w="med" len="med"/>
+                    </a:lnR>
+                    <a:lnT w="12700" cap="flat" cmpd="sng" algn="ctr">
+                      <a:solidFill>
+                        <a:srgbClr val="D06BC8"/>
+                      </a:solidFill>
+                      <a:prstDash val="solid"/>
+                      <a:round/>
+                      <a:headEnd type="none" w="med" len="med"/>
+                      <a:tailEnd type="none" w="med" len="med"/>
+                    </a:lnT>
+                    <a:lnB w="12700" cap="flat" cmpd="sng" algn="ctr">
+                      <a:solidFill>
+                        <a:srgbClr val="9061C8"/>
+                      </a:solidFill>
+                      <a:prstDash val="solid"/>
+                      <a:round/>
+                      <a:headEnd type="none" w="med" len="med"/>
+                      <a:tailEnd type="none" w="med" len="med"/>
+                    </a:lnB>
+                    <a:solidFill>
+                      <a:srgbClr val="1F1F1E"/>
+                    </a:solidFill>
+                  </a:tcPr>
+                </a:tc>
+                <a:tc>
+                  <a:txBody>
+                    <a:bodyPr/>
+                    <a:lstStyle/>
+                    <a:p>
+                      <a:pPr fontAlgn="t">
+                        <a:buNone/>
+                      </a:pPr>
+                      <a:r>
+                        <a:rPr lang="en-US" sz="2200">
+                          <a:solidFill>
+                            <a:schemeClr val="bg2"/>
+                          </a:solidFill>
+                          <a:effectLst/>
+                        </a:rPr>
+                        <a:t>Find all input() calls before running</a:t>
+                      </a:r>
+                    </a:p>
+                  </a:txBody>
+                  <a:tcPr>
+                    <a:lnL w="12700" cap="flat" cmpd="sng" algn="ctr">
+                      <a:solidFill>
+                        <a:srgbClr val="302B45"/>
+                      </a:solidFill>
+                      <a:prstDash val="solid"/>
+                      <a:round/>
+                      <a:headEnd type="none" w="med" len="med"/>
+                      <a:tailEnd type="none" w="med" len="med"/>
+                    </a:lnL>
+                    <a:lnR w="12700" cap="flat" cmpd="sng" algn="ctr">
+                      <a:solidFill>
+                        <a:srgbClr val="302B45"/>
+                      </a:solidFill>
+                      <a:prstDash val="solid"/>
+                      <a:round/>
+                      <a:headEnd type="none" w="med" len="med"/>
+                      <a:tailEnd type="none" w="med" len="med"/>
+                    </a:lnR>
+                    <a:lnT w="12700" cap="flat" cmpd="sng" algn="ctr">
+                      <a:solidFill>
+                        <a:srgbClr val="302B45"/>
+                      </a:solidFill>
+                      <a:prstDash val="solid"/>
+                      <a:round/>
+                      <a:headEnd type="none" w="med" len="med"/>
+                      <a:tailEnd type="none" w="med" len="med"/>
+                    </a:lnT>
+                    <a:lnB w="12700" cap="flat" cmpd="sng" algn="ctr">
+                      <a:solidFill>
+                        <a:srgbClr val="704299"/>
+                      </a:solidFill>
+                      <a:prstDash val="solid"/>
+                      <a:round/>
+                      <a:headEnd type="none" w="med" len="med"/>
+                      <a:tailEnd type="none" w="med" len="med"/>
+                    </a:lnB>
+                    <a:solidFill>
+                      <a:srgbClr val="1F1F1E"/>
+                    </a:solidFill>
+                  </a:tcPr>
+                </a:tc>
+                <a:extLst>
+                  <a:ext uri="{0D108BD9-81ED-4DB2-BD59-A6C34878D82A}">
+                    <a16:rowId xmlns:a16="http://schemas.microsoft.com/office/drawing/2014/main" val="3663240378"/>
+                  </a:ext>
+                </a:extLst>
+              </a:tr>
+              <a:tr h="517236">
+                <a:tc>
+                  <a:txBody>
+                    <a:bodyPr/>
+                    <a:lstStyle/>
+                    <a:p>
+                      <a:pPr fontAlgn="t">
+                        <a:buNone/>
+                      </a:pPr>
+                      <a:r>
+                        <a:rPr lang="en-IN" sz="2200">
+                          <a:solidFill>
+                            <a:schemeClr val="bg2"/>
+                          </a:solidFill>
+                          <a:effectLst/>
+                        </a:rPr>
+                        <a:t>Sandboxed Execution</a:t>
+                      </a:r>
+                    </a:p>
+                  </a:txBody>
+                  <a:tcPr>
+                    <a:lnL w="12700" cap="flat" cmpd="sng" algn="ctr">
+                      <a:solidFill>
+                        <a:srgbClr val="304D99"/>
+                      </a:solidFill>
+                      <a:prstDash val="solid"/>
+                      <a:round/>
+                      <a:headEnd type="none" w="med" len="med"/>
+                      <a:tailEnd type="none" w="med" len="med"/>
+                    </a:lnL>
+                    <a:lnR w="12700" cap="flat" cmpd="sng" algn="ctr">
+                      <a:solidFill>
+                        <a:srgbClr val="9061C8"/>
+                      </a:solidFill>
+                      <a:prstDash val="solid"/>
+                      <a:round/>
+                      <a:headEnd type="none" w="med" len="med"/>
+                      <a:tailEnd type="none" w="med" len="med"/>
+                    </a:lnR>
+                    <a:lnT w="12700" cap="flat" cmpd="sng" algn="ctr">
+                      <a:solidFill>
+                        <a:srgbClr val="304D99"/>
+                      </a:solidFill>
+                      <a:prstDash val="solid"/>
+                      <a:round/>
+                      <a:headEnd type="none" w="med" len="med"/>
+                      <a:tailEnd type="none" w="med" len="med"/>
+                    </a:lnT>
+                    <a:lnB w="12700" cap="flat" cmpd="sng" algn="ctr">
+                      <a:solidFill>
+                        <a:srgbClr val="9058AC"/>
+                      </a:solidFill>
+                      <a:prstDash val="solid"/>
+                      <a:round/>
+                      <a:headEnd type="none" w="med" len="med"/>
+                      <a:tailEnd type="none" w="med" len="med"/>
+                    </a:lnB>
+                    <a:solidFill>
+                      <a:srgbClr val="1F1F1E"/>
+                    </a:solidFill>
+                  </a:tcPr>
+                </a:tc>
+                <a:tc>
+                  <a:txBody>
+                    <a:bodyPr/>
+                    <a:lstStyle/>
+                    <a:p>
+                      <a:pPr fontAlgn="t">
+                        <a:buNone/>
+                      </a:pPr>
+                      <a:r>
+                        <a:rPr lang="en-IN" sz="2200">
+                          <a:solidFill>
+                            <a:schemeClr val="bg2"/>
+                          </a:solidFill>
+                          <a:effectLst/>
+                          <a:latin typeface="Anthropic Mono"/>
+                        </a:rPr>
+                        <a:t>run_code_safe()</a:t>
+                      </a:r>
+                      <a:endParaRPr lang="en-IN" sz="2200">
+                        <a:solidFill>
+                          <a:schemeClr val="bg2"/>
+                        </a:solidFill>
+                        <a:effectLst/>
+                      </a:endParaRPr>
+                    </a:p>
+                  </a:txBody>
+                  <a:tcPr>
+                    <a:lnL w="12700" cap="flat" cmpd="sng" algn="ctr">
+                      <a:solidFill>
+                        <a:srgbClr val="9061C8"/>
+                      </a:solidFill>
+                      <a:prstDash val="solid"/>
+                      <a:round/>
+                      <a:headEnd type="none" w="med" len="med"/>
+                      <a:tailEnd type="none" w="med" len="med"/>
+                    </a:lnL>
+                    <a:lnR w="12700" cap="flat" cmpd="sng" algn="ctr">
+                      <a:solidFill>
+                        <a:srgbClr val="704299"/>
+                      </a:solidFill>
+                      <a:prstDash val="solid"/>
+                      <a:round/>
+                      <a:headEnd type="none" w="med" len="med"/>
+                      <a:tailEnd type="none" w="med" len="med"/>
+                    </a:lnR>
+                    <a:lnT w="12700" cap="flat" cmpd="sng" algn="ctr">
+                      <a:solidFill>
+                        <a:srgbClr val="9061C8"/>
+                      </a:solidFill>
+                      <a:prstDash val="solid"/>
+                      <a:round/>
+                      <a:headEnd type="none" w="med" len="med"/>
+                      <a:tailEnd type="none" w="med" len="med"/>
+                    </a:lnT>
+                    <a:lnB w="12700" cap="flat" cmpd="sng" algn="ctr">
+                      <a:solidFill>
+                        <a:srgbClr val="30421C"/>
+                      </a:solidFill>
+                      <a:prstDash val="solid"/>
+                      <a:round/>
+                      <a:headEnd type="none" w="med" len="med"/>
+                      <a:tailEnd type="none" w="med" len="med"/>
+                    </a:lnB>
+                    <a:solidFill>
+                      <a:srgbClr val="1F1F1E"/>
+                    </a:solidFill>
+                  </a:tcPr>
+                </a:tc>
+                <a:tc>
+                  <a:txBody>
+                    <a:bodyPr/>
+                    <a:lstStyle/>
+                    <a:p>
+                      <a:pPr fontAlgn="t">
+                        <a:buNone/>
+                      </a:pPr>
+                      <a:r>
+                        <a:rPr lang="en-IN" sz="2200">
+                          <a:solidFill>
+                            <a:schemeClr val="bg2"/>
+                          </a:solidFill>
+                          <a:effectLst/>
+                        </a:rPr>
+                        <a:t>Execute code safely</a:t>
+                      </a:r>
+                    </a:p>
+                  </a:txBody>
+                  <a:tcPr>
+                    <a:lnL w="12700" cap="flat" cmpd="sng" algn="ctr">
+                      <a:solidFill>
+                        <a:srgbClr val="704299"/>
+                      </a:solidFill>
+                      <a:prstDash val="solid"/>
+                      <a:round/>
+                      <a:headEnd type="none" w="med" len="med"/>
+                      <a:tailEnd type="none" w="med" len="med"/>
+                    </a:lnL>
+                    <a:lnR w="12700" cap="flat" cmpd="sng" algn="ctr">
+                      <a:solidFill>
+                        <a:srgbClr val="704299"/>
+                      </a:solidFill>
+                      <a:prstDash val="solid"/>
+                      <a:round/>
+                      <a:headEnd type="none" w="med" len="med"/>
+                      <a:tailEnd type="none" w="med" len="med"/>
+                    </a:lnR>
+                    <a:lnT w="12700" cap="flat" cmpd="sng" algn="ctr">
+                      <a:solidFill>
+                        <a:srgbClr val="704299"/>
+                      </a:solidFill>
+                      <a:prstDash val="solid"/>
+                      <a:round/>
+                      <a:headEnd type="none" w="med" len="med"/>
+                      <a:tailEnd type="none" w="med" len="med"/>
+                    </a:lnT>
+                    <a:lnB w="12700" cap="flat" cmpd="sng" algn="ctr">
+                      <a:solidFill>
+                        <a:srgbClr val="5033AC"/>
+                      </a:solidFill>
+                      <a:prstDash val="solid"/>
+                      <a:round/>
+                      <a:headEnd type="none" w="med" len="med"/>
+                      <a:tailEnd type="none" w="med" len="med"/>
+                    </a:lnB>
+                    <a:solidFill>
+                      <a:srgbClr val="1F1F1E"/>
+                    </a:solidFill>
+                  </a:tcPr>
+                </a:tc>
+                <a:extLst>
+                  <a:ext uri="{0D108BD9-81ED-4DB2-BD59-A6C34878D82A}">
+                    <a16:rowId xmlns:a16="http://schemas.microsoft.com/office/drawing/2014/main" val="480858625"/>
+                  </a:ext>
+                </a:extLst>
+              </a:tr>
+              <a:tr h="517236">
+                <a:tc>
+                  <a:txBody>
+                    <a:bodyPr/>
+                    <a:lstStyle/>
+                    <a:p>
+                      <a:pPr fontAlgn="t">
+                        <a:buNone/>
+                      </a:pPr>
+                      <a:r>
+                        <a:rPr lang="en-IN" sz="2200">
+                          <a:solidFill>
+                            <a:schemeClr val="bg2"/>
+                          </a:solidFill>
+                          <a:effectLst/>
+                        </a:rPr>
+                        <a:t>Token Authentication</a:t>
+                      </a:r>
+                    </a:p>
+                  </a:txBody>
+                  <a:tcPr>
+                    <a:lnL w="12700" cap="flat" cmpd="sng" algn="ctr">
+                      <a:solidFill>
+                        <a:srgbClr val="9058AC"/>
+                      </a:solidFill>
+                      <a:prstDash val="solid"/>
+                      <a:round/>
+                      <a:headEnd type="none" w="med" len="med"/>
+                      <a:tailEnd type="none" w="med" len="med"/>
+                    </a:lnL>
+                    <a:lnR w="12700" cap="flat" cmpd="sng" algn="ctr">
+                      <a:solidFill>
+                        <a:srgbClr val="30421C"/>
+                      </a:solidFill>
+                      <a:prstDash val="solid"/>
+                      <a:round/>
+                      <a:headEnd type="none" w="med" len="med"/>
+                      <a:tailEnd type="none" w="med" len="med"/>
+                    </a:lnR>
+                    <a:lnT w="12700" cap="flat" cmpd="sng" algn="ctr">
+                      <a:solidFill>
+                        <a:srgbClr val="9058AC"/>
+                      </a:solidFill>
+                      <a:prstDash val="solid"/>
+                      <a:round/>
+                      <a:headEnd type="none" w="med" len="med"/>
+                      <a:tailEnd type="none" w="med" len="med"/>
+                    </a:lnT>
+                    <a:lnB w="12700" cap="flat" cmpd="sng" algn="ctr">
+                      <a:solidFill>
+                        <a:srgbClr val="5033AC"/>
+                      </a:solidFill>
+                      <a:prstDash val="solid"/>
+                      <a:round/>
+                      <a:headEnd type="none" w="med" len="med"/>
+                      <a:tailEnd type="none" w="med" len="med"/>
+                    </a:lnB>
+                    <a:solidFill>
+                      <a:srgbClr val="1F1F1E"/>
+                    </a:solidFill>
+                  </a:tcPr>
+                </a:tc>
+                <a:tc>
+                  <a:txBody>
+                    <a:bodyPr/>
+                    <a:lstStyle/>
+                    <a:p>
+                      <a:pPr fontAlgn="t">
+                        <a:buNone/>
+                      </a:pPr>
+                      <a:r>
+                        <a:rPr lang="en-IN" sz="2200">
+                          <a:solidFill>
+                            <a:schemeClr val="bg2"/>
+                          </a:solidFill>
+                          <a:effectLst/>
+                          <a:latin typeface="Anthropic Mono"/>
+                        </a:rPr>
+                        <a:t>gen_token()</a:t>
+                      </a:r>
+                      <a:endParaRPr lang="en-IN" sz="2200">
+                        <a:solidFill>
+                          <a:schemeClr val="bg2"/>
+                        </a:solidFill>
+                        <a:effectLst/>
+                      </a:endParaRPr>
+                    </a:p>
+                  </a:txBody>
+                  <a:tcPr>
+                    <a:lnL w="12700" cap="flat" cmpd="sng" algn="ctr">
+                      <a:solidFill>
+                        <a:srgbClr val="30421C"/>
+                      </a:solidFill>
+                      <a:prstDash val="solid"/>
+                      <a:round/>
+                      <a:headEnd type="none" w="med" len="med"/>
+                      <a:tailEnd type="none" w="med" len="med"/>
+                    </a:lnL>
+                    <a:lnR w="12700" cap="flat" cmpd="sng" algn="ctr">
+                      <a:solidFill>
+                        <a:srgbClr val="5033AC"/>
+                      </a:solidFill>
+                      <a:prstDash val="solid"/>
+                      <a:round/>
+                      <a:headEnd type="none" w="med" len="med"/>
+                      <a:tailEnd type="none" w="med" len="med"/>
+                    </a:lnR>
+                    <a:lnT w="12700" cap="flat" cmpd="sng" algn="ctr">
+                      <a:solidFill>
+                        <a:srgbClr val="30421C"/>
+                      </a:solidFill>
+                      <a:prstDash val="solid"/>
+                      <a:round/>
+                      <a:headEnd type="none" w="med" len="med"/>
+                      <a:tailEnd type="none" w="med" len="med"/>
+                    </a:lnT>
+                    <a:lnB w="12700" cap="flat" cmpd="sng" algn="ctr">
+                      <a:solidFill>
+                        <a:srgbClr val="E0B2DA"/>
+                      </a:solidFill>
+                      <a:prstDash val="solid"/>
+                      <a:round/>
+                      <a:headEnd type="none" w="med" len="med"/>
+                      <a:tailEnd type="none" w="med" len="med"/>
+                    </a:lnB>
+                    <a:solidFill>
+                      <a:srgbClr val="1F1F1E"/>
+                    </a:solidFill>
+                  </a:tcPr>
+                </a:tc>
+                <a:tc>
+                  <a:txBody>
+                    <a:bodyPr/>
+                    <a:lstStyle/>
+                    <a:p>
+                      <a:pPr fontAlgn="t">
+                        <a:buNone/>
+                      </a:pPr>
+                      <a:r>
+                        <a:rPr lang="en-US" sz="2200">
+                          <a:solidFill>
+                            <a:schemeClr val="bg2"/>
+                          </a:solidFill>
+                          <a:effectLst/>
+                        </a:rPr>
+                        <a:t>Keep users logged in securely</a:t>
+                      </a:r>
+                    </a:p>
+                  </a:txBody>
+                  <a:tcPr>
+                    <a:lnL w="12700" cap="flat" cmpd="sng" algn="ctr">
+                      <a:solidFill>
+                        <a:srgbClr val="5033AC"/>
+                      </a:solidFill>
+                      <a:prstDash val="solid"/>
+                      <a:round/>
+                      <a:headEnd type="none" w="med" len="med"/>
+                      <a:tailEnd type="none" w="med" len="med"/>
+                    </a:lnL>
+                    <a:lnR w="12700" cap="flat" cmpd="sng" algn="ctr">
+                      <a:solidFill>
+                        <a:srgbClr val="5033AC"/>
+                      </a:solidFill>
+                      <a:prstDash val="solid"/>
+                      <a:round/>
+                      <a:headEnd type="none" w="med" len="med"/>
+                      <a:tailEnd type="none" w="med" len="med"/>
+                    </a:lnR>
+                    <a:lnT w="12700" cap="flat" cmpd="sng" algn="ctr">
+                      <a:solidFill>
+                        <a:srgbClr val="5033AC"/>
+                      </a:solidFill>
+                      <a:prstDash val="solid"/>
+                      <a:round/>
+                      <a:headEnd type="none" w="med" len="med"/>
+                      <a:tailEnd type="none" w="med" len="med"/>
+                    </a:lnT>
+                    <a:lnB w="12700" cap="flat" cmpd="sng" algn="ctr">
+                      <a:solidFill>
+                        <a:srgbClr val="90DE60"/>
+                      </a:solidFill>
+                      <a:prstDash val="solid"/>
+                      <a:round/>
+                      <a:headEnd type="none" w="med" len="med"/>
+                      <a:tailEnd type="none" w="med" len="med"/>
+                    </a:lnB>
+                    <a:solidFill>
+                      <a:srgbClr val="1F1F1E"/>
+                    </a:solidFill>
+                  </a:tcPr>
+                </a:tc>
+                <a:extLst>
+                  <a:ext uri="{0D108BD9-81ED-4DB2-BD59-A6C34878D82A}">
+                    <a16:rowId xmlns:a16="http://schemas.microsoft.com/office/drawing/2014/main" val="990520156"/>
+                  </a:ext>
+                </a:extLst>
+              </a:tr>
+              <a:tr h="517236">
+                <a:tc>
+                  <a:txBody>
+                    <a:bodyPr/>
+                    <a:lstStyle/>
+                    <a:p>
+                      <a:pPr fontAlgn="t">
+                        <a:buNone/>
+                      </a:pPr>
+                      <a:r>
+                        <a:rPr lang="en-IN" sz="2200">
+                          <a:solidFill>
+                            <a:schemeClr val="bg2"/>
+                          </a:solidFill>
+                          <a:effectLst/>
+                        </a:rPr>
+                        <a:t>OTP Generation</a:t>
+                      </a:r>
+                    </a:p>
+                  </a:txBody>
+                  <a:tcPr>
+                    <a:lnL w="12700" cap="flat" cmpd="sng" algn="ctr">
+                      <a:solidFill>
+                        <a:srgbClr val="5033AC"/>
+                      </a:solidFill>
+                      <a:prstDash val="solid"/>
+                      <a:round/>
+                      <a:headEnd type="none" w="med" len="med"/>
+                      <a:tailEnd type="none" w="med" len="med"/>
+                    </a:lnL>
+                    <a:lnR w="12700" cap="flat" cmpd="sng" algn="ctr">
+                      <a:solidFill>
+                        <a:srgbClr val="E0B2DA"/>
+                      </a:solidFill>
+                      <a:prstDash val="solid"/>
+                      <a:round/>
+                      <a:headEnd type="none" w="med" len="med"/>
+                      <a:tailEnd type="none" w="med" len="med"/>
+                    </a:lnR>
+                    <a:lnT w="12700" cap="flat" cmpd="sng" algn="ctr">
+                      <a:solidFill>
+                        <a:srgbClr val="5033AC"/>
+                      </a:solidFill>
+                      <a:prstDash val="solid"/>
+                      <a:round/>
+                      <a:headEnd type="none" w="med" len="med"/>
+                      <a:tailEnd type="none" w="med" len="med"/>
+                    </a:lnT>
+                    <a:lnB w="12700" cap="flat" cmpd="sng" algn="ctr">
+                      <a:solidFill>
+                        <a:srgbClr val="10DE60"/>
+                      </a:solidFill>
+                      <a:prstDash val="solid"/>
+                      <a:round/>
+                      <a:headEnd type="none" w="med" len="med"/>
+                      <a:tailEnd type="none" w="med" len="med"/>
+                    </a:lnB>
+                    <a:solidFill>
+                      <a:srgbClr val="1F1F1E"/>
+                    </a:solidFill>
+                  </a:tcPr>
+                </a:tc>
+                <a:tc>
+                  <a:txBody>
+                    <a:bodyPr/>
+                    <a:lstStyle/>
+                    <a:p>
+                      <a:pPr fontAlgn="t">
+                        <a:buNone/>
+                      </a:pPr>
+                      <a:r>
+                        <a:rPr lang="en-IN" sz="2200">
+                          <a:solidFill>
+                            <a:schemeClr val="bg2"/>
+                          </a:solidFill>
+                          <a:effectLst/>
+                          <a:latin typeface="Anthropic Mono"/>
+                        </a:rPr>
+                        <a:t>gen_otp()</a:t>
+                      </a:r>
+                      <a:endParaRPr lang="en-IN" sz="2200">
+                        <a:solidFill>
+                          <a:schemeClr val="bg2"/>
+                        </a:solidFill>
+                        <a:effectLst/>
+                      </a:endParaRPr>
+                    </a:p>
+                  </a:txBody>
+                  <a:tcPr>
+                    <a:lnL w="12700" cap="flat" cmpd="sng" algn="ctr">
+                      <a:solidFill>
+                        <a:srgbClr val="E0B2DA"/>
+                      </a:solidFill>
+                      <a:prstDash val="solid"/>
+                      <a:round/>
+                      <a:headEnd type="none" w="med" len="med"/>
+                      <a:tailEnd type="none" w="med" len="med"/>
+                    </a:lnL>
+                    <a:lnR w="12700" cap="flat" cmpd="sng" algn="ctr">
+                      <a:solidFill>
+                        <a:srgbClr val="90DE60"/>
+                      </a:solidFill>
+                      <a:prstDash val="solid"/>
+                      <a:round/>
+                      <a:headEnd type="none" w="med" len="med"/>
+                      <a:tailEnd type="none" w="med" len="med"/>
+                    </a:lnR>
+                    <a:lnT w="12700" cap="flat" cmpd="sng" algn="ctr">
+                      <a:solidFill>
+                        <a:srgbClr val="E0B2DA"/>
+                      </a:solidFill>
+                      <a:prstDash val="solid"/>
+                      <a:round/>
+                      <a:headEnd type="none" w="med" len="med"/>
+                      <a:tailEnd type="none" w="med" len="med"/>
+                    </a:lnT>
+                    <a:lnB w="12700" cap="flat" cmpd="sng" algn="ctr">
+                      <a:solidFill>
+                        <a:srgbClr val="50E060"/>
+                      </a:solidFill>
+                      <a:prstDash val="solid"/>
+                      <a:round/>
+                      <a:headEnd type="none" w="med" len="med"/>
+                      <a:tailEnd type="none" w="med" len="med"/>
+                    </a:lnB>
+                    <a:solidFill>
+                      <a:srgbClr val="1F1F1E"/>
+                    </a:solidFill>
+                  </a:tcPr>
+                </a:tc>
+                <a:tc>
+                  <a:txBody>
+                    <a:bodyPr/>
+                    <a:lstStyle/>
+                    <a:p>
+                      <a:pPr fontAlgn="t">
+                        <a:buNone/>
+                      </a:pPr>
+                      <a:r>
+                        <a:rPr lang="en-IN" sz="2200">
+                          <a:solidFill>
+                            <a:schemeClr val="bg2"/>
+                          </a:solidFill>
+                          <a:effectLst/>
+                        </a:rPr>
+                        <a:t>Verify mobile number</a:t>
+                      </a:r>
+                    </a:p>
+                  </a:txBody>
+                  <a:tcPr>
+                    <a:lnL w="12700" cap="flat" cmpd="sng" algn="ctr">
+                      <a:solidFill>
+                        <a:srgbClr val="90DE60"/>
+                      </a:solidFill>
+                      <a:prstDash val="solid"/>
+                      <a:round/>
+                      <a:headEnd type="none" w="med" len="med"/>
+                      <a:tailEnd type="none" w="med" len="med"/>
+                    </a:lnL>
+                    <a:lnR w="12700" cap="flat" cmpd="sng" algn="ctr">
+                      <a:solidFill>
+                        <a:srgbClr val="90DE60"/>
+                      </a:solidFill>
+                      <a:prstDash val="solid"/>
+                      <a:round/>
+                      <a:headEnd type="none" w="med" len="med"/>
+                      <a:tailEnd type="none" w="med" len="med"/>
+                    </a:lnR>
+                    <a:lnT w="12700" cap="flat" cmpd="sng" algn="ctr">
+                      <a:solidFill>
+                        <a:srgbClr val="90DE60"/>
+                      </a:solidFill>
+                      <a:prstDash val="solid"/>
+                      <a:round/>
+                      <a:headEnd type="none" w="med" len="med"/>
+                      <a:tailEnd type="none" w="med" len="med"/>
+                    </a:lnT>
+                    <a:lnB w="12700" cap="flat" cmpd="sng" algn="ctr">
+                      <a:solidFill>
+                        <a:srgbClr val="50EE60"/>
+                      </a:solidFill>
+                      <a:prstDash val="solid"/>
+                      <a:round/>
+                      <a:headEnd type="none" w="med" len="med"/>
+                      <a:tailEnd type="none" w="med" len="med"/>
+                    </a:lnB>
+                    <a:solidFill>
+                      <a:srgbClr val="1F1F1E"/>
+                    </a:solidFill>
+                  </a:tcPr>
+                </a:tc>
+                <a:extLst>
+                  <a:ext uri="{0D108BD9-81ED-4DB2-BD59-A6C34878D82A}">
+                    <a16:rowId xmlns:a16="http://schemas.microsoft.com/office/drawing/2014/main" val="4167610174"/>
+                  </a:ext>
+                </a:extLst>
+              </a:tr>
+              <a:tr h="517236">
+                <a:tc>
+                  <a:txBody>
+                    <a:bodyPr/>
+                    <a:lstStyle/>
+                    <a:p>
+                      <a:pPr fontAlgn="t">
+                        <a:buNone/>
+                      </a:pPr>
+                      <a:r>
+                        <a:rPr lang="en-IN" sz="2200">
+                          <a:solidFill>
+                            <a:schemeClr val="bg2"/>
+                          </a:solidFill>
+                          <a:effectLst/>
+                        </a:rPr>
+                        <a:t>SHA-256 Hashing</a:t>
+                      </a:r>
+                    </a:p>
+                  </a:txBody>
+                  <a:tcPr>
+                    <a:lnL w="12700" cap="flat" cmpd="sng" algn="ctr">
+                      <a:solidFill>
+                        <a:srgbClr val="10DE60"/>
+                      </a:solidFill>
+                      <a:prstDash val="solid"/>
+                      <a:round/>
+                      <a:headEnd type="none" w="med" len="med"/>
+                      <a:tailEnd type="none" w="med" len="med"/>
+                    </a:lnL>
+                    <a:lnR w="12700" cap="flat" cmpd="sng" algn="ctr">
+                      <a:solidFill>
+                        <a:srgbClr val="50E060"/>
+                      </a:solidFill>
+                      <a:prstDash val="solid"/>
+                      <a:round/>
+                      <a:headEnd type="none" w="med" len="med"/>
+                      <a:tailEnd type="none" w="med" len="med"/>
+                    </a:lnR>
+                    <a:lnT w="12700" cap="flat" cmpd="sng" algn="ctr">
+                      <a:solidFill>
+                        <a:srgbClr val="10DE60"/>
+                      </a:solidFill>
+                      <a:prstDash val="solid"/>
+                      <a:round/>
+                      <a:headEnd type="none" w="med" len="med"/>
+                      <a:tailEnd type="none" w="med" len="med"/>
+                    </a:lnT>
+                    <a:lnB w="12700" cap="flat" cmpd="sng" algn="ctr">
+                      <a:solidFill>
+                        <a:srgbClr val="D0F060"/>
+                      </a:solidFill>
+                      <a:prstDash val="solid"/>
+                      <a:round/>
+                      <a:headEnd type="none" w="med" len="med"/>
+                      <a:tailEnd type="none" w="med" len="med"/>
+                    </a:lnB>
+                    <a:solidFill>
+                      <a:srgbClr val="1F1F1E"/>
+                    </a:solidFill>
+                  </a:tcPr>
+                </a:tc>
+                <a:tc>
+                  <a:txBody>
+                    <a:bodyPr/>
+                    <a:lstStyle/>
+                    <a:p>
+                      <a:pPr fontAlgn="t">
+                        <a:buNone/>
+                      </a:pPr>
+                      <a:r>
+                        <a:rPr lang="en-IN" sz="2200">
+                          <a:solidFill>
+                            <a:schemeClr val="bg2"/>
+                          </a:solidFill>
+                          <a:effectLst/>
+                          <a:latin typeface="Anthropic Mono"/>
+                        </a:rPr>
+                        <a:t>hash_pw()</a:t>
+                      </a:r>
+                      <a:endParaRPr lang="en-IN" sz="2200">
+                        <a:solidFill>
+                          <a:schemeClr val="bg2"/>
+                        </a:solidFill>
+                        <a:effectLst/>
+                      </a:endParaRPr>
+                    </a:p>
+                  </a:txBody>
+                  <a:tcPr>
+                    <a:lnL w="12700" cap="flat" cmpd="sng" algn="ctr">
+                      <a:solidFill>
+                        <a:srgbClr val="50E060"/>
+                      </a:solidFill>
+                      <a:prstDash val="solid"/>
+                      <a:round/>
+                      <a:headEnd type="none" w="med" len="med"/>
+                      <a:tailEnd type="none" w="med" len="med"/>
+                    </a:lnL>
+                    <a:lnR w="12700" cap="flat" cmpd="sng" algn="ctr">
+                      <a:solidFill>
+                        <a:srgbClr val="50EE60"/>
+                      </a:solidFill>
+                      <a:prstDash val="solid"/>
+                      <a:round/>
+                      <a:headEnd type="none" w="med" len="med"/>
+                      <a:tailEnd type="none" w="med" len="med"/>
+                    </a:lnR>
+                    <a:lnT w="12700" cap="flat" cmpd="sng" algn="ctr">
+                      <a:solidFill>
+                        <a:srgbClr val="50E060"/>
+                      </a:solidFill>
+                      <a:prstDash val="solid"/>
+                      <a:round/>
+                      <a:headEnd type="none" w="med" len="med"/>
+                      <a:tailEnd type="none" w="med" len="med"/>
+                    </a:lnT>
+                    <a:lnB w="12700" cap="flat" cmpd="sng" algn="ctr">
+                      <a:solidFill>
+                        <a:srgbClr val="90F060"/>
+                      </a:solidFill>
+                      <a:prstDash val="solid"/>
+                      <a:round/>
+                      <a:headEnd type="none" w="med" len="med"/>
+                      <a:tailEnd type="none" w="med" len="med"/>
+                    </a:lnB>
+                    <a:solidFill>
+                      <a:srgbClr val="1F1F1E"/>
+                    </a:solidFill>
+                  </a:tcPr>
+                </a:tc>
+                <a:tc>
+                  <a:txBody>
+                    <a:bodyPr/>
+                    <a:lstStyle/>
+                    <a:p>
+                      <a:pPr fontAlgn="t">
+                        <a:buNone/>
+                      </a:pPr>
+                      <a:r>
+                        <a:rPr lang="en-IN" sz="2200">
+                          <a:solidFill>
+                            <a:schemeClr val="bg2"/>
+                          </a:solidFill>
+                          <a:effectLst/>
+                        </a:rPr>
+                        <a:t>Store passwords safely</a:t>
+                      </a:r>
+                    </a:p>
+                  </a:txBody>
+                  <a:tcPr>
+                    <a:lnL w="12700" cap="flat" cmpd="sng" algn="ctr">
+                      <a:solidFill>
+                        <a:srgbClr val="50EE60"/>
+                      </a:solidFill>
+                      <a:prstDash val="solid"/>
+                      <a:round/>
+                      <a:headEnd type="none" w="med" len="med"/>
+                      <a:tailEnd type="none" w="med" len="med"/>
+                    </a:lnL>
+                    <a:lnR w="12700" cap="flat" cmpd="sng" algn="ctr">
+                      <a:solidFill>
+                        <a:srgbClr val="50EE60"/>
+                      </a:solidFill>
+                      <a:prstDash val="solid"/>
+                      <a:round/>
+                      <a:headEnd type="none" w="med" len="med"/>
+                      <a:tailEnd type="none" w="med" len="med"/>
+                    </a:lnR>
+                    <a:lnT w="12700" cap="flat" cmpd="sng" algn="ctr">
+                      <a:solidFill>
+                        <a:srgbClr val="50EE60"/>
+                      </a:solidFill>
+                      <a:prstDash val="solid"/>
+                      <a:round/>
+                      <a:headEnd type="none" w="med" len="med"/>
+                      <a:tailEnd type="none" w="med" len="med"/>
+                    </a:lnT>
+                    <a:lnB w="12700" cap="flat" cmpd="sng" algn="ctr">
+                      <a:solidFill>
+                        <a:srgbClr val="90F260"/>
+                      </a:solidFill>
+                      <a:prstDash val="solid"/>
+                      <a:round/>
+                      <a:headEnd type="none" w="med" len="med"/>
+                      <a:tailEnd type="none" w="med" len="med"/>
+                    </a:lnB>
+                    <a:solidFill>
+                      <a:srgbClr val="1F1F1E"/>
+                    </a:solidFill>
+                  </a:tcPr>
+                </a:tc>
+                <a:extLst>
+                  <a:ext uri="{0D108BD9-81ED-4DB2-BD59-A6C34878D82A}">
+                    <a16:rowId xmlns:a16="http://schemas.microsoft.com/office/drawing/2014/main" val="3765812300"/>
+                  </a:ext>
+                </a:extLst>
+              </a:tr>
+              <a:tr h="517236">
+                <a:tc>
+                  <a:txBody>
+                    <a:bodyPr/>
+                    <a:lstStyle/>
+                    <a:p>
+                      <a:pPr fontAlgn="t">
+                        <a:buNone/>
+                      </a:pPr>
+                      <a:r>
+                        <a:rPr lang="en-IN" sz="2200">
+                          <a:solidFill>
+                            <a:schemeClr val="bg2"/>
+                          </a:solidFill>
+                          <a:effectLst/>
+                        </a:rPr>
+                        <a:t>Rule-Based NLP</a:t>
+                      </a:r>
+                    </a:p>
+                  </a:txBody>
+                  <a:tcPr>
+                    <a:lnL w="12700" cap="flat" cmpd="sng" algn="ctr">
+                      <a:solidFill>
+                        <a:srgbClr val="D0F060"/>
+                      </a:solidFill>
+                      <a:prstDash val="solid"/>
+                      <a:round/>
+                      <a:headEnd type="none" w="med" len="med"/>
+                      <a:tailEnd type="none" w="med" len="med"/>
+                    </a:lnL>
+                    <a:lnR w="12700" cap="flat" cmpd="sng" algn="ctr">
+                      <a:solidFill>
+                        <a:srgbClr val="90F060"/>
+                      </a:solidFill>
+                      <a:prstDash val="solid"/>
+                      <a:round/>
+                      <a:headEnd type="none" w="med" len="med"/>
+                      <a:tailEnd type="none" w="med" len="med"/>
+                    </a:lnR>
+                    <a:lnT w="12700" cap="flat" cmpd="sng" algn="ctr">
+                      <a:solidFill>
+                        <a:srgbClr val="D0F060"/>
+                      </a:solidFill>
+                      <a:prstDash val="solid"/>
+                      <a:round/>
+                      <a:headEnd type="none" w="med" len="med"/>
+                      <a:tailEnd type="none" w="med" len="med"/>
+                    </a:lnT>
+                    <a:lnB w="12700" cap="flat" cmpd="sng" algn="ctr">
+                      <a:solidFill>
+                        <a:srgbClr val="100061"/>
+                      </a:solidFill>
+                      <a:prstDash val="solid"/>
+                      <a:round/>
+                      <a:headEnd type="none" w="med" len="med"/>
+                      <a:tailEnd type="none" w="med" len="med"/>
+                    </a:lnB>
+                    <a:solidFill>
+                      <a:srgbClr val="1F1F1E"/>
+                    </a:solidFill>
+                  </a:tcPr>
+                </a:tc>
+                <a:tc>
+                  <a:txBody>
+                    <a:bodyPr/>
+                    <a:lstStyle/>
+                    <a:p>
+                      <a:pPr fontAlgn="t">
+                        <a:buNone/>
+                      </a:pPr>
+                      <a:r>
+                        <a:rPr lang="en-IN" sz="2200">
+                          <a:solidFill>
+                            <a:schemeClr val="bg2"/>
+                          </a:solidFill>
+                          <a:effectLst/>
+                          <a:latin typeface="Anthropic Mono"/>
+                        </a:rPr>
+                        <a:t>plain_english_explanation()</a:t>
+                      </a:r>
+                      <a:endParaRPr lang="en-IN" sz="2200">
+                        <a:solidFill>
+                          <a:schemeClr val="bg2"/>
+                        </a:solidFill>
+                        <a:effectLst/>
+                      </a:endParaRPr>
+                    </a:p>
+                  </a:txBody>
+                  <a:tcPr>
+                    <a:lnL w="12700" cap="flat" cmpd="sng" algn="ctr">
+                      <a:solidFill>
+                        <a:srgbClr val="90F060"/>
+                      </a:solidFill>
+                      <a:prstDash val="solid"/>
+                      <a:round/>
+                      <a:headEnd type="none" w="med" len="med"/>
+                      <a:tailEnd type="none" w="med" len="med"/>
+                    </a:lnL>
+                    <a:lnR w="12700" cap="flat" cmpd="sng" algn="ctr">
+                      <a:solidFill>
+                        <a:srgbClr val="90F260"/>
+                      </a:solidFill>
+                      <a:prstDash val="solid"/>
+                      <a:round/>
+                      <a:headEnd type="none" w="med" len="med"/>
+                      <a:tailEnd type="none" w="med" len="med"/>
+                    </a:lnR>
+                    <a:lnT w="12700" cap="flat" cmpd="sng" algn="ctr">
+                      <a:solidFill>
+                        <a:srgbClr val="90F060"/>
+                      </a:solidFill>
+                      <a:prstDash val="solid"/>
+                      <a:round/>
+                      <a:headEnd type="none" w="med" len="med"/>
+                      <a:tailEnd type="none" w="med" len="med"/>
+                    </a:lnT>
+                    <a:lnB w="12700" cap="flat" cmpd="sng" algn="ctr">
+                      <a:solidFill>
+                        <a:srgbClr val="50F560"/>
+                      </a:solidFill>
+                      <a:prstDash val="solid"/>
+                      <a:round/>
+                      <a:headEnd type="none" w="med" len="med"/>
+                      <a:tailEnd type="none" w="med" len="med"/>
+                    </a:lnB>
+                    <a:solidFill>
+                      <a:srgbClr val="1F1F1E"/>
+                    </a:solidFill>
+                  </a:tcPr>
+                </a:tc>
+                <a:tc>
+                  <a:txBody>
+                    <a:bodyPr/>
+                    <a:lstStyle/>
+                    <a:p>
+                      <a:pPr fontAlgn="t">
+                        <a:buNone/>
+                      </a:pPr>
+                      <a:r>
+                        <a:rPr lang="en-US" sz="2200">
+                          <a:solidFill>
+                            <a:schemeClr val="bg2"/>
+                          </a:solidFill>
+                          <a:effectLst/>
+                        </a:rPr>
+                        <a:t>Explain code in simple English</a:t>
+                      </a:r>
+                    </a:p>
+                  </a:txBody>
+                  <a:tcPr>
+                    <a:lnL w="12700" cap="flat" cmpd="sng" algn="ctr">
+                      <a:solidFill>
+                        <a:srgbClr val="90F260"/>
+                      </a:solidFill>
+                      <a:prstDash val="solid"/>
+                      <a:round/>
+                      <a:headEnd type="none" w="med" len="med"/>
+                      <a:tailEnd type="none" w="med" len="med"/>
+                    </a:lnL>
+                    <a:lnR w="12700" cap="flat" cmpd="sng" algn="ctr">
+                      <a:solidFill>
+                        <a:srgbClr val="90F260"/>
+                      </a:solidFill>
+                      <a:prstDash val="solid"/>
+                      <a:round/>
+                      <a:headEnd type="none" w="med" len="med"/>
+                      <a:tailEnd type="none" w="med" len="med"/>
+                    </a:lnR>
+                    <a:lnT w="12700" cap="flat" cmpd="sng" algn="ctr">
+                      <a:solidFill>
+                        <a:srgbClr val="90F260"/>
+                      </a:solidFill>
+                      <a:prstDash val="solid"/>
+                      <a:round/>
+                      <a:headEnd type="none" w="med" len="med"/>
+                      <a:tailEnd type="none" w="med" len="med"/>
+                    </a:lnT>
+                    <a:lnB w="12700" cap="flat" cmpd="sng" algn="ctr">
+                      <a:solidFill>
+                        <a:srgbClr val="90F860"/>
+                      </a:solidFill>
+                      <a:prstDash val="solid"/>
+                      <a:round/>
+                      <a:headEnd type="none" w="med" len="med"/>
+                      <a:tailEnd type="none" w="med" len="med"/>
+                    </a:lnB>
+                    <a:solidFill>
+                      <a:srgbClr val="1F1F1E"/>
+                    </a:solidFill>
+                  </a:tcPr>
+                </a:tc>
+                <a:extLst>
+                  <a:ext uri="{0D108BD9-81ED-4DB2-BD59-A6C34878D82A}">
+                    <a16:rowId xmlns:a16="http://schemas.microsoft.com/office/drawing/2014/main" val="1111292141"/>
+                  </a:ext>
+                </a:extLst>
+              </a:tr>
+              <a:tr h="923636">
+                <a:tc>
+                  <a:txBody>
+                    <a:bodyPr/>
+                    <a:lstStyle/>
+                    <a:p>
+                      <a:pPr fontAlgn="t">
+                        <a:buNone/>
+                      </a:pPr>
+                      <a:r>
+                        <a:rPr lang="en-IN" sz="2200">
+                          <a:solidFill>
+                            <a:schemeClr val="bg2"/>
+                          </a:solidFill>
+                          <a:effectLst/>
+                        </a:rPr>
+                        <a:t>Canvas Drawing</a:t>
+                      </a:r>
+                    </a:p>
+                  </a:txBody>
+                  <a:tcPr>
+                    <a:lnL w="12700" cap="flat" cmpd="sng" algn="ctr">
+                      <a:solidFill>
+                        <a:srgbClr val="100061"/>
+                      </a:solidFill>
+                      <a:prstDash val="solid"/>
+                      <a:round/>
+                      <a:headEnd type="none" w="med" len="med"/>
+                      <a:tailEnd type="none" w="med" len="med"/>
+                    </a:lnL>
+                    <a:lnR w="12700" cap="flat" cmpd="sng" algn="ctr">
+                      <a:solidFill>
+                        <a:srgbClr val="50F560"/>
+                      </a:solidFill>
+                      <a:prstDash val="solid"/>
+                      <a:round/>
+                      <a:headEnd type="none" w="med" len="med"/>
+                      <a:tailEnd type="none" w="med" len="med"/>
+                    </a:lnR>
+                    <a:lnT w="12700" cap="flat" cmpd="sng" algn="ctr">
+                      <a:solidFill>
+                        <a:srgbClr val="100061"/>
+                      </a:solidFill>
+                      <a:prstDash val="solid"/>
+                      <a:round/>
+                      <a:headEnd type="none" w="med" len="med"/>
+                      <a:tailEnd type="none" w="med" len="med"/>
+                    </a:lnT>
+                    <a:lnB w="4763" cap="flat" cmpd="sng" algn="ctr">
+                      <a:solidFill>
+                        <a:srgbClr val="100061"/>
+                      </a:solidFill>
+                      <a:prstDash val="solid"/>
+                      <a:round/>
+                      <a:headEnd type="none" w="med" len="med"/>
+                      <a:tailEnd type="none" w="med" len="med"/>
+                    </a:lnB>
+                    <a:solidFill>
+                      <a:srgbClr val="1F1F1E"/>
+                    </a:solidFill>
+                  </a:tcPr>
+                </a:tc>
+                <a:tc>
+                  <a:txBody>
+                    <a:bodyPr/>
+                    <a:lstStyle/>
+                    <a:p>
+                      <a:pPr fontAlgn="t">
+                        <a:buNone/>
+                      </a:pPr>
+                      <a:r>
+                        <a:rPr lang="en-IN" sz="2200" dirty="0" err="1">
+                          <a:solidFill>
+                            <a:schemeClr val="bg2"/>
+                          </a:solidFill>
+                          <a:effectLst/>
+                          <a:latin typeface="Anthropic Mono"/>
+                        </a:rPr>
+                        <a:t>handleDownload</a:t>
+                      </a:r>
+                      <a:r>
+                        <a:rPr lang="en-IN" sz="2200" dirty="0">
+                          <a:solidFill>
+                            <a:schemeClr val="bg2"/>
+                          </a:solidFill>
+                          <a:effectLst/>
+                          <a:latin typeface="Anthropic Mono"/>
+                        </a:rPr>
+                        <a:t>()</a:t>
+                      </a:r>
+                      <a:endParaRPr lang="en-IN" sz="2200" dirty="0">
+                        <a:solidFill>
+                          <a:schemeClr val="bg2"/>
+                        </a:solidFill>
+                        <a:effectLst/>
+                      </a:endParaRPr>
+                    </a:p>
+                  </a:txBody>
+                  <a:tcPr>
+                    <a:lnL w="12700" cap="flat" cmpd="sng" algn="ctr">
+                      <a:solidFill>
+                        <a:srgbClr val="50F560"/>
+                      </a:solidFill>
+                      <a:prstDash val="solid"/>
+                      <a:round/>
+                      <a:headEnd type="none" w="med" len="med"/>
+                      <a:tailEnd type="none" w="med" len="med"/>
+                    </a:lnL>
+                    <a:lnR w="12700" cap="flat" cmpd="sng" algn="ctr">
+                      <a:solidFill>
+                        <a:srgbClr val="90F860"/>
+                      </a:solidFill>
+                      <a:prstDash val="solid"/>
+                      <a:round/>
+                      <a:headEnd type="none" w="med" len="med"/>
+                      <a:tailEnd type="none" w="med" len="med"/>
+                    </a:lnR>
+                    <a:lnT w="12700" cap="flat" cmpd="sng" algn="ctr">
+                      <a:solidFill>
+                        <a:srgbClr val="50F560"/>
+                      </a:solidFill>
+                      <a:prstDash val="solid"/>
+                      <a:round/>
+                      <a:headEnd type="none" w="med" len="med"/>
+                      <a:tailEnd type="none" w="med" len="med"/>
+                    </a:lnT>
+                    <a:lnB w="4763" cap="flat" cmpd="sng" algn="ctr">
+                      <a:solidFill>
+                        <a:srgbClr val="50F560"/>
+                      </a:solidFill>
+                      <a:prstDash val="solid"/>
+                      <a:round/>
+                      <a:headEnd type="none" w="med" len="med"/>
+                      <a:tailEnd type="none" w="med" len="med"/>
+                    </a:lnB>
+                    <a:solidFill>
+                      <a:srgbClr val="1F1F1E"/>
+                    </a:solidFill>
+                  </a:tcPr>
+                </a:tc>
+                <a:tc>
+                  <a:txBody>
+                    <a:bodyPr/>
+                    <a:lstStyle/>
+                    <a:p>
+                      <a:pPr fontAlgn="t">
+                        <a:buNone/>
+                      </a:pPr>
+                      <a:r>
+                        <a:rPr lang="en-IN" sz="2200" dirty="0">
+                          <a:solidFill>
+                            <a:schemeClr val="bg2"/>
+                          </a:solidFill>
+                          <a:effectLst/>
+                        </a:rPr>
+                        <a:t>Generate downloadable PNG flowchart</a:t>
+                      </a:r>
+                    </a:p>
+                  </a:txBody>
+                  <a:tcPr>
+                    <a:lnL w="12700" cap="flat" cmpd="sng" algn="ctr">
+                      <a:solidFill>
+                        <a:srgbClr val="90F860"/>
+                      </a:solidFill>
+                      <a:prstDash val="solid"/>
+                      <a:round/>
+                      <a:headEnd type="none" w="med" len="med"/>
+                      <a:tailEnd type="none" w="med" len="med"/>
+                    </a:lnL>
+                    <a:lnR w="12700" cap="flat" cmpd="sng" algn="ctr">
+                      <a:solidFill>
+                        <a:srgbClr val="90F860"/>
+                      </a:solidFill>
+                      <a:prstDash val="solid"/>
+                      <a:round/>
+                      <a:headEnd type="none" w="med" len="med"/>
+                      <a:tailEnd type="none" w="med" len="med"/>
+                    </a:lnR>
+                    <a:lnT w="12700" cap="flat" cmpd="sng" algn="ctr">
+                      <a:solidFill>
+                        <a:srgbClr val="90F860"/>
+                      </a:solidFill>
+                      <a:prstDash val="solid"/>
+                      <a:round/>
+                      <a:headEnd type="none" w="med" len="med"/>
+                      <a:tailEnd type="none" w="med" len="med"/>
+                    </a:lnT>
+                    <a:lnB w="4763" cap="flat" cmpd="sng" algn="ctr">
+                      <a:solidFill>
+                        <a:srgbClr val="90F860"/>
+                      </a:solidFill>
+                      <a:prstDash val="solid"/>
+                      <a:round/>
+                      <a:headEnd type="none" w="med" len="med"/>
+                      <a:tailEnd type="none" w="med" len="med"/>
+                    </a:lnB>
+                    <a:solidFill>
+                      <a:srgbClr val="1F1F1E"/>
+                    </a:solidFill>
+                  </a:tcPr>
+                </a:tc>
+                <a:extLst>
+                  <a:ext uri="{0D108BD9-81ED-4DB2-BD59-A6C34878D82A}">
+                    <a16:rowId xmlns:a16="http://schemas.microsoft.com/office/drawing/2014/main" val="3141965883"/>
+                  </a:ext>
+                </a:extLst>
+              </a:tr>
+            </a:tbl>
+          </a:graphicData>
+        </a:graphic>
+      </p:graphicFrame>
+    </p:spTree>
+    <p:extLst>
+      <p:ext uri="{BB962C8B-B14F-4D97-AF65-F5344CB8AC3E}">
+        <p14:creationId xmlns:p14="http://schemas.microsoft.com/office/powerpoint/2010/main" val="3591533837"/>
+      </p:ext>
+    </p:extLst>
+  </p:cSld>
+  <p:clrMapOvr>
+    <a:masterClrMapping/>
+  </p:clrMapOvr>
+</p:sld>
+</file>
+
+<file path=ppt/slides/slide12.xml><?xml version="1.0" encoding="utf-8"?>
+<p:sld xmlns:a="http://schemas.openxmlformats.org/drawingml/2006/main" xmlns:r="http://schemas.openxmlformats.org/officeDocument/2006/relationships" xmlns:p="http://schemas.openxmlformats.org/presentationml/2006/main">
+  <p:cSld>
+    <p:spTree>
+      <p:nvGrpSpPr>
+        <p:cNvPr id="1" name=""/>
+        <p:cNvGrpSpPr/>
+        <p:nvPr/>
+      </p:nvGrpSpPr>
+      <p:grpSpPr>
+        <a:xfrm>
+          <a:off x="0" y="0"/>
+          <a:ext cx="0" cy="0"/>
+          <a:chOff x="0" y="0"/>
+          <a:chExt cx="0" cy="0"/>
+        </a:xfrm>
+      </p:grpSpPr>
+      <p:sp>
+        <p:nvSpPr>
+          <p:cNvPr id="2" name="Title 1">
+            <a:extLst>
+              <a:ext uri="{FF2B5EF4-FFF2-40B4-BE49-F238E27FC236}">
                 <a16:creationId xmlns:a16="http://schemas.microsoft.com/office/drawing/2014/main" id="{1DBBFFD4-CCAA-C3F1-66CF-EE79B189A5EC}"/>
               </a:ext>
             </a:extLst>
@@ -5623,7 +7959,7 @@
 </p:sld>
 </file>
 
-<file path=ppt/slides/slide12.xml><?xml version="1.0" encoding="utf-8"?>
+<file path=ppt/slides/slide13.xml><?xml version="1.0" encoding="utf-8"?>
 <p:sld xmlns:a="http://schemas.openxmlformats.org/drawingml/2006/main" xmlns:r="http://schemas.openxmlformats.org/officeDocument/2006/relationships" xmlns:p="http://schemas.openxmlformats.org/presentationml/2006/main">
   <p:cSld>
     <p:spTree>
@@ -6064,15 +8400,8 @@
             </a:r>
           </a:p>
           <a:p>
-            <a:r>
-              <a:rPr lang="en-US" sz="2800" dirty="0"/>
-              <a:t>Requires minimal training for users</a:t>
-            </a:r>
-          </a:p>
-          <a:p>
-            <a:pPr>
-              <a:buFont typeface="Arial" panose="020B0604020202020204" pitchFamily="34" charset="0"/>
-              <a:buChar char="•"/>
+            <a:pPr marL="0" indent="0">
+              <a:buNone/>
             </a:pPr>
             <a:endParaRPr lang="en-IN" b="1" dirty="0"/>
           </a:p>
@@ -6340,7 +8669,7 @@
           <a:p>
             <a:r>
               <a:rPr lang="en-IN" sz="3300" dirty="0"/>
-              <a:t>Automatic </a:t>
+              <a:t> </a:t>
             </a:r>
             <a:r>
               <a:rPr lang="en-IN" sz="3300" b="1" dirty="0"/>

--- a/RAGSY- CODE_TO_VISUALIZER.pptx
+++ b/RAGSY- CODE_TO_VISUALIZER.pptx
@@ -5,10 +5,10 @@
     <p:sldMasterId id="2147483660" r:id="rId1"/>
   </p:sldMasterIdLst>
   <p:notesMasterIdLst>
-    <p:notesMasterId r:id="rId15"/>
+    <p:notesMasterId r:id="rId16"/>
   </p:notesMasterIdLst>
   <p:handoutMasterIdLst>
-    <p:handoutMasterId r:id="rId16"/>
+    <p:handoutMasterId r:id="rId17"/>
   </p:handoutMasterIdLst>
   <p:sldIdLst>
     <p:sldId id="256" r:id="rId2"/>
@@ -20,30 +20,31 @@
     <p:sldId id="274" r:id="rId8"/>
     <p:sldId id="266" r:id="rId9"/>
     <p:sldId id="259" r:id="rId10"/>
-    <p:sldId id="261" r:id="rId11"/>
-    <p:sldId id="276" r:id="rId12"/>
-    <p:sldId id="275" r:id="rId13"/>
-    <p:sldId id="271" r:id="rId14"/>
+    <p:sldId id="276" r:id="rId11"/>
+    <p:sldId id="261" r:id="rId12"/>
+    <p:sldId id="277" r:id="rId13"/>
+    <p:sldId id="275" r:id="rId14"/>
+    <p:sldId id="271" r:id="rId15"/>
   </p:sldIdLst>
   <p:sldSz cx="14630400" cy="8229600"/>
   <p:notesSz cx="8229600" cy="14630400"/>
   <p:embeddedFontLst>
     <p:embeddedFont>
       <p:font typeface="Abadi" panose="020B0604020104020204" pitchFamily="34" charset="0"/>
-      <p:regular r:id="rId17"/>
-      <p:bold r:id="rId18"/>
-      <p:italic r:id="rId19"/>
-      <p:boldItalic r:id="rId20"/>
+      <p:regular r:id="rId18"/>
+      <p:bold r:id="rId19"/>
+      <p:italic r:id="rId20"/>
+      <p:boldItalic r:id="rId21"/>
     </p:embeddedFont>
     <p:embeddedFont>
       <p:font typeface="Garamond" panose="02020404030301010803" pitchFamily="18" charset="0"/>
-      <p:regular r:id="rId21"/>
-      <p:bold r:id="rId22"/>
-      <p:italic r:id="rId23"/>
+      <p:regular r:id="rId22"/>
+      <p:bold r:id="rId23"/>
+      <p:italic r:id="rId24"/>
     </p:embeddedFont>
     <p:embeddedFont>
       <p:font typeface="Lato Bold" panose="020B0604020202020204" charset="0"/>
-      <p:bold r:id="rId24"/>
+      <p:bold r:id="rId25"/>
     </p:embeddedFont>
   </p:embeddedFontLst>
   <p:defaultTextStyle>
@@ -246,7 +247,7 @@
           <a:p>
             <a:fld id="{1B513CE3-D9A5-4051-8901-5CD2DD1DC6DE}" type="datetimeFigureOut">
               <a:rPr lang="en-US" smtClean="0"/>
-              <a:t>4/25/2026</a:t>
+              <a:t>6/5/2026</a:t>
             </a:fld>
             <a:endParaRPr lang="en-US"/>
           </a:p>
@@ -953,7 +954,7 @@
           <a:p>
             <a:fld id="{F7021451-1387-4CA6-816F-3879F97B5CBC}" type="slidenum">
               <a:rPr lang="en-US"/>
-              <a:t>10</a:t>
+              <a:t>11</a:t>
             </a:fld>
             <a:endParaRPr lang="en-US"/>
           </a:p>
@@ -1110,7 +1111,7 @@
                 </a:solidFill>
               </a:rPr>
               <a:pPr/>
-              <a:t>25-Apr-26</a:t>
+              <a:t>5-Jun-26</a:t>
             </a:fld>
             <a:endParaRPr lang="en-IN" dirty="0">
               <a:solidFill>
@@ -1313,7 +1314,7 @@
                 </a:solidFill>
               </a:rPr>
               <a:pPr/>
-              <a:t>25-Apr-26</a:t>
+              <a:t>5-Jun-26</a:t>
             </a:fld>
             <a:endParaRPr lang="en-IN" dirty="0">
               <a:solidFill>
@@ -1526,7 +1527,7 @@
                 </a:solidFill>
               </a:rPr>
               <a:pPr/>
-              <a:t>25-Apr-26</a:t>
+              <a:t>5-Jun-26</a:t>
             </a:fld>
             <a:endParaRPr lang="en-IN" dirty="0">
               <a:solidFill>
@@ -1781,7 +1782,7 @@
               <a:pPr eaLnBrk="1" hangingPunct="1">
                 <a:defRPr/>
               </a:pPr>
-              <a:t>25 April 2026</a:t>
+              <a:t>05 June 2026</a:t>
             </a:fld>
             <a:endParaRPr lang="en-IN" sz="2160" dirty="0">
               <a:solidFill>
@@ -2101,7 +2102,7 @@
                 </a:solidFill>
               </a:rPr>
               <a:pPr/>
-              <a:t>25-Apr-26</a:t>
+              <a:t>5-Jun-26</a:t>
             </a:fld>
             <a:endParaRPr lang="en-IN" dirty="0">
               <a:solidFill>
@@ -2378,7 +2379,7 @@
                 </a:solidFill>
               </a:rPr>
               <a:pPr/>
-              <a:t>25-Apr-26</a:t>
+              <a:t>5-Jun-26</a:t>
             </a:fld>
             <a:endParaRPr lang="en-IN" dirty="0">
               <a:solidFill>
@@ -2643,7 +2644,7 @@
                 </a:solidFill>
               </a:rPr>
               <a:pPr/>
-              <a:t>25-Apr-26</a:t>
+              <a:t>5-Jun-26</a:t>
             </a:fld>
             <a:endParaRPr lang="en-IN" dirty="0">
               <a:solidFill>
@@ -3043,7 +3044,7 @@
                 </a:solidFill>
               </a:rPr>
               <a:pPr/>
-              <a:t>25-Apr-26</a:t>
+              <a:t>5-Jun-26</a:t>
             </a:fld>
             <a:endParaRPr lang="en-IN" dirty="0">
               <a:solidFill>
@@ -3194,7 +3195,7 @@
                 </a:solidFill>
               </a:rPr>
               <a:pPr/>
-              <a:t>25-Apr-26</a:t>
+              <a:t>5-Jun-26</a:t>
             </a:fld>
             <a:endParaRPr lang="en-IN" dirty="0">
               <a:solidFill>
@@ -3322,7 +3323,7 @@
                 </a:solidFill>
               </a:rPr>
               <a:pPr/>
-              <a:t>25-Apr-26</a:t>
+              <a:t>5-Jun-26</a:t>
             </a:fld>
             <a:endParaRPr lang="en-IN" dirty="0">
               <a:solidFill>
@@ -3632,7 +3633,7 @@
                 </a:solidFill>
               </a:rPr>
               <a:pPr/>
-              <a:t>25-Apr-26</a:t>
+              <a:t>5-Jun-26</a:t>
             </a:fld>
             <a:endParaRPr lang="en-IN" dirty="0">
               <a:solidFill>
@@ -3922,7 +3923,7 @@
                 </a:solidFill>
               </a:rPr>
               <a:pPr/>
-              <a:t>25-Apr-26</a:t>
+              <a:t>5-Jun-26</a:t>
             </a:fld>
             <a:endParaRPr lang="en-IN" dirty="0">
               <a:solidFill>
@@ -4168,7 +4169,7 @@
                 </a:solidFill>
               </a:rPr>
               <a:pPr/>
-              <a:t>25-Apr-26</a:t>
+              <a:t>5-Jun-26</a:t>
             </a:fld>
             <a:endParaRPr lang="en-US" dirty="0">
               <a:solidFill>
@@ -5270,7 +5271,7 @@
 
 <file path=ppt/slides/slide10.xml><?xml version="1.0" encoding="utf-8"?>
 <p:sld xmlns:a="http://schemas.openxmlformats.org/drawingml/2006/main" xmlns:r="http://schemas.openxmlformats.org/officeDocument/2006/relationships" xmlns:p="http://schemas.openxmlformats.org/presentationml/2006/main">
-  <p:cSld name="Slide 6">
+  <p:cSld>
     <p:spTree>
       <p:nvGrpSpPr>
         <p:cNvPr id="1" name=""/>
@@ -5287,10 +5288,10 @@
       </p:grpSpPr>
       <p:sp>
         <p:nvSpPr>
-          <p:cNvPr id="15" name="Title 14">
+          <p:cNvPr id="2" name="Title 1">
             <a:extLst>
               <a:ext uri="{FF2B5EF4-FFF2-40B4-BE49-F238E27FC236}">
-                <a16:creationId xmlns:a16="http://schemas.microsoft.com/office/drawing/2014/main" id="{EE40A0CD-CF65-4BC0-7683-6CD1176311A9}"/>
+                <a16:creationId xmlns:a16="http://schemas.microsoft.com/office/drawing/2014/main" id="{11432339-B9D5-B088-2FE4-0173491BED3D}"/>
               </a:ext>
             </a:extLst>
           </p:cNvPr>
@@ -5303,217 +5304,72 @@
         </p:nvSpPr>
         <p:spPr>
           <a:xfrm>
-            <a:off x="1005840" y="1439333"/>
-            <a:ext cx="12618720" cy="118534"/>
+            <a:off x="1005840" y="438153"/>
+            <a:ext cx="12618720" cy="1590676"/>
           </a:xfrm>
         </p:spPr>
         <p:txBody>
-          <a:bodyPr>
-            <a:normAutofit fontScale="90000"/>
+          <a:bodyPr anchor="ctr">
+            <a:normAutofit/>
           </a:bodyPr>
           <a:lstStyle/>
           <a:p>
             <a:r>
-              <a:rPr lang="en-IN" sz="3600" b="1" dirty="0"/>
-              <a:t>Software/Hardware Requirements</a:t>
+              <a:rPr lang="en-US" dirty="0"/>
+              <a:t>DB-DIAGRAM</a:t>
             </a:r>
             <a:br>
-              <a:rPr lang="en-IN" sz="3600" b="1" dirty="0"/>
+              <a:rPr lang="en-US" dirty="0"/>
             </a:br>
-            <a:endParaRPr lang="en-IN" sz="3600" dirty="0"/>
-          </a:p>
-        </p:txBody>
-      </p:sp>
-      <p:sp>
-        <p:nvSpPr>
-          <p:cNvPr id="16" name="Content Placeholder 15">
+            <a:endParaRPr lang="en-IN" dirty="0"/>
+          </a:p>
+        </p:txBody>
+      </p:sp>
+      <p:pic>
+        <p:nvPicPr>
+          <p:cNvPr id="5" name="Content Placeholder 4">
             <a:extLst>
               <a:ext uri="{FF2B5EF4-FFF2-40B4-BE49-F238E27FC236}">
-                <a16:creationId xmlns:a16="http://schemas.microsoft.com/office/drawing/2014/main" id="{0AAFCC12-704C-8A63-D453-CE91B04B0611}"/>
+                <a16:creationId xmlns:a16="http://schemas.microsoft.com/office/drawing/2014/main" id="{E95F1427-3AED-1D39-4D43-D5F5C62A232E}"/>
               </a:ext>
             </a:extLst>
           </p:cNvPr>
-          <p:cNvSpPr>
-            <a:spLocks noGrp="1"/>
-          </p:cNvSpPr>
+          <p:cNvPicPr>
+            <a:picLocks noGrp="1" noChangeAspect="1"/>
+          </p:cNvPicPr>
           <p:nvPr>
             <p:ph idx="1"/>
           </p:nvPr>
-        </p:nvSpPr>
+        </p:nvPicPr>
+        <p:blipFill>
+          <a:blip r:embed="rId2">
+            <a:extLst>
+              <a:ext uri="{28A0092B-C50C-407E-A947-70E740481C1C}">
+                <a14:useLocalDpi xmlns:a14="http://schemas.microsoft.com/office/drawing/2010/main" val="0"/>
+              </a:ext>
+            </a:extLst>
+          </a:blip>
+          <a:stretch>
+            <a:fillRect/>
+          </a:stretch>
+        </p:blipFill>
         <p:spPr>
           <a:xfrm>
-            <a:off x="1005840" y="1693333"/>
-            <a:ext cx="12618720" cy="5719023"/>
+            <a:off x="1005840" y="2190749"/>
+            <a:ext cx="11826240" cy="5600697"/>
           </a:xfrm>
+          <a:prstGeom prst="rect">
+            <a:avLst/>
+          </a:prstGeom>
+          <a:noFill/>
         </p:spPr>
-        <p:txBody>
-          <a:bodyPr>
-            <a:normAutofit fontScale="47500" lnSpcReduction="20000"/>
-          </a:bodyPr>
-          <a:lstStyle/>
-          <a:p>
-            <a:pPr>
-              <a:buFont typeface="Arial" panose="020B0604020202020204" pitchFamily="34" charset="0"/>
-              <a:buChar char="•"/>
-            </a:pPr>
-            <a:r>
-              <a:rPr lang="en-IN" b="1" u="sng" dirty="0"/>
-              <a:t>Software:</a:t>
-            </a:r>
-          </a:p>
-          <a:p>
-            <a:r>
-              <a:rPr lang="en-IN" dirty="0"/>
-              <a:t>Python – Backend Runtime</a:t>
-            </a:r>
-          </a:p>
-          <a:p>
-            <a:r>
-              <a:rPr lang="en-IN" dirty="0" err="1"/>
-              <a:t>FastAPI</a:t>
-            </a:r>
-            <a:r>
-              <a:rPr lang="en-IN" dirty="0"/>
-              <a:t> – </a:t>
-            </a:r>
-            <a:r>
-              <a:rPr lang="en-IN" dirty="0" err="1"/>
-              <a:t>RestAPI</a:t>
-            </a:r>
-            <a:r>
-              <a:rPr lang="en-IN" dirty="0"/>
-              <a:t> Framework</a:t>
-            </a:r>
-          </a:p>
-          <a:p>
-            <a:r>
-              <a:rPr lang="en-IN" dirty="0" err="1"/>
-              <a:t>Uvicorn</a:t>
-            </a:r>
-            <a:r>
-              <a:rPr lang="en-IN" dirty="0"/>
-              <a:t> – ASGI Server to Run </a:t>
-            </a:r>
-            <a:r>
-              <a:rPr lang="en-IN" dirty="0" err="1"/>
-              <a:t>FastAPI</a:t>
-            </a:r>
-            <a:endParaRPr lang="en-IN" dirty="0"/>
-          </a:p>
-          <a:p>
-            <a:r>
-              <a:rPr lang="en-IN" dirty="0" err="1"/>
-              <a:t>Pyodbc</a:t>
-            </a:r>
-            <a:r>
-              <a:rPr lang="en-IN" dirty="0"/>
-              <a:t> – SQL Server Database connector</a:t>
-            </a:r>
-          </a:p>
-          <a:p>
-            <a:r>
-              <a:rPr lang="en-IN" dirty="0"/>
-              <a:t>Requests – HTTP Calls for FAST2SMS OTP</a:t>
-            </a:r>
-          </a:p>
-          <a:p>
-            <a:r>
-              <a:rPr lang="en-IN" dirty="0"/>
-              <a:t>NPM- Package Manager</a:t>
-            </a:r>
-          </a:p>
-          <a:p>
-            <a:r>
-              <a:rPr lang="en-IN" dirty="0"/>
-              <a:t>React – UI Framework</a:t>
-            </a:r>
-          </a:p>
-          <a:p>
-            <a:r>
-              <a:rPr lang="en-IN" dirty="0" err="1"/>
-              <a:t>ReactFlow</a:t>
-            </a:r>
-            <a:r>
-              <a:rPr lang="en-IN" dirty="0"/>
-              <a:t> – Interactive Flowchart rendering</a:t>
-            </a:r>
-          </a:p>
-          <a:p>
-            <a:r>
-              <a:rPr lang="en-IN" dirty="0"/>
-              <a:t>Vite – Frontend build tool/ dev Server</a:t>
-            </a:r>
-          </a:p>
-          <a:p>
-            <a:r>
-              <a:rPr lang="en-IN" dirty="0"/>
-              <a:t>SQL Server –Main </a:t>
-            </a:r>
-            <a:r>
-              <a:rPr lang="en-IN" dirty="0" err="1"/>
-              <a:t>db</a:t>
-            </a:r>
-            <a:endParaRPr lang="en-IN" dirty="0"/>
-          </a:p>
-          <a:p>
-            <a:r>
-              <a:rPr lang="en-IN" dirty="0"/>
-              <a:t>SSMS – Database management UI</a:t>
-            </a:r>
-          </a:p>
-          <a:p>
-            <a:r>
-              <a:rPr lang="en-IN" dirty="0"/>
-              <a:t>ODBC Driver – driver to connect </a:t>
-            </a:r>
-            <a:r>
-              <a:rPr lang="en-IN" dirty="0" err="1"/>
-              <a:t>Pyodbc</a:t>
-            </a:r>
-            <a:r>
-              <a:rPr lang="en-IN" dirty="0"/>
-              <a:t> to connect </a:t>
-            </a:r>
-            <a:r>
-              <a:rPr lang="en-IN"/>
-              <a:t>python for SQL server</a:t>
-            </a:r>
-            <a:endParaRPr lang="en-IN" dirty="0"/>
-          </a:p>
-          <a:p>
-            <a:pPr>
-              <a:buFont typeface="Arial" panose="020B0604020202020204" pitchFamily="34" charset="0"/>
-              <a:buChar char="•"/>
-            </a:pPr>
-            <a:r>
-              <a:rPr lang="en-IN" b="1" u="sng" dirty="0"/>
-              <a:t>Hardware:</a:t>
-            </a:r>
-          </a:p>
-          <a:p>
-            <a:r>
-              <a:rPr lang="en-IN" dirty="0"/>
-              <a:t>Minimum 4GB RAM</a:t>
-            </a:r>
-          </a:p>
-          <a:p>
-            <a:r>
-              <a:rPr lang="en-IN" dirty="0"/>
-              <a:t>Laptop/Desktop</a:t>
-            </a:r>
-          </a:p>
-          <a:p>
-            <a:pPr marL="0" indent="0">
-              <a:buNone/>
-            </a:pPr>
-            <a:br>
-              <a:rPr lang="en-IN" dirty="0"/>
-            </a:br>
-            <a:endParaRPr lang="en-IN" dirty="0"/>
-          </a:p>
-        </p:txBody>
-      </p:sp>
+      </p:pic>
     </p:spTree>
+    <p:extLst>
+      <p:ext uri="{BB962C8B-B14F-4D97-AF65-F5344CB8AC3E}">
+        <p14:creationId xmlns:p14="http://schemas.microsoft.com/office/powerpoint/2010/main" val="387012404"/>
+      </p:ext>
+    </p:extLst>
   </p:cSld>
   <p:clrMapOvr>
     <a:masterClrMapping/>
@@ -5540,10 +5396,10 @@
       </p:grpSpPr>
       <p:sp>
         <p:nvSpPr>
-          <p:cNvPr id="2" name="Title 1">
+          <p:cNvPr id="15" name="Title 14">
             <a:extLst>
               <a:ext uri="{FF2B5EF4-FFF2-40B4-BE49-F238E27FC236}">
-                <a16:creationId xmlns:a16="http://schemas.microsoft.com/office/drawing/2014/main" id="{AF2EA3AE-9108-9DAD-42F9-DE1E9BDEAC06}"/>
+                <a16:creationId xmlns:a16="http://schemas.microsoft.com/office/drawing/2014/main" id="{EE40A0CD-CF65-4BC0-7683-6CD1176311A9}"/>
               </a:ext>
             </a:extLst>
           </p:cNvPr>
@@ -5554,26 +5410,73 @@
             <p:ph type="title"/>
           </p:nvPr>
         </p:nvSpPr>
-        <p:spPr/>
+        <p:spPr>
+          <a:xfrm>
+            <a:off x="1005840" y="438153"/>
+            <a:ext cx="12618720" cy="1590676"/>
+          </a:xfrm>
+        </p:spPr>
+        <p:txBody>
+          <a:bodyPr anchor="ctr">
+            <a:normAutofit/>
+          </a:bodyPr>
+          <a:lstStyle/>
+          <a:p>
+            <a:r>
+              <a:rPr lang="en-US" b="1" dirty="0"/>
+              <a:t>Software Specifications</a:t>
+            </a:r>
+            <a:br>
+              <a:rPr lang="en-IN" b="1"/>
+            </a:br>
+            <a:endParaRPr lang="en-IN"/>
+          </a:p>
+        </p:txBody>
+      </p:sp>
+      <p:sp>
+        <p:nvSpPr>
+          <p:cNvPr id="16" name="Content Placeholder 15">
+            <a:extLst>
+              <a:ext uri="{FF2B5EF4-FFF2-40B4-BE49-F238E27FC236}">
+                <a16:creationId xmlns:a16="http://schemas.microsoft.com/office/drawing/2014/main" id="{0AAFCC12-704C-8A63-D453-CE91B04B0611}"/>
+              </a:ext>
+            </a:extLst>
+          </p:cNvPr>
+          <p:cNvSpPr>
+            <a:spLocks noGrp="1"/>
+          </p:cNvSpPr>
+          <p:nvPr>
+            <p:ph sz="half" idx="2"/>
+          </p:nvPr>
+        </p:nvSpPr>
+        <p:spPr>
+          <a:xfrm>
+            <a:off x="7894319" y="2190764"/>
+            <a:ext cx="6217920" cy="5221606"/>
+          </a:xfrm>
+        </p:spPr>
         <p:txBody>
           <a:bodyPr>
             <a:normAutofit/>
           </a:bodyPr>
           <a:lstStyle/>
           <a:p>
-            <a:r>
-              <a:rPr lang="en-IN" sz="2600" b="1" dirty="0"/>
-              <a:t>Algorithms:</a:t>
-            </a:r>
+            <a:pPr marL="0" indent="0">
+              <a:buNone/>
+            </a:pPr>
+            <a:br>
+              <a:rPr lang="en-IN" dirty="0"/>
+            </a:br>
+            <a:endParaRPr lang="en-IN" dirty="0"/>
           </a:p>
         </p:txBody>
       </p:sp>
       <p:graphicFrame>
         <p:nvGraphicFramePr>
-          <p:cNvPr id="4" name="Content Placeholder 3">
+          <p:cNvPr id="2" name="Table 1">
             <a:extLst>
               <a:ext uri="{FF2B5EF4-FFF2-40B4-BE49-F238E27FC236}">
-                <a16:creationId xmlns:a16="http://schemas.microsoft.com/office/drawing/2014/main" id="{C1A275A7-053B-34F8-02D2-220BE5E19FF5}"/>
+                <a16:creationId xmlns:a16="http://schemas.microsoft.com/office/drawing/2014/main" id="{76A1BBC9-09F7-BB27-276C-001B058D728D}"/>
               </a:ext>
             </a:extLst>
           </p:cNvPr>
@@ -5581,2261 +5484,1311 @@
             <a:graphicFrameLocks noGrp="1"/>
           </p:cNvGraphicFramePr>
           <p:nvPr>
-            <p:ph idx="1"/>
             <p:extLst>
               <p:ext uri="{D42A27DB-BD31-4B8C-83A1-F6EECF244321}">
-                <p14:modId xmlns:p14="http://schemas.microsoft.com/office/powerpoint/2010/main" val="4009724170"/>
+                <p14:modId xmlns:p14="http://schemas.microsoft.com/office/powerpoint/2010/main" val="1564652081"/>
               </p:ext>
             </p:extLst>
           </p:nvPr>
         </p:nvGraphicFramePr>
         <p:xfrm>
-          <a:off x="1006475" y="1695449"/>
-          <a:ext cx="12617451" cy="6340760"/>
+          <a:off x="1005840" y="2028829"/>
+          <a:ext cx="12618720" cy="5762625"/>
         </p:xfrm>
         <a:graphic>
           <a:graphicData uri="http://schemas.openxmlformats.org/drawingml/2006/table">
             <a:tbl>
-              <a:tblPr/>
+              <a:tblPr firstRow="1" firstCol="1" bandRow="1">
+                <a:tableStyleId>{8EC20E35-A176-4012-BC5E-935CFFF8708E}</a:tableStyleId>
+              </a:tblPr>
               <a:tblGrid>
-                <a:gridCol w="4205817">
+                <a:gridCol w="4984196">
                   <a:extLst>
                     <a:ext uri="{9D8B030D-6E8A-4147-A177-3AD203B41FA5}">
-                      <a16:colId xmlns:a16="http://schemas.microsoft.com/office/drawing/2014/main" val="1753071766"/>
+                      <a16:colId xmlns:a16="http://schemas.microsoft.com/office/drawing/2014/main" val="3077271221"/>
                     </a:ext>
                   </a:extLst>
                 </a:gridCol>
-                <a:gridCol w="4205817">
+                <a:gridCol w="947141">
                   <a:extLst>
                     <a:ext uri="{9D8B030D-6E8A-4147-A177-3AD203B41FA5}">
-                      <a16:colId xmlns:a16="http://schemas.microsoft.com/office/drawing/2014/main" val="3097947666"/>
+                      <a16:colId xmlns:a16="http://schemas.microsoft.com/office/drawing/2014/main" val="613901148"/>
                     </a:ext>
                   </a:extLst>
                 </a:gridCol>
-                <a:gridCol w="4205817">
+                <a:gridCol w="6687383">
                   <a:extLst>
                     <a:ext uri="{9D8B030D-6E8A-4147-A177-3AD203B41FA5}">
-                      <a16:colId xmlns:a16="http://schemas.microsoft.com/office/drawing/2014/main" val="238821683"/>
+                      <a16:colId xmlns:a16="http://schemas.microsoft.com/office/drawing/2014/main" val="2831498649"/>
                     </a:ext>
                   </a:extLst>
                 </a:gridCol>
               </a:tblGrid>
-              <a:tr h="517236">
+              <a:tr h="384175">
                 <a:tc>
                   <a:txBody>
                     <a:bodyPr/>
                     <a:lstStyle/>
                     <a:p>
-                      <a:pPr fontAlgn="t">
+                      <a:pPr marR="221615" algn="just">
+                        <a:lnSpc>
+                          <a:spcPct val="150000"/>
+                        </a:lnSpc>
                         <a:buNone/>
                       </a:pPr>
                       <a:r>
-                        <a:rPr lang="en-IN" sz="2200" b="0">
-                          <a:solidFill>
-                            <a:schemeClr val="bg2"/>
-                          </a:solidFill>
+                        <a:rPr lang="en-IN" sz="1400" kern="100">
                           <a:effectLst/>
                         </a:rPr>
-                        <a:t>Algorithm</a:t>
+                        <a:t>Category</a:t>
                       </a:r>
+                      <a:endParaRPr lang="en-IN" sz="1400" kern="100">
+                        <a:effectLst/>
+                        <a:latin typeface="Calibri" panose="020F0502020204030204" pitchFamily="34" charset="0"/>
+                        <a:ea typeface="Times New Roman" panose="02020603050405020304" pitchFamily="18" charset="0"/>
+                      </a:endParaRPr>
                     </a:p>
                   </a:txBody>
-                  <a:tcPr>
-                    <a:lnL w="12700" cap="flat" cmpd="sng" algn="ctr">
-                      <a:solidFill>
-                        <a:srgbClr val="B05199"/>
-                      </a:solidFill>
-                      <a:prstDash val="solid"/>
-                      <a:round/>
-                      <a:headEnd type="none" w="med" len="med"/>
-                      <a:tailEnd type="none" w="med" len="med"/>
-                    </a:lnL>
-                    <a:lnR w="12700" cap="flat" cmpd="sng" algn="ctr">
-                      <a:solidFill>
-                        <a:srgbClr val="B04A99"/>
-                      </a:solidFill>
-                      <a:prstDash val="solid"/>
-                      <a:round/>
-                      <a:headEnd type="none" w="med" len="med"/>
-                      <a:tailEnd type="none" w="med" len="med"/>
-                    </a:lnR>
-                    <a:lnT w="12700" cap="flat" cmpd="sng" algn="ctr">
-                      <a:solidFill>
-                        <a:srgbClr val="B05199"/>
-                      </a:solidFill>
-                      <a:prstDash val="solid"/>
-                      <a:round/>
-                      <a:headEnd type="none" w="med" len="med"/>
-                      <a:tailEnd type="none" w="med" len="med"/>
-                    </a:lnT>
-                    <a:lnB w="12700" cap="flat" cmpd="sng" algn="ctr">
-                      <a:solidFill>
-                        <a:srgbClr val="606EA9"/>
-                      </a:solidFill>
-                      <a:prstDash val="solid"/>
-                      <a:round/>
-                      <a:headEnd type="none" w="med" len="med"/>
-                      <a:tailEnd type="none" w="med" len="med"/>
-                    </a:lnB>
-                    <a:solidFill>
-                      <a:srgbClr val="1F1F1E"/>
-                    </a:solidFill>
-                  </a:tcPr>
+                  <a:tcPr marL="9718" marR="9718" marT="9718" marB="9718" anchor="ctr"/>
                 </a:tc>
                 <a:tc>
                   <a:txBody>
                     <a:bodyPr/>
                     <a:lstStyle/>
                     <a:p>
-                      <a:pPr fontAlgn="t">
+                      <a:pPr>
+                        <a:lnSpc>
+                          <a:spcPct val="115000"/>
+                        </a:lnSpc>
                         <a:buNone/>
                       </a:pPr>
-                      <a:r>
-                        <a:rPr lang="en-IN" sz="2200" b="0">
-                          <a:solidFill>
-                            <a:schemeClr val="bg2"/>
-                          </a:solidFill>
-                          <a:effectLst/>
-                        </a:rPr>
-                        <a:t>Where Used</a:t>
-                      </a:r>
+                      <a:endParaRPr lang="en-IN" sz="1200" kern="100">
+                        <a:effectLst/>
+                        <a:latin typeface="Aptos" panose="020B0004020202020204" pitchFamily="34" charset="0"/>
+                      </a:endParaRPr>
                     </a:p>
                   </a:txBody>
-                  <a:tcPr>
-                    <a:lnL w="12700" cap="flat" cmpd="sng" algn="ctr">
-                      <a:solidFill>
-                        <a:srgbClr val="B04A99"/>
-                      </a:solidFill>
-                      <a:prstDash val="solid"/>
-                      <a:round/>
-                      <a:headEnd type="none" w="med" len="med"/>
-                      <a:tailEnd type="none" w="med" len="med"/>
-                    </a:lnL>
-                    <a:lnR w="12700" cap="flat" cmpd="sng" algn="ctr">
-                      <a:solidFill>
-                        <a:srgbClr val="F05799"/>
-                      </a:solidFill>
-                      <a:prstDash val="solid"/>
-                      <a:round/>
-                      <a:headEnd type="none" w="med" len="med"/>
-                      <a:tailEnd type="none" w="med" len="med"/>
-                    </a:lnR>
-                    <a:lnT w="12700" cap="flat" cmpd="sng" algn="ctr">
-                      <a:solidFill>
-                        <a:srgbClr val="B04A99"/>
-                      </a:solidFill>
-                      <a:prstDash val="solid"/>
-                      <a:round/>
-                      <a:headEnd type="none" w="med" len="med"/>
-                      <a:tailEnd type="none" w="med" len="med"/>
-                    </a:lnT>
-                    <a:lnB w="12700" cap="flat" cmpd="sng" algn="ctr">
-                      <a:solidFill>
-                        <a:srgbClr val="606EA9"/>
-                      </a:solidFill>
-                      <a:prstDash val="solid"/>
-                      <a:round/>
-                      <a:headEnd type="none" w="med" len="med"/>
-                      <a:tailEnd type="none" w="med" len="med"/>
-                    </a:lnB>
-                    <a:solidFill>
-                      <a:srgbClr val="1F1F1E"/>
-                    </a:solidFill>
-                  </a:tcPr>
+                  <a:tcPr marL="9718" marR="9718" marT="9718" marB="9718" anchor="ctr"/>
                 </a:tc>
                 <a:tc>
                   <a:txBody>
                     <a:bodyPr/>
                     <a:lstStyle/>
                     <a:p>
-                      <a:pPr fontAlgn="t">
+                      <a:pPr marR="221615" algn="just">
+                        <a:lnSpc>
+                          <a:spcPct val="150000"/>
+                        </a:lnSpc>
                         <a:buNone/>
                       </a:pPr>
                       <a:r>
-                        <a:rPr lang="en-IN" sz="2200" b="0">
-                          <a:solidFill>
-                            <a:schemeClr val="bg2"/>
-                          </a:solidFill>
+                        <a:rPr lang="en-IN" sz="1400" kern="100">
                           <a:effectLst/>
                         </a:rPr>
-                        <a:t>Purpose</a:t>
+                        <a:t>Technology</a:t>
                       </a:r>
+                      <a:endParaRPr lang="en-IN" sz="1400" kern="100">
+                        <a:effectLst/>
+                        <a:latin typeface="Calibri" panose="020F0502020204030204" pitchFamily="34" charset="0"/>
+                        <a:ea typeface="Times New Roman" panose="02020603050405020304" pitchFamily="18" charset="0"/>
+                      </a:endParaRPr>
                     </a:p>
                   </a:txBody>
-                  <a:tcPr>
-                    <a:lnL w="12700" cap="flat" cmpd="sng" algn="ctr">
-                      <a:solidFill>
-                        <a:srgbClr val="F05799"/>
-                      </a:solidFill>
-                      <a:prstDash val="solid"/>
-                      <a:round/>
-                      <a:headEnd type="none" w="med" len="med"/>
-                      <a:tailEnd type="none" w="med" len="med"/>
-                    </a:lnL>
-                    <a:lnR w="12700" cap="flat" cmpd="sng" algn="ctr">
-                      <a:solidFill>
-                        <a:srgbClr val="F05799"/>
-                      </a:solidFill>
-                      <a:prstDash val="solid"/>
-                      <a:round/>
-                      <a:headEnd type="none" w="med" len="med"/>
-                      <a:tailEnd type="none" w="med" len="med"/>
-                    </a:lnR>
-                    <a:lnT w="12700" cap="flat" cmpd="sng" algn="ctr">
-                      <a:solidFill>
-                        <a:srgbClr val="F05799"/>
-                      </a:solidFill>
-                      <a:prstDash val="solid"/>
-                      <a:round/>
-                      <a:headEnd type="none" w="med" len="med"/>
-                      <a:tailEnd type="none" w="med" len="med"/>
-                    </a:lnT>
-                    <a:lnB w="12700" cap="flat" cmpd="sng" algn="ctr">
-                      <a:solidFill>
-                        <a:srgbClr val="A072A9"/>
-                      </a:solidFill>
-                      <a:prstDash val="solid"/>
-                      <a:round/>
-                      <a:headEnd type="none" w="med" len="med"/>
-                      <a:tailEnd type="none" w="med" len="med"/>
-                    </a:lnB>
-                    <a:solidFill>
-                      <a:srgbClr val="1F1F1E"/>
-                    </a:solidFill>
-                  </a:tcPr>
+                  <a:tcPr marL="9718" marR="9718" marT="9718" marB="9718" anchor="ctr"/>
                 </a:tc>
                 <a:extLst>
                   <a:ext uri="{0D108BD9-81ED-4DB2-BD59-A6C34878D82A}">
-                    <a16:rowId xmlns:a16="http://schemas.microsoft.com/office/drawing/2014/main" val="1235403304"/>
+                    <a16:rowId xmlns:a16="http://schemas.microsoft.com/office/drawing/2014/main" val="235411391"/>
                   </a:ext>
                 </a:extLst>
               </a:tr>
-              <a:tr h="517236">
+              <a:tr h="384175">
                 <a:tc>
                   <a:txBody>
                     <a:bodyPr/>
                     <a:lstStyle/>
                     <a:p>
-                      <a:pPr fontAlgn="t">
+                      <a:pPr marR="221615" algn="just">
+                        <a:lnSpc>
+                          <a:spcPct val="150000"/>
+                        </a:lnSpc>
                         <a:buNone/>
                       </a:pPr>
                       <a:r>
-                        <a:rPr lang="en-IN" sz="2200">
-                          <a:solidFill>
-                            <a:schemeClr val="bg2"/>
-                          </a:solidFill>
+                        <a:rPr lang="en-IN" sz="1400" kern="100">
                           <a:effectLst/>
                         </a:rPr>
-                        <a:t>AST Parsing</a:t>
+                        <a:t>Frontend Framework</a:t>
                       </a:r>
+                      <a:endParaRPr lang="en-IN" sz="1400" kern="100">
+                        <a:effectLst/>
+                        <a:latin typeface="Calibri" panose="020F0502020204030204" pitchFamily="34" charset="0"/>
+                        <a:ea typeface="Times New Roman" panose="02020603050405020304" pitchFamily="18" charset="0"/>
+                      </a:endParaRPr>
                     </a:p>
                   </a:txBody>
-                  <a:tcPr>
-                    <a:lnL w="12700" cap="flat" cmpd="sng" algn="ctr">
-                      <a:solidFill>
-                        <a:srgbClr val="606EA9"/>
-                      </a:solidFill>
-                      <a:prstDash val="solid"/>
-                      <a:round/>
-                      <a:headEnd type="none" w="med" len="med"/>
-                      <a:tailEnd type="none" w="med" len="med"/>
-                    </a:lnL>
-                    <a:lnR w="12700" cap="flat" cmpd="sng" algn="ctr">
-                      <a:solidFill>
-                        <a:srgbClr val="606EA9"/>
-                      </a:solidFill>
-                      <a:prstDash val="solid"/>
-                      <a:round/>
-                      <a:headEnd type="none" w="med" len="med"/>
-                      <a:tailEnd type="none" w="med" len="med"/>
-                    </a:lnR>
-                    <a:lnT w="12700" cap="flat" cmpd="sng" algn="ctr">
-                      <a:solidFill>
-                        <a:srgbClr val="606EA9"/>
-                      </a:solidFill>
-                      <a:prstDash val="solid"/>
-                      <a:round/>
-                      <a:headEnd type="none" w="med" len="med"/>
-                      <a:tailEnd type="none" w="med" len="med"/>
-                    </a:lnT>
-                    <a:lnB w="12700" cap="flat" cmpd="sng" algn="ctr">
-                      <a:solidFill>
-                        <a:srgbClr val="E077A9"/>
-                      </a:solidFill>
-                      <a:prstDash val="solid"/>
-                      <a:round/>
-                      <a:headEnd type="none" w="med" len="med"/>
-                      <a:tailEnd type="none" w="med" len="med"/>
-                    </a:lnB>
-                    <a:solidFill>
-                      <a:srgbClr val="1F1F1E"/>
-                    </a:solidFill>
-                  </a:tcPr>
+                  <a:tcPr marL="9718" marR="9718" marT="9718" marB="9718" anchor="ctr"/>
                 </a:tc>
                 <a:tc>
                   <a:txBody>
                     <a:bodyPr/>
                     <a:lstStyle/>
                     <a:p>
-                      <a:pPr fontAlgn="t">
+                      <a:pPr marR="221615" algn="just">
+                        <a:lnSpc>
+                          <a:spcPct val="150000"/>
+                        </a:lnSpc>
                         <a:buNone/>
                       </a:pPr>
                       <a:r>
-                        <a:rPr lang="en-IN" sz="2200">
-                          <a:solidFill>
-                            <a:schemeClr val="bg2"/>
-                          </a:solidFill>
+                        <a:rPr lang="en-IN" sz="1400" kern="100">
                           <a:effectLst/>
-                          <a:latin typeface="Anthropic Mono"/>
                         </a:rPr>
-                        <a:t>ast.parse()</a:t>
+                        <a:t>:</a:t>
                       </a:r>
-                      <a:endParaRPr lang="en-IN" sz="2200">
-                        <a:solidFill>
-                          <a:schemeClr val="bg2"/>
-                        </a:solidFill>
+                      <a:endParaRPr lang="en-IN" sz="1400" kern="100">
                         <a:effectLst/>
+                        <a:latin typeface="Calibri" panose="020F0502020204030204" pitchFamily="34" charset="0"/>
+                        <a:ea typeface="Times New Roman" panose="02020603050405020304" pitchFamily="18" charset="0"/>
                       </a:endParaRPr>
                     </a:p>
                   </a:txBody>
-                  <a:tcPr>
-                    <a:lnL w="12700" cap="flat" cmpd="sng" algn="ctr">
-                      <a:solidFill>
-                        <a:srgbClr val="606EA9"/>
-                      </a:solidFill>
-                      <a:prstDash val="solid"/>
-                      <a:round/>
-                      <a:headEnd type="none" w="med" len="med"/>
-                      <a:tailEnd type="none" w="med" len="med"/>
-                    </a:lnL>
-                    <a:lnR w="12700" cap="flat" cmpd="sng" algn="ctr">
-                      <a:solidFill>
-                        <a:srgbClr val="A072A9"/>
-                      </a:solidFill>
-                      <a:prstDash val="solid"/>
-                      <a:round/>
-                      <a:headEnd type="none" w="med" len="med"/>
-                      <a:tailEnd type="none" w="med" len="med"/>
-                    </a:lnR>
-                    <a:lnT w="12700" cap="flat" cmpd="sng" algn="ctr">
-                      <a:solidFill>
-                        <a:srgbClr val="606EA9"/>
-                      </a:solidFill>
-                      <a:prstDash val="solid"/>
-                      <a:round/>
-                      <a:headEnd type="none" w="med" len="med"/>
-                      <a:tailEnd type="none" w="med" len="med"/>
-                    </a:lnT>
-                    <a:lnB w="12700" cap="flat" cmpd="sng" algn="ctr">
-                      <a:solidFill>
-                        <a:srgbClr val="702445"/>
-                      </a:solidFill>
-                      <a:prstDash val="solid"/>
-                      <a:round/>
-                      <a:headEnd type="none" w="med" len="med"/>
-                      <a:tailEnd type="none" w="med" len="med"/>
-                    </a:lnB>
-                    <a:solidFill>
-                      <a:srgbClr val="1F1F1E"/>
-                    </a:solidFill>
-                  </a:tcPr>
+                  <a:tcPr marL="9718" marR="9718" marT="9718" marB="9718" anchor="ctr"/>
                 </a:tc>
                 <a:tc>
                   <a:txBody>
                     <a:bodyPr/>
                     <a:lstStyle/>
                     <a:p>
-                      <a:pPr fontAlgn="t">
+                      <a:pPr marR="221615" algn="just">
+                        <a:lnSpc>
+                          <a:spcPct val="150000"/>
+                        </a:lnSpc>
                         <a:buNone/>
                       </a:pPr>
                       <a:r>
-                        <a:rPr lang="en-US" sz="2200">
-                          <a:solidFill>
-                            <a:schemeClr val="bg2"/>
-                          </a:solidFill>
+                        <a:rPr lang="en-IN" sz="1400" kern="100">
                           <a:effectLst/>
                         </a:rPr>
-                        <a:t>Read and understand Python code</a:t>
+                        <a:t>React via Vite</a:t>
                       </a:r>
+                      <a:endParaRPr lang="en-IN" sz="1400" kern="100">
+                        <a:effectLst/>
+                        <a:latin typeface="Calibri" panose="020F0502020204030204" pitchFamily="34" charset="0"/>
+                        <a:ea typeface="Times New Roman" panose="02020603050405020304" pitchFamily="18" charset="0"/>
+                      </a:endParaRPr>
                     </a:p>
                   </a:txBody>
-                  <a:tcPr>
-                    <a:lnL w="12700" cap="flat" cmpd="sng" algn="ctr">
-                      <a:solidFill>
-                        <a:srgbClr val="A072A9"/>
-                      </a:solidFill>
-                      <a:prstDash val="solid"/>
-                      <a:round/>
-                      <a:headEnd type="none" w="med" len="med"/>
-                      <a:tailEnd type="none" w="med" len="med"/>
-                    </a:lnL>
-                    <a:lnR w="12700" cap="flat" cmpd="sng" algn="ctr">
-                      <a:solidFill>
-                        <a:srgbClr val="A072A9"/>
-                      </a:solidFill>
-                      <a:prstDash val="solid"/>
-                      <a:round/>
-                      <a:headEnd type="none" w="med" len="med"/>
-                      <a:tailEnd type="none" w="med" len="med"/>
-                    </a:lnR>
-                    <a:lnT w="12700" cap="flat" cmpd="sng" algn="ctr">
-                      <a:solidFill>
-                        <a:srgbClr val="A072A9"/>
-                      </a:solidFill>
-                      <a:prstDash val="solid"/>
-                      <a:round/>
-                      <a:headEnd type="none" w="med" len="med"/>
-                      <a:tailEnd type="none" w="med" len="med"/>
-                    </a:lnT>
-                    <a:lnB w="12700" cap="flat" cmpd="sng" algn="ctr">
-                      <a:solidFill>
-                        <a:srgbClr val="9058AC"/>
-                      </a:solidFill>
-                      <a:prstDash val="solid"/>
-                      <a:round/>
-                      <a:headEnd type="none" w="med" len="med"/>
-                      <a:tailEnd type="none" w="med" len="med"/>
-                    </a:lnB>
-                    <a:solidFill>
-                      <a:srgbClr val="1F1F1E"/>
-                    </a:solidFill>
-                  </a:tcPr>
+                  <a:tcPr marL="9718" marR="9718" marT="9718" marB="9718" anchor="ctr"/>
                 </a:tc>
                 <a:extLst>
                   <a:ext uri="{0D108BD9-81ED-4DB2-BD59-A6C34878D82A}">
-                    <a16:rowId xmlns:a16="http://schemas.microsoft.com/office/drawing/2014/main" val="3564176120"/>
+                    <a16:rowId xmlns:a16="http://schemas.microsoft.com/office/drawing/2014/main" val="3800845321"/>
                   </a:ext>
                 </a:extLst>
               </a:tr>
-              <a:tr h="517236">
+              <a:tr h="384175">
                 <a:tc>
                   <a:txBody>
                     <a:bodyPr/>
                     <a:lstStyle/>
                     <a:p>
-                      <a:pPr fontAlgn="t">
+                      <a:pPr marR="221615" algn="just">
+                        <a:lnSpc>
+                          <a:spcPct val="150000"/>
+                        </a:lnSpc>
                         <a:buNone/>
                       </a:pPr>
                       <a:r>
-                        <a:rPr lang="en-IN" sz="2200" dirty="0">
-                          <a:solidFill>
-                            <a:schemeClr val="bg2"/>
-                          </a:solidFill>
+                        <a:rPr lang="en-IN" sz="1400" kern="100">
                           <a:effectLst/>
                         </a:rPr>
-                        <a:t>DFS (Depth first search) Tree Traversal</a:t>
+                        <a:t>Backend Framework</a:t>
                       </a:r>
+                      <a:endParaRPr lang="en-IN" sz="1400" kern="100">
+                        <a:effectLst/>
+                        <a:latin typeface="Calibri" panose="020F0502020204030204" pitchFamily="34" charset="0"/>
+                        <a:ea typeface="Times New Roman" panose="02020603050405020304" pitchFamily="18" charset="0"/>
+                      </a:endParaRPr>
                     </a:p>
                   </a:txBody>
-                  <a:tcPr>
-                    <a:lnL w="12700" cap="flat" cmpd="sng" algn="ctr">
-                      <a:solidFill>
-                        <a:srgbClr val="E077A9"/>
-                      </a:solidFill>
-                      <a:prstDash val="solid"/>
-                      <a:round/>
-                      <a:headEnd type="none" w="med" len="med"/>
-                      <a:tailEnd type="none" w="med" len="med"/>
-                    </a:lnL>
-                    <a:lnR w="12700" cap="flat" cmpd="sng" algn="ctr">
-                      <a:solidFill>
-                        <a:srgbClr val="702445"/>
-                      </a:solidFill>
-                      <a:prstDash val="solid"/>
-                      <a:round/>
-                      <a:headEnd type="none" w="med" len="med"/>
-                      <a:tailEnd type="none" w="med" len="med"/>
-                    </a:lnR>
-                    <a:lnT w="12700" cap="flat" cmpd="sng" algn="ctr">
-                      <a:solidFill>
-                        <a:srgbClr val="E077A9"/>
-                      </a:solidFill>
-                      <a:prstDash val="solid"/>
-                      <a:round/>
-                      <a:headEnd type="none" w="med" len="med"/>
-                      <a:tailEnd type="none" w="med" len="med"/>
-                    </a:lnT>
-                    <a:lnB w="12700" cap="flat" cmpd="sng" algn="ctr">
-                      <a:solidFill>
-                        <a:srgbClr val="207AA9"/>
-                      </a:solidFill>
-                      <a:prstDash val="solid"/>
-                      <a:round/>
-                      <a:headEnd type="none" w="med" len="med"/>
-                      <a:tailEnd type="none" w="med" len="med"/>
-                    </a:lnB>
-                    <a:solidFill>
-                      <a:srgbClr val="1F1F1E"/>
-                    </a:solidFill>
-                  </a:tcPr>
+                  <a:tcPr marL="9718" marR="9718" marT="9718" marB="9718" anchor="ctr"/>
                 </a:tc>
                 <a:tc>
                   <a:txBody>
                     <a:bodyPr/>
                     <a:lstStyle/>
                     <a:p>
-                      <a:pPr fontAlgn="t">
+                      <a:pPr marR="221615" algn="just">
+                        <a:lnSpc>
+                          <a:spcPct val="150000"/>
+                        </a:lnSpc>
                         <a:buNone/>
                       </a:pPr>
                       <a:r>
-                        <a:rPr lang="en-IN" sz="2200">
-                          <a:solidFill>
-                            <a:schemeClr val="bg2"/>
-                          </a:solidFill>
+                        <a:rPr lang="en-IN" sz="1400" kern="100">
                           <a:effectLst/>
-                          <a:latin typeface="Anthropic Mono"/>
                         </a:rPr>
-                        <a:t>parse_statements()</a:t>
+                        <a:t>:</a:t>
                       </a:r>
-                      <a:endParaRPr lang="en-IN" sz="2200">
-                        <a:solidFill>
-                          <a:schemeClr val="bg2"/>
-                        </a:solidFill>
+                      <a:endParaRPr lang="en-IN" sz="1400" kern="100">
                         <a:effectLst/>
+                        <a:latin typeface="Calibri" panose="020F0502020204030204" pitchFamily="34" charset="0"/>
+                        <a:ea typeface="Times New Roman" panose="02020603050405020304" pitchFamily="18" charset="0"/>
                       </a:endParaRPr>
                     </a:p>
                   </a:txBody>
-                  <a:tcPr>
-                    <a:lnL w="12700" cap="flat" cmpd="sng" algn="ctr">
-                      <a:solidFill>
-                        <a:srgbClr val="702445"/>
-                      </a:solidFill>
-                      <a:prstDash val="solid"/>
-                      <a:round/>
-                      <a:headEnd type="none" w="med" len="med"/>
-                      <a:tailEnd type="none" w="med" len="med"/>
-                    </a:lnL>
-                    <a:lnR w="12700" cap="flat" cmpd="sng" algn="ctr">
-                      <a:solidFill>
-                        <a:srgbClr val="9058AC"/>
-                      </a:solidFill>
-                      <a:prstDash val="solid"/>
-                      <a:round/>
-                      <a:headEnd type="none" w="med" len="med"/>
-                      <a:tailEnd type="none" w="med" len="med"/>
-                    </a:lnR>
-                    <a:lnT w="12700" cap="flat" cmpd="sng" algn="ctr">
-                      <a:solidFill>
-                        <a:srgbClr val="702445"/>
-                      </a:solidFill>
-                      <a:prstDash val="solid"/>
-                      <a:round/>
-                      <a:headEnd type="none" w="med" len="med"/>
-                      <a:tailEnd type="none" w="med" len="med"/>
-                    </a:lnT>
-                    <a:lnB w="12700" cap="flat" cmpd="sng" algn="ctr">
-                      <a:solidFill>
-                        <a:srgbClr val="305699"/>
-                      </a:solidFill>
-                      <a:prstDash val="solid"/>
-                      <a:round/>
-                      <a:headEnd type="none" w="med" len="med"/>
-                      <a:tailEnd type="none" w="med" len="med"/>
-                    </a:lnB>
-                    <a:solidFill>
-                      <a:srgbClr val="1F1F1E"/>
-                    </a:solidFill>
-                  </a:tcPr>
+                  <a:tcPr marL="9718" marR="9718" marT="9718" marB="9718" anchor="ctr"/>
                 </a:tc>
                 <a:tc>
                   <a:txBody>
                     <a:bodyPr/>
                     <a:lstStyle/>
                     <a:p>
-                      <a:pPr fontAlgn="t">
+                      <a:pPr marR="221615" algn="just">
+                        <a:lnSpc>
+                          <a:spcPct val="150000"/>
+                        </a:lnSpc>
                         <a:buNone/>
                       </a:pPr>
                       <a:r>
-                        <a:rPr lang="en-IN" sz="2200">
-                          <a:solidFill>
-                            <a:schemeClr val="bg2"/>
-                          </a:solidFill>
+                        <a:rPr lang="en-IN" sz="1400" kern="100">
                           <a:effectLst/>
                         </a:rPr>
-                        <a:t>Walk through code structure</a:t>
+                        <a:t>FastAPI (Python)</a:t>
                       </a:r>
+                      <a:endParaRPr lang="en-IN" sz="1400" kern="100">
+                        <a:effectLst/>
+                        <a:latin typeface="Calibri" panose="020F0502020204030204" pitchFamily="34" charset="0"/>
+                        <a:ea typeface="Times New Roman" panose="02020603050405020304" pitchFamily="18" charset="0"/>
+                      </a:endParaRPr>
                     </a:p>
                   </a:txBody>
-                  <a:tcPr>
-                    <a:lnL w="12700" cap="flat" cmpd="sng" algn="ctr">
-                      <a:solidFill>
-                        <a:srgbClr val="9058AC"/>
-                      </a:solidFill>
-                      <a:prstDash val="solid"/>
-                      <a:round/>
-                      <a:headEnd type="none" w="med" len="med"/>
-                      <a:tailEnd type="none" w="med" len="med"/>
-                    </a:lnL>
-                    <a:lnR w="12700" cap="flat" cmpd="sng" algn="ctr">
-                      <a:solidFill>
-                        <a:srgbClr val="9058AC"/>
-                      </a:solidFill>
-                      <a:prstDash val="solid"/>
-                      <a:round/>
-                      <a:headEnd type="none" w="med" len="med"/>
-                      <a:tailEnd type="none" w="med" len="med"/>
-                    </a:lnR>
-                    <a:lnT w="12700" cap="flat" cmpd="sng" algn="ctr">
-                      <a:solidFill>
-                        <a:srgbClr val="9058AC"/>
-                      </a:solidFill>
-                      <a:prstDash val="solid"/>
-                      <a:round/>
-                      <a:headEnd type="none" w="med" len="med"/>
-                      <a:tailEnd type="none" w="med" len="med"/>
-                    </a:lnT>
-                    <a:lnB w="12700" cap="flat" cmpd="sng" algn="ctr">
-                      <a:solidFill>
-                        <a:srgbClr val="F02745"/>
-                      </a:solidFill>
-                      <a:prstDash val="solid"/>
-                      <a:round/>
-                      <a:headEnd type="none" w="med" len="med"/>
-                      <a:tailEnd type="none" w="med" len="med"/>
-                    </a:lnB>
-                    <a:solidFill>
-                      <a:srgbClr val="1F1F1E"/>
-                    </a:solidFill>
-                  </a:tcPr>
+                  <a:tcPr marL="9718" marR="9718" marT="9718" marB="9718" anchor="ctr"/>
                 </a:tc>
                 <a:extLst>
                   <a:ext uri="{0D108BD9-81ED-4DB2-BD59-A6C34878D82A}">
-                    <a16:rowId xmlns:a16="http://schemas.microsoft.com/office/drawing/2014/main" val="3200068910"/>
+                    <a16:rowId xmlns:a16="http://schemas.microsoft.com/office/drawing/2014/main" val="1624190011"/>
                   </a:ext>
                 </a:extLst>
               </a:tr>
-              <a:tr h="517236">
+              <a:tr h="384175">
                 <a:tc>
                   <a:txBody>
                     <a:bodyPr/>
                     <a:lstStyle/>
                     <a:p>
-                      <a:pPr fontAlgn="t">
+                      <a:pPr marR="221615" algn="just">
+                        <a:lnSpc>
+                          <a:spcPct val="150000"/>
+                        </a:lnSpc>
                         <a:buNone/>
                       </a:pPr>
                       <a:r>
-                        <a:rPr lang="en-IN" sz="2200" dirty="0">
-                          <a:solidFill>
-                            <a:schemeClr val="bg2"/>
-                          </a:solidFill>
+                        <a:rPr lang="en-IN" sz="1400" kern="100">
                           <a:effectLst/>
                         </a:rPr>
-                        <a:t>Graph Construction</a:t>
+                        <a:t>Database (Dev)</a:t>
                       </a:r>
+                      <a:endParaRPr lang="en-IN" sz="1400" kern="100">
+                        <a:effectLst/>
+                        <a:latin typeface="Calibri" panose="020F0502020204030204" pitchFamily="34" charset="0"/>
+                        <a:ea typeface="Times New Roman" panose="02020603050405020304" pitchFamily="18" charset="0"/>
+                      </a:endParaRPr>
                     </a:p>
                   </a:txBody>
-                  <a:tcPr>
-                    <a:lnL w="12700" cap="flat" cmpd="sng" algn="ctr">
-                      <a:solidFill>
-                        <a:srgbClr val="207AA9"/>
-                      </a:solidFill>
-                      <a:prstDash val="solid"/>
-                      <a:round/>
-                      <a:headEnd type="none" w="med" len="med"/>
-                      <a:tailEnd type="none" w="med" len="med"/>
-                    </a:lnL>
-                    <a:lnR w="12700" cap="flat" cmpd="sng" algn="ctr">
-                      <a:solidFill>
-                        <a:srgbClr val="305699"/>
-                      </a:solidFill>
-                      <a:prstDash val="solid"/>
-                      <a:round/>
-                      <a:headEnd type="none" w="med" len="med"/>
-                      <a:tailEnd type="none" w="med" len="med"/>
-                    </a:lnR>
-                    <a:lnT w="12700" cap="flat" cmpd="sng" algn="ctr">
-                      <a:solidFill>
-                        <a:srgbClr val="207AA9"/>
-                      </a:solidFill>
-                      <a:prstDash val="solid"/>
-                      <a:round/>
-                      <a:headEnd type="none" w="med" len="med"/>
-                      <a:tailEnd type="none" w="med" len="med"/>
-                    </a:lnT>
-                    <a:lnB w="12700" cap="flat" cmpd="sng" algn="ctr">
-                      <a:solidFill>
-                        <a:srgbClr val="F0411C"/>
-                      </a:solidFill>
-                      <a:prstDash val="solid"/>
-                      <a:round/>
-                      <a:headEnd type="none" w="med" len="med"/>
-                      <a:tailEnd type="none" w="med" len="med"/>
-                    </a:lnB>
-                    <a:solidFill>
-                      <a:srgbClr val="1F1F1E"/>
-                    </a:solidFill>
-                  </a:tcPr>
+                  <a:tcPr marL="9718" marR="9718" marT="9718" marB="9718" anchor="ctr"/>
                 </a:tc>
                 <a:tc>
                   <a:txBody>
                     <a:bodyPr/>
                     <a:lstStyle/>
                     <a:p>
-                      <a:pPr fontAlgn="t">
+                      <a:pPr marR="221615" algn="just">
+                        <a:lnSpc>
+                          <a:spcPct val="150000"/>
+                        </a:lnSpc>
                         <a:buNone/>
                       </a:pPr>
                       <a:r>
-                        <a:rPr lang="en-IN" sz="2200" dirty="0" err="1">
-                          <a:solidFill>
-                            <a:schemeClr val="bg2"/>
-                          </a:solidFill>
-                          <a:effectLst/>
-                          <a:latin typeface="Anthropic Mono"/>
-                        </a:rPr>
-                        <a:t>make_node</a:t>
-                      </a:r>
-                      <a:r>
-                        <a:rPr lang="en-IN" sz="2200" dirty="0">
-                          <a:solidFill>
-                            <a:schemeClr val="bg2"/>
-                          </a:solidFill>
-                          <a:effectLst/>
-                          <a:latin typeface="Anthropic Mono"/>
-                        </a:rPr>
-                        <a:t>()</a:t>
-                      </a:r>
-                      <a:r>
-                        <a:rPr lang="en-IN" sz="2200" dirty="0">
-                          <a:solidFill>
-                            <a:schemeClr val="bg2"/>
-                          </a:solidFill>
+                        <a:rPr lang="en-IN" sz="1400" kern="100">
                           <a:effectLst/>
                         </a:rPr>
-                        <a:t>, </a:t>
+                        <a:t>:</a:t>
                       </a:r>
-                      <a:r>
-                        <a:rPr lang="en-IN" sz="2200" dirty="0" err="1">
-                          <a:solidFill>
-                            <a:schemeClr val="bg2"/>
-                          </a:solidFill>
-                          <a:effectLst/>
-                          <a:latin typeface="Anthropic Mono"/>
-                        </a:rPr>
-                        <a:t>make_edge</a:t>
-                      </a:r>
-                      <a:r>
-                        <a:rPr lang="en-IN" sz="2200" dirty="0">
-                          <a:solidFill>
-                            <a:schemeClr val="bg2"/>
-                          </a:solidFill>
-                          <a:effectLst/>
-                          <a:latin typeface="Anthropic Mono"/>
-                        </a:rPr>
-                        <a:t>()</a:t>
-                      </a:r>
-                      <a:endParaRPr lang="en-IN" sz="2200" dirty="0">
-                        <a:solidFill>
-                          <a:schemeClr val="bg2"/>
-                        </a:solidFill>
+                      <a:endParaRPr lang="en-IN" sz="1400" kern="100">
                         <a:effectLst/>
+                        <a:latin typeface="Calibri" panose="020F0502020204030204" pitchFamily="34" charset="0"/>
+                        <a:ea typeface="Times New Roman" panose="02020603050405020304" pitchFamily="18" charset="0"/>
                       </a:endParaRPr>
                     </a:p>
                   </a:txBody>
-                  <a:tcPr>
-                    <a:lnL w="12700" cap="flat" cmpd="sng" algn="ctr">
-                      <a:solidFill>
-                        <a:srgbClr val="305699"/>
-                      </a:solidFill>
-                      <a:prstDash val="solid"/>
-                      <a:round/>
-                      <a:headEnd type="none" w="med" len="med"/>
-                      <a:tailEnd type="none" w="med" len="med"/>
-                    </a:lnL>
-                    <a:lnR w="12700" cap="flat" cmpd="sng" algn="ctr">
-                      <a:solidFill>
-                        <a:srgbClr val="F02745"/>
-                      </a:solidFill>
-                      <a:prstDash val="solid"/>
-                      <a:round/>
-                      <a:headEnd type="none" w="med" len="med"/>
-                      <a:tailEnd type="none" w="med" len="med"/>
-                    </a:lnR>
-                    <a:lnT w="12700" cap="flat" cmpd="sng" algn="ctr">
-                      <a:solidFill>
-                        <a:srgbClr val="305699"/>
-                      </a:solidFill>
-                      <a:prstDash val="solid"/>
-                      <a:round/>
-                      <a:headEnd type="none" w="med" len="med"/>
-                      <a:tailEnd type="none" w="med" len="med"/>
-                    </a:lnT>
-                    <a:lnB w="12700" cap="flat" cmpd="sng" algn="ctr">
-                      <a:solidFill>
-                        <a:srgbClr val="D06BC8"/>
-                      </a:solidFill>
-                      <a:prstDash val="solid"/>
-                      <a:round/>
-                      <a:headEnd type="none" w="med" len="med"/>
-                      <a:tailEnd type="none" w="med" len="med"/>
-                    </a:lnB>
-                    <a:solidFill>
-                      <a:srgbClr val="1F1F1E"/>
-                    </a:solidFill>
-                  </a:tcPr>
+                  <a:tcPr marL="9718" marR="9718" marT="9718" marB="9718" anchor="ctr"/>
                 </a:tc>
                 <a:tc>
                   <a:txBody>
                     <a:bodyPr/>
                     <a:lstStyle/>
                     <a:p>
-                      <a:pPr fontAlgn="t">
+                      <a:pPr marR="221615" algn="just">
+                        <a:lnSpc>
+                          <a:spcPct val="150000"/>
+                        </a:lnSpc>
                         <a:buNone/>
                       </a:pPr>
                       <a:r>
-                        <a:rPr lang="en-IN" sz="2200">
-                          <a:solidFill>
-                            <a:schemeClr val="bg2"/>
-                          </a:solidFill>
+                        <a:rPr lang="en-IN" sz="1400" kern="100">
                           <a:effectLst/>
                         </a:rPr>
-                        <a:t>Build flowchart diagram</a:t>
+                        <a:t>Microsoft SQL Server</a:t>
                       </a:r>
+                      <a:endParaRPr lang="en-IN" sz="1400" kern="100">
+                        <a:effectLst/>
+                        <a:latin typeface="Calibri" panose="020F0502020204030204" pitchFamily="34" charset="0"/>
+                        <a:ea typeface="Times New Roman" panose="02020603050405020304" pitchFamily="18" charset="0"/>
+                      </a:endParaRPr>
                     </a:p>
                   </a:txBody>
-                  <a:tcPr>
-                    <a:lnL w="12700" cap="flat" cmpd="sng" algn="ctr">
-                      <a:solidFill>
-                        <a:srgbClr val="F02745"/>
-                      </a:solidFill>
-                      <a:prstDash val="solid"/>
-                      <a:round/>
-                      <a:headEnd type="none" w="med" len="med"/>
-                      <a:tailEnd type="none" w="med" len="med"/>
-                    </a:lnL>
-                    <a:lnR w="12700" cap="flat" cmpd="sng" algn="ctr">
-                      <a:solidFill>
-                        <a:srgbClr val="F02745"/>
-                      </a:solidFill>
-                      <a:prstDash val="solid"/>
-                      <a:round/>
-                      <a:headEnd type="none" w="med" len="med"/>
-                      <a:tailEnd type="none" w="med" len="med"/>
-                    </a:lnR>
-                    <a:lnT w="12700" cap="flat" cmpd="sng" algn="ctr">
-                      <a:solidFill>
-                        <a:srgbClr val="F02745"/>
-                      </a:solidFill>
-                      <a:prstDash val="solid"/>
-                      <a:round/>
-                      <a:headEnd type="none" w="med" len="med"/>
-                      <a:tailEnd type="none" w="med" len="med"/>
-                    </a:lnT>
-                    <a:lnB w="12700" cap="flat" cmpd="sng" algn="ctr">
-                      <a:solidFill>
-                        <a:srgbClr val="302B45"/>
-                      </a:solidFill>
-                      <a:prstDash val="solid"/>
-                      <a:round/>
-                      <a:headEnd type="none" w="med" len="med"/>
-                      <a:tailEnd type="none" w="med" len="med"/>
-                    </a:lnB>
-                    <a:solidFill>
-                      <a:srgbClr val="1F1F1E"/>
-                    </a:solidFill>
-                  </a:tcPr>
+                  <a:tcPr marL="9718" marR="9718" marT="9718" marB="9718" anchor="ctr"/>
                 </a:tc>
                 <a:extLst>
                   <a:ext uri="{0D108BD9-81ED-4DB2-BD59-A6C34878D82A}">
-                    <a16:rowId xmlns:a16="http://schemas.microsoft.com/office/drawing/2014/main" val="1052558194"/>
+                    <a16:rowId xmlns:a16="http://schemas.microsoft.com/office/drawing/2014/main" val="1299318787"/>
                   </a:ext>
                 </a:extLst>
               </a:tr>
-              <a:tr h="517236">
+              <a:tr h="384175">
                 <a:tc>
                   <a:txBody>
                     <a:bodyPr/>
                     <a:lstStyle/>
                     <a:p>
-                      <a:pPr fontAlgn="t">
+                      <a:pPr marR="221615" algn="just">
+                        <a:lnSpc>
+                          <a:spcPct val="150000"/>
+                        </a:lnSpc>
                         <a:buNone/>
                       </a:pPr>
                       <a:r>
-                        <a:rPr lang="en-IN" sz="2200" dirty="0">
-                          <a:solidFill>
-                            <a:schemeClr val="bg2"/>
-                          </a:solidFill>
+                        <a:rPr lang="en-IN" sz="1400" kern="100">
                           <a:effectLst/>
                         </a:rPr>
-                        <a:t>Static Input Detection</a:t>
+                        <a:t>Database (Prod)</a:t>
                       </a:r>
+                      <a:endParaRPr lang="en-IN" sz="1400" kern="100">
+                        <a:effectLst/>
+                        <a:latin typeface="Calibri" panose="020F0502020204030204" pitchFamily="34" charset="0"/>
+                        <a:ea typeface="Times New Roman" panose="02020603050405020304" pitchFamily="18" charset="0"/>
+                      </a:endParaRPr>
                     </a:p>
                   </a:txBody>
-                  <a:tcPr>
-                    <a:lnL w="12700" cap="flat" cmpd="sng" algn="ctr">
-                      <a:solidFill>
-                        <a:srgbClr val="F0411C"/>
-                      </a:solidFill>
-                      <a:prstDash val="solid"/>
-                      <a:round/>
-                      <a:headEnd type="none" w="med" len="med"/>
-                      <a:tailEnd type="none" w="med" len="med"/>
-                    </a:lnL>
-                    <a:lnR w="12700" cap="flat" cmpd="sng" algn="ctr">
-                      <a:solidFill>
-                        <a:srgbClr val="D06BC8"/>
-                      </a:solidFill>
-                      <a:prstDash val="solid"/>
-                      <a:round/>
-                      <a:headEnd type="none" w="med" len="med"/>
-                      <a:tailEnd type="none" w="med" len="med"/>
-                    </a:lnR>
-                    <a:lnT w="12700" cap="flat" cmpd="sng" algn="ctr">
-                      <a:solidFill>
-                        <a:srgbClr val="F0411C"/>
-                      </a:solidFill>
-                      <a:prstDash val="solid"/>
-                      <a:round/>
-                      <a:headEnd type="none" w="med" len="med"/>
-                      <a:tailEnd type="none" w="med" len="med"/>
-                    </a:lnT>
-                    <a:lnB w="12700" cap="flat" cmpd="sng" algn="ctr">
-                      <a:solidFill>
-                        <a:srgbClr val="304D99"/>
-                      </a:solidFill>
-                      <a:prstDash val="solid"/>
-                      <a:round/>
-                      <a:headEnd type="none" w="med" len="med"/>
-                      <a:tailEnd type="none" w="med" len="med"/>
-                    </a:lnB>
-                    <a:solidFill>
-                      <a:srgbClr val="1F1F1E"/>
-                    </a:solidFill>
-                  </a:tcPr>
+                  <a:tcPr marL="9718" marR="9718" marT="9718" marB="9718" anchor="ctr"/>
                 </a:tc>
                 <a:tc>
                   <a:txBody>
                     <a:bodyPr/>
                     <a:lstStyle/>
                     <a:p>
-                      <a:pPr fontAlgn="t">
+                      <a:pPr marR="221615" algn="just">
+                        <a:lnSpc>
+                          <a:spcPct val="150000"/>
+                        </a:lnSpc>
                         <a:buNone/>
                       </a:pPr>
                       <a:r>
-                        <a:rPr lang="en-IN" sz="2200" dirty="0" err="1">
-                          <a:solidFill>
-                            <a:schemeClr val="bg2"/>
-                          </a:solidFill>
+                        <a:rPr lang="en-IN" sz="1400" kern="100">
                           <a:effectLst/>
-                          <a:latin typeface="Anthropic Mono"/>
                         </a:rPr>
-                        <a:t>scan_input_calls</a:t>
+                        <a:t>:</a:t>
                       </a:r>
-                      <a:r>
-                        <a:rPr lang="en-IN" sz="2200" dirty="0">
-                          <a:solidFill>
-                            <a:schemeClr val="bg2"/>
-                          </a:solidFill>
-                          <a:effectLst/>
-                          <a:latin typeface="Anthropic Mono"/>
-                        </a:rPr>
-                        <a:t>()</a:t>
-                      </a:r>
-                      <a:endParaRPr lang="en-IN" sz="2200" dirty="0">
-                        <a:solidFill>
-                          <a:schemeClr val="bg2"/>
-                        </a:solidFill>
+                      <a:endParaRPr lang="en-IN" sz="1400" kern="100">
                         <a:effectLst/>
+                        <a:latin typeface="Calibri" panose="020F0502020204030204" pitchFamily="34" charset="0"/>
+                        <a:ea typeface="Times New Roman" panose="02020603050405020304" pitchFamily="18" charset="0"/>
                       </a:endParaRPr>
                     </a:p>
                   </a:txBody>
-                  <a:tcPr>
-                    <a:lnL w="12700" cap="flat" cmpd="sng" algn="ctr">
-                      <a:solidFill>
-                        <a:srgbClr val="D06BC8"/>
-                      </a:solidFill>
-                      <a:prstDash val="solid"/>
-                      <a:round/>
-                      <a:headEnd type="none" w="med" len="med"/>
-                      <a:tailEnd type="none" w="med" len="med"/>
-                    </a:lnL>
-                    <a:lnR w="12700" cap="flat" cmpd="sng" algn="ctr">
-                      <a:solidFill>
-                        <a:srgbClr val="302B45"/>
-                      </a:solidFill>
-                      <a:prstDash val="solid"/>
-                      <a:round/>
-                      <a:headEnd type="none" w="med" len="med"/>
-                      <a:tailEnd type="none" w="med" len="med"/>
-                    </a:lnR>
-                    <a:lnT w="12700" cap="flat" cmpd="sng" algn="ctr">
-                      <a:solidFill>
-                        <a:srgbClr val="D06BC8"/>
-                      </a:solidFill>
-                      <a:prstDash val="solid"/>
-                      <a:round/>
-                      <a:headEnd type="none" w="med" len="med"/>
-                      <a:tailEnd type="none" w="med" len="med"/>
-                    </a:lnT>
-                    <a:lnB w="12700" cap="flat" cmpd="sng" algn="ctr">
-                      <a:solidFill>
-                        <a:srgbClr val="9061C8"/>
-                      </a:solidFill>
-                      <a:prstDash val="solid"/>
-                      <a:round/>
-                      <a:headEnd type="none" w="med" len="med"/>
-                      <a:tailEnd type="none" w="med" len="med"/>
-                    </a:lnB>
-                    <a:solidFill>
-                      <a:srgbClr val="1F1F1E"/>
-                    </a:solidFill>
-                  </a:tcPr>
+                  <a:tcPr marL="9718" marR="9718" marT="9718" marB="9718" anchor="ctr"/>
                 </a:tc>
                 <a:tc>
                   <a:txBody>
                     <a:bodyPr/>
                     <a:lstStyle/>
                     <a:p>
-                      <a:pPr fontAlgn="t">
+                      <a:pPr marR="221615" algn="just">
+                        <a:lnSpc>
+                          <a:spcPct val="150000"/>
+                        </a:lnSpc>
                         <a:buNone/>
                       </a:pPr>
                       <a:r>
-                        <a:rPr lang="en-US" sz="2200">
-                          <a:solidFill>
-                            <a:schemeClr val="bg2"/>
-                          </a:solidFill>
+                        <a:rPr lang="en-IN" sz="1400" kern="100">
                           <a:effectLst/>
                         </a:rPr>
-                        <a:t>Find all input() calls before running</a:t>
+                        <a:t>PostgreSQL (Supabase)</a:t>
                       </a:r>
+                      <a:endParaRPr lang="en-IN" sz="1400" kern="100">
+                        <a:effectLst/>
+                        <a:latin typeface="Calibri" panose="020F0502020204030204" pitchFamily="34" charset="0"/>
+                        <a:ea typeface="Times New Roman" panose="02020603050405020304" pitchFamily="18" charset="0"/>
+                      </a:endParaRPr>
                     </a:p>
                   </a:txBody>
-                  <a:tcPr>
-                    <a:lnL w="12700" cap="flat" cmpd="sng" algn="ctr">
-                      <a:solidFill>
-                        <a:srgbClr val="302B45"/>
-                      </a:solidFill>
-                      <a:prstDash val="solid"/>
-                      <a:round/>
-                      <a:headEnd type="none" w="med" len="med"/>
-                      <a:tailEnd type="none" w="med" len="med"/>
-                    </a:lnL>
-                    <a:lnR w="12700" cap="flat" cmpd="sng" algn="ctr">
-                      <a:solidFill>
-                        <a:srgbClr val="302B45"/>
-                      </a:solidFill>
-                      <a:prstDash val="solid"/>
-                      <a:round/>
-                      <a:headEnd type="none" w="med" len="med"/>
-                      <a:tailEnd type="none" w="med" len="med"/>
-                    </a:lnR>
-                    <a:lnT w="12700" cap="flat" cmpd="sng" algn="ctr">
-                      <a:solidFill>
-                        <a:srgbClr val="302B45"/>
-                      </a:solidFill>
-                      <a:prstDash val="solid"/>
-                      <a:round/>
-                      <a:headEnd type="none" w="med" len="med"/>
-                      <a:tailEnd type="none" w="med" len="med"/>
-                    </a:lnT>
-                    <a:lnB w="12700" cap="flat" cmpd="sng" algn="ctr">
-                      <a:solidFill>
-                        <a:srgbClr val="704299"/>
-                      </a:solidFill>
-                      <a:prstDash val="solid"/>
-                      <a:round/>
-                      <a:headEnd type="none" w="med" len="med"/>
-                      <a:tailEnd type="none" w="med" len="med"/>
-                    </a:lnB>
-                    <a:solidFill>
-                      <a:srgbClr val="1F1F1E"/>
-                    </a:solidFill>
-                  </a:tcPr>
+                  <a:tcPr marL="9718" marR="9718" marT="9718" marB="9718" anchor="ctr"/>
                 </a:tc>
                 <a:extLst>
                   <a:ext uri="{0D108BD9-81ED-4DB2-BD59-A6C34878D82A}">
-                    <a16:rowId xmlns:a16="http://schemas.microsoft.com/office/drawing/2014/main" val="3663240378"/>
+                    <a16:rowId xmlns:a16="http://schemas.microsoft.com/office/drawing/2014/main" val="3121809210"/>
                   </a:ext>
                 </a:extLst>
               </a:tr>
-              <a:tr h="517236">
+              <a:tr h="384175">
                 <a:tc>
                   <a:txBody>
                     <a:bodyPr/>
                     <a:lstStyle/>
                     <a:p>
-                      <a:pPr fontAlgn="t">
+                      <a:pPr marR="221615" algn="just">
+                        <a:lnSpc>
+                          <a:spcPct val="150000"/>
+                        </a:lnSpc>
                         <a:buNone/>
                       </a:pPr>
                       <a:r>
-                        <a:rPr lang="en-IN" sz="2200">
-                          <a:solidFill>
-                            <a:schemeClr val="bg2"/>
-                          </a:solidFill>
+                        <a:rPr lang="en-IN" sz="1400" kern="100" dirty="0">
                           <a:effectLst/>
                         </a:rPr>
-                        <a:t>Sandboxed Execution</a:t>
+                        <a:t>JS Execution Runtime</a:t>
                       </a:r>
+                      <a:endParaRPr lang="en-IN" sz="1400" kern="100" dirty="0">
+                        <a:effectLst/>
+                        <a:latin typeface="Calibri" panose="020F0502020204030204" pitchFamily="34" charset="0"/>
+                        <a:ea typeface="Times New Roman" panose="02020603050405020304" pitchFamily="18" charset="0"/>
+                      </a:endParaRPr>
                     </a:p>
                   </a:txBody>
-                  <a:tcPr>
-                    <a:lnL w="12700" cap="flat" cmpd="sng" algn="ctr">
-                      <a:solidFill>
-                        <a:srgbClr val="304D99"/>
-                      </a:solidFill>
-                      <a:prstDash val="solid"/>
-                      <a:round/>
-                      <a:headEnd type="none" w="med" len="med"/>
-                      <a:tailEnd type="none" w="med" len="med"/>
-                    </a:lnL>
-                    <a:lnR w="12700" cap="flat" cmpd="sng" algn="ctr">
-                      <a:solidFill>
-                        <a:srgbClr val="9061C8"/>
-                      </a:solidFill>
-                      <a:prstDash val="solid"/>
-                      <a:round/>
-                      <a:headEnd type="none" w="med" len="med"/>
-                      <a:tailEnd type="none" w="med" len="med"/>
-                    </a:lnR>
-                    <a:lnT w="12700" cap="flat" cmpd="sng" algn="ctr">
-                      <a:solidFill>
-                        <a:srgbClr val="304D99"/>
-                      </a:solidFill>
-                      <a:prstDash val="solid"/>
-                      <a:round/>
-                      <a:headEnd type="none" w="med" len="med"/>
-                      <a:tailEnd type="none" w="med" len="med"/>
-                    </a:lnT>
-                    <a:lnB w="12700" cap="flat" cmpd="sng" algn="ctr">
-                      <a:solidFill>
-                        <a:srgbClr val="9058AC"/>
-                      </a:solidFill>
-                      <a:prstDash val="solid"/>
-                      <a:round/>
-                      <a:headEnd type="none" w="med" len="med"/>
-                      <a:tailEnd type="none" w="med" len="med"/>
-                    </a:lnB>
-                    <a:solidFill>
-                      <a:srgbClr val="1F1F1E"/>
-                    </a:solidFill>
-                  </a:tcPr>
+                  <a:tcPr marL="9718" marR="9718" marT="9718" marB="9718" anchor="ctr"/>
                 </a:tc>
                 <a:tc>
                   <a:txBody>
                     <a:bodyPr/>
                     <a:lstStyle/>
                     <a:p>
-                      <a:pPr fontAlgn="t">
+                      <a:pPr marR="221615" algn="just">
+                        <a:lnSpc>
+                          <a:spcPct val="150000"/>
+                        </a:lnSpc>
                         <a:buNone/>
                       </a:pPr>
                       <a:r>
-                        <a:rPr lang="en-IN" sz="2200">
-                          <a:solidFill>
-                            <a:schemeClr val="bg2"/>
-                          </a:solidFill>
+                        <a:rPr lang="en-IN" sz="1400" kern="100">
                           <a:effectLst/>
-                          <a:latin typeface="Anthropic Mono"/>
                         </a:rPr>
-                        <a:t>run_code_safe()</a:t>
+                        <a:t>:</a:t>
                       </a:r>
-                      <a:endParaRPr lang="en-IN" sz="2200">
-                        <a:solidFill>
-                          <a:schemeClr val="bg2"/>
-                        </a:solidFill>
+                      <a:endParaRPr lang="en-IN" sz="1400" kern="100">
                         <a:effectLst/>
+                        <a:latin typeface="Calibri" panose="020F0502020204030204" pitchFamily="34" charset="0"/>
+                        <a:ea typeface="Times New Roman" panose="02020603050405020304" pitchFamily="18" charset="0"/>
                       </a:endParaRPr>
                     </a:p>
                   </a:txBody>
-                  <a:tcPr>
-                    <a:lnL w="12700" cap="flat" cmpd="sng" algn="ctr">
-                      <a:solidFill>
-                        <a:srgbClr val="9061C8"/>
-                      </a:solidFill>
-                      <a:prstDash val="solid"/>
-                      <a:round/>
-                      <a:headEnd type="none" w="med" len="med"/>
-                      <a:tailEnd type="none" w="med" len="med"/>
-                    </a:lnL>
-                    <a:lnR w="12700" cap="flat" cmpd="sng" algn="ctr">
-                      <a:solidFill>
-                        <a:srgbClr val="704299"/>
-                      </a:solidFill>
-                      <a:prstDash val="solid"/>
-                      <a:round/>
-                      <a:headEnd type="none" w="med" len="med"/>
-                      <a:tailEnd type="none" w="med" len="med"/>
-                    </a:lnR>
-                    <a:lnT w="12700" cap="flat" cmpd="sng" algn="ctr">
-                      <a:solidFill>
-                        <a:srgbClr val="9061C8"/>
-                      </a:solidFill>
-                      <a:prstDash val="solid"/>
-                      <a:round/>
-                      <a:headEnd type="none" w="med" len="med"/>
-                      <a:tailEnd type="none" w="med" len="med"/>
-                    </a:lnT>
-                    <a:lnB w="12700" cap="flat" cmpd="sng" algn="ctr">
-                      <a:solidFill>
-                        <a:srgbClr val="30421C"/>
-                      </a:solidFill>
-                      <a:prstDash val="solid"/>
-                      <a:round/>
-                      <a:headEnd type="none" w="med" len="med"/>
-                      <a:tailEnd type="none" w="med" len="med"/>
-                    </a:lnB>
-                    <a:solidFill>
-                      <a:srgbClr val="1F1F1E"/>
-                    </a:solidFill>
-                  </a:tcPr>
+                  <a:tcPr marL="9718" marR="9718" marT="9718" marB="9718" anchor="ctr"/>
                 </a:tc>
                 <a:tc>
                   <a:txBody>
                     <a:bodyPr/>
                     <a:lstStyle/>
                     <a:p>
-                      <a:pPr fontAlgn="t">
+                      <a:pPr marR="221615" algn="just">
+                        <a:lnSpc>
+                          <a:spcPct val="150000"/>
+                        </a:lnSpc>
                         <a:buNone/>
                       </a:pPr>
                       <a:r>
-                        <a:rPr lang="en-IN" sz="2200">
-                          <a:solidFill>
-                            <a:schemeClr val="bg2"/>
-                          </a:solidFill>
+                        <a:rPr lang="en-IN" sz="1400" kern="100">
                           <a:effectLst/>
                         </a:rPr>
-                        <a:t>Execute code safely</a:t>
+                        <a:t>Node.js</a:t>
                       </a:r>
+                      <a:endParaRPr lang="en-IN" sz="1400" kern="100">
+                        <a:effectLst/>
+                        <a:latin typeface="Calibri" panose="020F0502020204030204" pitchFamily="34" charset="0"/>
+                        <a:ea typeface="Times New Roman" panose="02020603050405020304" pitchFamily="18" charset="0"/>
+                      </a:endParaRPr>
                     </a:p>
                   </a:txBody>
-                  <a:tcPr>
-                    <a:lnL w="12700" cap="flat" cmpd="sng" algn="ctr">
-                      <a:solidFill>
-                        <a:srgbClr val="704299"/>
-                      </a:solidFill>
-                      <a:prstDash val="solid"/>
-                      <a:round/>
-                      <a:headEnd type="none" w="med" len="med"/>
-                      <a:tailEnd type="none" w="med" len="med"/>
-                    </a:lnL>
-                    <a:lnR w="12700" cap="flat" cmpd="sng" algn="ctr">
-                      <a:solidFill>
-                        <a:srgbClr val="704299"/>
-                      </a:solidFill>
-                      <a:prstDash val="solid"/>
-                      <a:round/>
-                      <a:headEnd type="none" w="med" len="med"/>
-                      <a:tailEnd type="none" w="med" len="med"/>
-                    </a:lnR>
-                    <a:lnT w="12700" cap="flat" cmpd="sng" algn="ctr">
-                      <a:solidFill>
-                        <a:srgbClr val="704299"/>
-                      </a:solidFill>
-                      <a:prstDash val="solid"/>
-                      <a:round/>
-                      <a:headEnd type="none" w="med" len="med"/>
-                      <a:tailEnd type="none" w="med" len="med"/>
-                    </a:lnT>
-                    <a:lnB w="12700" cap="flat" cmpd="sng" algn="ctr">
-                      <a:solidFill>
-                        <a:srgbClr val="5033AC"/>
-                      </a:solidFill>
-                      <a:prstDash val="solid"/>
-                      <a:round/>
-                      <a:headEnd type="none" w="med" len="med"/>
-                      <a:tailEnd type="none" w="med" len="med"/>
-                    </a:lnB>
-                    <a:solidFill>
-                      <a:srgbClr val="1F1F1E"/>
-                    </a:solidFill>
-                  </a:tcPr>
+                  <a:tcPr marL="9718" marR="9718" marT="9718" marB="9718" anchor="ctr"/>
                 </a:tc>
                 <a:extLst>
                   <a:ext uri="{0D108BD9-81ED-4DB2-BD59-A6C34878D82A}">
-                    <a16:rowId xmlns:a16="http://schemas.microsoft.com/office/drawing/2014/main" val="480858625"/>
+                    <a16:rowId xmlns:a16="http://schemas.microsoft.com/office/drawing/2014/main" val="1740609099"/>
                   </a:ext>
                 </a:extLst>
               </a:tr>
-              <a:tr h="517236">
+              <a:tr h="384175">
                 <a:tc>
                   <a:txBody>
                     <a:bodyPr/>
                     <a:lstStyle/>
                     <a:p>
-                      <a:pPr fontAlgn="t">
+                      <a:pPr marR="221615" algn="just">
+                        <a:lnSpc>
+                          <a:spcPct val="150000"/>
+                        </a:lnSpc>
                         <a:buNone/>
                       </a:pPr>
                       <a:r>
-                        <a:rPr lang="en-IN" sz="2200">
-                          <a:solidFill>
-                            <a:schemeClr val="bg2"/>
-                          </a:solidFill>
+                        <a:rPr lang="en-IN" sz="1400" kern="100">
                           <a:effectLst/>
                         </a:rPr>
-                        <a:t>Token Authentication</a:t>
+                        <a:t>Flow Rendering</a:t>
                       </a:r>
+                      <a:endParaRPr lang="en-IN" sz="1400" kern="100">
+                        <a:effectLst/>
+                        <a:latin typeface="Calibri" panose="020F0502020204030204" pitchFamily="34" charset="0"/>
+                        <a:ea typeface="Times New Roman" panose="02020603050405020304" pitchFamily="18" charset="0"/>
+                      </a:endParaRPr>
                     </a:p>
                   </a:txBody>
-                  <a:tcPr>
-                    <a:lnL w="12700" cap="flat" cmpd="sng" algn="ctr">
-                      <a:solidFill>
-                        <a:srgbClr val="9058AC"/>
-                      </a:solidFill>
-                      <a:prstDash val="solid"/>
-                      <a:round/>
-                      <a:headEnd type="none" w="med" len="med"/>
-                      <a:tailEnd type="none" w="med" len="med"/>
-                    </a:lnL>
-                    <a:lnR w="12700" cap="flat" cmpd="sng" algn="ctr">
-                      <a:solidFill>
-                        <a:srgbClr val="30421C"/>
-                      </a:solidFill>
-                      <a:prstDash val="solid"/>
-                      <a:round/>
-                      <a:headEnd type="none" w="med" len="med"/>
-                      <a:tailEnd type="none" w="med" len="med"/>
-                    </a:lnR>
-                    <a:lnT w="12700" cap="flat" cmpd="sng" algn="ctr">
-                      <a:solidFill>
-                        <a:srgbClr val="9058AC"/>
-                      </a:solidFill>
-                      <a:prstDash val="solid"/>
-                      <a:round/>
-                      <a:headEnd type="none" w="med" len="med"/>
-                      <a:tailEnd type="none" w="med" len="med"/>
-                    </a:lnT>
-                    <a:lnB w="12700" cap="flat" cmpd="sng" algn="ctr">
-                      <a:solidFill>
-                        <a:srgbClr val="5033AC"/>
-                      </a:solidFill>
-                      <a:prstDash val="solid"/>
-                      <a:round/>
-                      <a:headEnd type="none" w="med" len="med"/>
-                      <a:tailEnd type="none" w="med" len="med"/>
-                    </a:lnB>
-                    <a:solidFill>
-                      <a:srgbClr val="1F1F1E"/>
-                    </a:solidFill>
-                  </a:tcPr>
+                  <a:tcPr marL="9718" marR="9718" marT="9718" marB="9718" anchor="ctr"/>
                 </a:tc>
                 <a:tc>
                   <a:txBody>
                     <a:bodyPr/>
                     <a:lstStyle/>
                     <a:p>
-                      <a:pPr fontAlgn="t">
+                      <a:pPr marR="221615" algn="just">
+                        <a:lnSpc>
+                          <a:spcPct val="150000"/>
+                        </a:lnSpc>
                         <a:buNone/>
                       </a:pPr>
                       <a:r>
-                        <a:rPr lang="en-IN" sz="2200">
-                          <a:solidFill>
-                            <a:schemeClr val="bg2"/>
-                          </a:solidFill>
+                        <a:rPr lang="en-IN" sz="1400" kern="100">
                           <a:effectLst/>
-                          <a:latin typeface="Anthropic Mono"/>
                         </a:rPr>
-                        <a:t>gen_token()</a:t>
+                        <a:t>:</a:t>
                       </a:r>
-                      <a:endParaRPr lang="en-IN" sz="2200">
-                        <a:solidFill>
-                          <a:schemeClr val="bg2"/>
-                        </a:solidFill>
+                      <a:endParaRPr lang="en-IN" sz="1400" kern="100">
                         <a:effectLst/>
+                        <a:latin typeface="Calibri" panose="020F0502020204030204" pitchFamily="34" charset="0"/>
+                        <a:ea typeface="Times New Roman" panose="02020603050405020304" pitchFamily="18" charset="0"/>
                       </a:endParaRPr>
                     </a:p>
                   </a:txBody>
-                  <a:tcPr>
-                    <a:lnL w="12700" cap="flat" cmpd="sng" algn="ctr">
-                      <a:solidFill>
-                        <a:srgbClr val="30421C"/>
-                      </a:solidFill>
-                      <a:prstDash val="solid"/>
-                      <a:round/>
-                      <a:headEnd type="none" w="med" len="med"/>
-                      <a:tailEnd type="none" w="med" len="med"/>
-                    </a:lnL>
-                    <a:lnR w="12700" cap="flat" cmpd="sng" algn="ctr">
-                      <a:solidFill>
-                        <a:srgbClr val="5033AC"/>
-                      </a:solidFill>
-                      <a:prstDash val="solid"/>
-                      <a:round/>
-                      <a:headEnd type="none" w="med" len="med"/>
-                      <a:tailEnd type="none" w="med" len="med"/>
-                    </a:lnR>
-                    <a:lnT w="12700" cap="flat" cmpd="sng" algn="ctr">
-                      <a:solidFill>
-                        <a:srgbClr val="30421C"/>
-                      </a:solidFill>
-                      <a:prstDash val="solid"/>
-                      <a:round/>
-                      <a:headEnd type="none" w="med" len="med"/>
-                      <a:tailEnd type="none" w="med" len="med"/>
-                    </a:lnT>
-                    <a:lnB w="12700" cap="flat" cmpd="sng" algn="ctr">
-                      <a:solidFill>
-                        <a:srgbClr val="E0B2DA"/>
-                      </a:solidFill>
-                      <a:prstDash val="solid"/>
-                      <a:round/>
-                      <a:headEnd type="none" w="med" len="med"/>
-                      <a:tailEnd type="none" w="med" len="med"/>
-                    </a:lnB>
-                    <a:solidFill>
-                      <a:srgbClr val="1F1F1E"/>
-                    </a:solidFill>
-                  </a:tcPr>
+                  <a:tcPr marL="9718" marR="9718" marT="9718" marB="9718" anchor="ctr"/>
                 </a:tc>
                 <a:tc>
                   <a:txBody>
                     <a:bodyPr/>
                     <a:lstStyle/>
                     <a:p>
-                      <a:pPr fontAlgn="t">
+                      <a:pPr marR="221615" algn="just">
+                        <a:lnSpc>
+                          <a:spcPct val="150000"/>
+                        </a:lnSpc>
                         <a:buNone/>
                       </a:pPr>
                       <a:r>
-                        <a:rPr lang="en-US" sz="2200">
-                          <a:solidFill>
-                            <a:schemeClr val="bg2"/>
-                          </a:solidFill>
+                        <a:rPr lang="en-IN" sz="1400" kern="100">
                           <a:effectLst/>
                         </a:rPr>
-                        <a:t>Keep users logged in securely</a:t>
+                        <a:t>React Flow (@xyflow/react)</a:t>
                       </a:r>
+                      <a:endParaRPr lang="en-IN" sz="1400" kern="100">
+                        <a:effectLst/>
+                        <a:latin typeface="Calibri" panose="020F0502020204030204" pitchFamily="34" charset="0"/>
+                        <a:ea typeface="Times New Roman" panose="02020603050405020304" pitchFamily="18" charset="0"/>
+                      </a:endParaRPr>
                     </a:p>
                   </a:txBody>
-                  <a:tcPr>
-                    <a:lnL w="12700" cap="flat" cmpd="sng" algn="ctr">
-                      <a:solidFill>
-                        <a:srgbClr val="5033AC"/>
-                      </a:solidFill>
-                      <a:prstDash val="solid"/>
-                      <a:round/>
-                      <a:headEnd type="none" w="med" len="med"/>
-                      <a:tailEnd type="none" w="med" len="med"/>
-                    </a:lnL>
-                    <a:lnR w="12700" cap="flat" cmpd="sng" algn="ctr">
-                      <a:solidFill>
-                        <a:srgbClr val="5033AC"/>
-                      </a:solidFill>
-                      <a:prstDash val="solid"/>
-                      <a:round/>
-                      <a:headEnd type="none" w="med" len="med"/>
-                      <a:tailEnd type="none" w="med" len="med"/>
-                    </a:lnR>
-                    <a:lnT w="12700" cap="flat" cmpd="sng" algn="ctr">
-                      <a:solidFill>
-                        <a:srgbClr val="5033AC"/>
-                      </a:solidFill>
-                      <a:prstDash val="solid"/>
-                      <a:round/>
-                      <a:headEnd type="none" w="med" len="med"/>
-                      <a:tailEnd type="none" w="med" len="med"/>
-                    </a:lnT>
-                    <a:lnB w="12700" cap="flat" cmpd="sng" algn="ctr">
-                      <a:solidFill>
-                        <a:srgbClr val="90DE60"/>
-                      </a:solidFill>
-                      <a:prstDash val="solid"/>
-                      <a:round/>
-                      <a:headEnd type="none" w="med" len="med"/>
-                      <a:tailEnd type="none" w="med" len="med"/>
-                    </a:lnB>
-                    <a:solidFill>
-                      <a:srgbClr val="1F1F1E"/>
-                    </a:solidFill>
-                  </a:tcPr>
+                  <a:tcPr marL="9718" marR="9718" marT="9718" marB="9718" anchor="ctr"/>
                 </a:tc>
                 <a:extLst>
                   <a:ext uri="{0D108BD9-81ED-4DB2-BD59-A6C34878D82A}">
-                    <a16:rowId xmlns:a16="http://schemas.microsoft.com/office/drawing/2014/main" val="990520156"/>
+                    <a16:rowId xmlns:a16="http://schemas.microsoft.com/office/drawing/2014/main" val="1014192941"/>
                   </a:ext>
                 </a:extLst>
               </a:tr>
-              <a:tr h="517236">
+              <a:tr h="384175">
                 <a:tc>
                   <a:txBody>
                     <a:bodyPr/>
                     <a:lstStyle/>
                     <a:p>
-                      <a:pPr fontAlgn="t">
+                      <a:pPr marR="221615" algn="just">
+                        <a:lnSpc>
+                          <a:spcPct val="150000"/>
+                        </a:lnSpc>
                         <a:buNone/>
                       </a:pPr>
                       <a:r>
-                        <a:rPr lang="en-IN" sz="2200">
-                          <a:solidFill>
-                            <a:schemeClr val="bg2"/>
-                          </a:solidFill>
+                        <a:rPr lang="en-IN" sz="1400" kern="100">
                           <a:effectLst/>
                         </a:rPr>
-                        <a:t>OTP Generation</a:t>
+                        <a:t>Graph Auto-Layout</a:t>
                       </a:r>
+                      <a:endParaRPr lang="en-IN" sz="1400" kern="100">
+                        <a:effectLst/>
+                        <a:latin typeface="Calibri" panose="020F0502020204030204" pitchFamily="34" charset="0"/>
+                        <a:ea typeface="Times New Roman" panose="02020603050405020304" pitchFamily="18" charset="0"/>
+                      </a:endParaRPr>
                     </a:p>
                   </a:txBody>
-                  <a:tcPr>
-                    <a:lnL w="12700" cap="flat" cmpd="sng" algn="ctr">
-                      <a:solidFill>
-                        <a:srgbClr val="5033AC"/>
-                      </a:solidFill>
-                      <a:prstDash val="solid"/>
-                      <a:round/>
-                      <a:headEnd type="none" w="med" len="med"/>
-                      <a:tailEnd type="none" w="med" len="med"/>
-                    </a:lnL>
-                    <a:lnR w="12700" cap="flat" cmpd="sng" algn="ctr">
-                      <a:solidFill>
-                        <a:srgbClr val="E0B2DA"/>
-                      </a:solidFill>
-                      <a:prstDash val="solid"/>
-                      <a:round/>
-                      <a:headEnd type="none" w="med" len="med"/>
-                      <a:tailEnd type="none" w="med" len="med"/>
-                    </a:lnR>
-                    <a:lnT w="12700" cap="flat" cmpd="sng" algn="ctr">
-                      <a:solidFill>
-                        <a:srgbClr val="5033AC"/>
-                      </a:solidFill>
-                      <a:prstDash val="solid"/>
-                      <a:round/>
-                      <a:headEnd type="none" w="med" len="med"/>
-                      <a:tailEnd type="none" w="med" len="med"/>
-                    </a:lnT>
-                    <a:lnB w="12700" cap="flat" cmpd="sng" algn="ctr">
-                      <a:solidFill>
-                        <a:srgbClr val="10DE60"/>
-                      </a:solidFill>
-                      <a:prstDash val="solid"/>
-                      <a:round/>
-                      <a:headEnd type="none" w="med" len="med"/>
-                      <a:tailEnd type="none" w="med" len="med"/>
-                    </a:lnB>
-                    <a:solidFill>
-                      <a:srgbClr val="1F1F1E"/>
-                    </a:solidFill>
-                  </a:tcPr>
+                  <a:tcPr marL="9718" marR="9718" marT="9718" marB="9718" anchor="ctr"/>
                 </a:tc>
                 <a:tc>
                   <a:txBody>
                     <a:bodyPr/>
                     <a:lstStyle/>
                     <a:p>
-                      <a:pPr fontAlgn="t">
+                      <a:pPr marR="221615" algn="just">
+                        <a:lnSpc>
+                          <a:spcPct val="150000"/>
+                        </a:lnSpc>
                         <a:buNone/>
                       </a:pPr>
                       <a:r>
-                        <a:rPr lang="en-IN" sz="2200">
-                          <a:solidFill>
-                            <a:schemeClr val="bg2"/>
-                          </a:solidFill>
+                        <a:rPr lang="en-IN" sz="1400" kern="100">
                           <a:effectLst/>
-                          <a:latin typeface="Anthropic Mono"/>
                         </a:rPr>
-                        <a:t>gen_otp()</a:t>
+                        <a:t>:</a:t>
                       </a:r>
-                      <a:endParaRPr lang="en-IN" sz="2200">
-                        <a:solidFill>
-                          <a:schemeClr val="bg2"/>
-                        </a:solidFill>
+                      <a:endParaRPr lang="en-IN" sz="1400" kern="100">
                         <a:effectLst/>
+                        <a:latin typeface="Calibri" panose="020F0502020204030204" pitchFamily="34" charset="0"/>
+                        <a:ea typeface="Times New Roman" panose="02020603050405020304" pitchFamily="18" charset="0"/>
                       </a:endParaRPr>
                     </a:p>
                   </a:txBody>
-                  <a:tcPr>
-                    <a:lnL w="12700" cap="flat" cmpd="sng" algn="ctr">
-                      <a:solidFill>
-                        <a:srgbClr val="E0B2DA"/>
-                      </a:solidFill>
-                      <a:prstDash val="solid"/>
-                      <a:round/>
-                      <a:headEnd type="none" w="med" len="med"/>
-                      <a:tailEnd type="none" w="med" len="med"/>
-                    </a:lnL>
-                    <a:lnR w="12700" cap="flat" cmpd="sng" algn="ctr">
-                      <a:solidFill>
-                        <a:srgbClr val="90DE60"/>
-                      </a:solidFill>
-                      <a:prstDash val="solid"/>
-                      <a:round/>
-                      <a:headEnd type="none" w="med" len="med"/>
-                      <a:tailEnd type="none" w="med" len="med"/>
-                    </a:lnR>
-                    <a:lnT w="12700" cap="flat" cmpd="sng" algn="ctr">
-                      <a:solidFill>
-                        <a:srgbClr val="E0B2DA"/>
-                      </a:solidFill>
-                      <a:prstDash val="solid"/>
-                      <a:round/>
-                      <a:headEnd type="none" w="med" len="med"/>
-                      <a:tailEnd type="none" w="med" len="med"/>
-                    </a:lnT>
-                    <a:lnB w="12700" cap="flat" cmpd="sng" algn="ctr">
-                      <a:solidFill>
-                        <a:srgbClr val="50E060"/>
-                      </a:solidFill>
-                      <a:prstDash val="solid"/>
-                      <a:round/>
-                      <a:headEnd type="none" w="med" len="med"/>
-                      <a:tailEnd type="none" w="med" len="med"/>
-                    </a:lnB>
-                    <a:solidFill>
-                      <a:srgbClr val="1F1F1E"/>
-                    </a:solidFill>
-                  </a:tcPr>
+                  <a:tcPr marL="9718" marR="9718" marT="9718" marB="9718" anchor="ctr"/>
                 </a:tc>
                 <a:tc>
                   <a:txBody>
                     <a:bodyPr/>
                     <a:lstStyle/>
                     <a:p>
-                      <a:pPr fontAlgn="t">
+                      <a:pPr marR="221615" algn="just">
+                        <a:lnSpc>
+                          <a:spcPct val="150000"/>
+                        </a:lnSpc>
                         <a:buNone/>
                       </a:pPr>
                       <a:r>
-                        <a:rPr lang="en-IN" sz="2200">
-                          <a:solidFill>
-                            <a:schemeClr val="bg2"/>
-                          </a:solidFill>
+                        <a:rPr lang="en-IN" sz="1400" kern="100">
                           <a:effectLst/>
                         </a:rPr>
-                        <a:t>Verify mobile number</a:t>
+                        <a:t>Dagre</a:t>
                       </a:r>
+                      <a:endParaRPr lang="en-IN" sz="1400" kern="100">
+                        <a:effectLst/>
+                        <a:latin typeface="Calibri" panose="020F0502020204030204" pitchFamily="34" charset="0"/>
+                        <a:ea typeface="Times New Roman" panose="02020603050405020304" pitchFamily="18" charset="0"/>
+                      </a:endParaRPr>
                     </a:p>
                   </a:txBody>
-                  <a:tcPr>
-                    <a:lnL w="12700" cap="flat" cmpd="sng" algn="ctr">
-                      <a:solidFill>
-                        <a:srgbClr val="90DE60"/>
-                      </a:solidFill>
-                      <a:prstDash val="solid"/>
-                      <a:round/>
-                      <a:headEnd type="none" w="med" len="med"/>
-                      <a:tailEnd type="none" w="med" len="med"/>
-                    </a:lnL>
-                    <a:lnR w="12700" cap="flat" cmpd="sng" algn="ctr">
-                      <a:solidFill>
-                        <a:srgbClr val="90DE60"/>
-                      </a:solidFill>
-                      <a:prstDash val="solid"/>
-                      <a:round/>
-                      <a:headEnd type="none" w="med" len="med"/>
-                      <a:tailEnd type="none" w="med" len="med"/>
-                    </a:lnR>
-                    <a:lnT w="12700" cap="flat" cmpd="sng" algn="ctr">
-                      <a:solidFill>
-                        <a:srgbClr val="90DE60"/>
-                      </a:solidFill>
-                      <a:prstDash val="solid"/>
-                      <a:round/>
-                      <a:headEnd type="none" w="med" len="med"/>
-                      <a:tailEnd type="none" w="med" len="med"/>
-                    </a:lnT>
-                    <a:lnB w="12700" cap="flat" cmpd="sng" algn="ctr">
-                      <a:solidFill>
-                        <a:srgbClr val="50EE60"/>
-                      </a:solidFill>
-                      <a:prstDash val="solid"/>
-                      <a:round/>
-                      <a:headEnd type="none" w="med" len="med"/>
-                      <a:tailEnd type="none" w="med" len="med"/>
-                    </a:lnB>
-                    <a:solidFill>
-                      <a:srgbClr val="1F1F1E"/>
-                    </a:solidFill>
-                  </a:tcPr>
+                  <a:tcPr marL="9718" marR="9718" marT="9718" marB="9718" anchor="ctr"/>
                 </a:tc>
                 <a:extLst>
                   <a:ext uri="{0D108BD9-81ED-4DB2-BD59-A6C34878D82A}">
-                    <a16:rowId xmlns:a16="http://schemas.microsoft.com/office/drawing/2014/main" val="4167610174"/>
+                    <a16:rowId xmlns:a16="http://schemas.microsoft.com/office/drawing/2014/main" val="3194850426"/>
                   </a:ext>
                 </a:extLst>
               </a:tr>
-              <a:tr h="517236">
+              <a:tr h="384175">
                 <a:tc>
                   <a:txBody>
                     <a:bodyPr/>
                     <a:lstStyle/>
                     <a:p>
-                      <a:pPr fontAlgn="t">
+                      <a:pPr marR="221615" algn="just">
+                        <a:lnSpc>
+                          <a:spcPct val="150000"/>
+                        </a:lnSpc>
                         <a:buNone/>
                       </a:pPr>
                       <a:r>
-                        <a:rPr lang="en-IN" sz="2200">
-                          <a:solidFill>
-                            <a:schemeClr val="bg2"/>
-                          </a:solidFill>
+                        <a:rPr lang="en-IN" sz="1400" kern="100">
                           <a:effectLst/>
                         </a:rPr>
-                        <a:t>SHA-256 Hashing</a:t>
+                        <a:t>PNG Export</a:t>
                       </a:r>
+                      <a:endParaRPr lang="en-IN" sz="1400" kern="100">
+                        <a:effectLst/>
+                        <a:latin typeface="Calibri" panose="020F0502020204030204" pitchFamily="34" charset="0"/>
+                        <a:ea typeface="Times New Roman" panose="02020603050405020304" pitchFamily="18" charset="0"/>
+                      </a:endParaRPr>
                     </a:p>
                   </a:txBody>
-                  <a:tcPr>
-                    <a:lnL w="12700" cap="flat" cmpd="sng" algn="ctr">
-                      <a:solidFill>
-                        <a:srgbClr val="10DE60"/>
-                      </a:solidFill>
-                      <a:prstDash val="solid"/>
-                      <a:round/>
-                      <a:headEnd type="none" w="med" len="med"/>
-                      <a:tailEnd type="none" w="med" len="med"/>
-                    </a:lnL>
-                    <a:lnR w="12700" cap="flat" cmpd="sng" algn="ctr">
-                      <a:solidFill>
-                        <a:srgbClr val="50E060"/>
-                      </a:solidFill>
-                      <a:prstDash val="solid"/>
-                      <a:round/>
-                      <a:headEnd type="none" w="med" len="med"/>
-                      <a:tailEnd type="none" w="med" len="med"/>
-                    </a:lnR>
-                    <a:lnT w="12700" cap="flat" cmpd="sng" algn="ctr">
-                      <a:solidFill>
-                        <a:srgbClr val="10DE60"/>
-                      </a:solidFill>
-                      <a:prstDash val="solid"/>
-                      <a:round/>
-                      <a:headEnd type="none" w="med" len="med"/>
-                      <a:tailEnd type="none" w="med" len="med"/>
-                    </a:lnT>
-                    <a:lnB w="12700" cap="flat" cmpd="sng" algn="ctr">
-                      <a:solidFill>
-                        <a:srgbClr val="D0F060"/>
-                      </a:solidFill>
-                      <a:prstDash val="solid"/>
-                      <a:round/>
-                      <a:headEnd type="none" w="med" len="med"/>
-                      <a:tailEnd type="none" w="med" len="med"/>
-                    </a:lnB>
-                    <a:solidFill>
-                      <a:srgbClr val="1F1F1E"/>
-                    </a:solidFill>
-                  </a:tcPr>
+                  <a:tcPr marL="9718" marR="9718" marT="9718" marB="9718" anchor="ctr"/>
                 </a:tc>
                 <a:tc>
                   <a:txBody>
                     <a:bodyPr/>
                     <a:lstStyle/>
                     <a:p>
-                      <a:pPr fontAlgn="t">
+                      <a:pPr marR="221615" algn="just">
+                        <a:lnSpc>
+                          <a:spcPct val="150000"/>
+                        </a:lnSpc>
                         <a:buNone/>
                       </a:pPr>
                       <a:r>
-                        <a:rPr lang="en-IN" sz="2200">
-                          <a:solidFill>
-                            <a:schemeClr val="bg2"/>
-                          </a:solidFill>
+                        <a:rPr lang="en-IN" sz="1400" kern="100">
                           <a:effectLst/>
-                          <a:latin typeface="Anthropic Mono"/>
                         </a:rPr>
-                        <a:t>hash_pw()</a:t>
+                        <a:t>:</a:t>
                       </a:r>
-                      <a:endParaRPr lang="en-IN" sz="2200">
-                        <a:solidFill>
-                          <a:schemeClr val="bg2"/>
-                        </a:solidFill>
+                      <a:endParaRPr lang="en-IN" sz="1400" kern="100">
                         <a:effectLst/>
+                        <a:latin typeface="Calibri" panose="020F0502020204030204" pitchFamily="34" charset="0"/>
+                        <a:ea typeface="Times New Roman" panose="02020603050405020304" pitchFamily="18" charset="0"/>
                       </a:endParaRPr>
                     </a:p>
                   </a:txBody>
-                  <a:tcPr>
-                    <a:lnL w="12700" cap="flat" cmpd="sng" algn="ctr">
-                      <a:solidFill>
-                        <a:srgbClr val="50E060"/>
-                      </a:solidFill>
-                      <a:prstDash val="solid"/>
-                      <a:round/>
-                      <a:headEnd type="none" w="med" len="med"/>
-                      <a:tailEnd type="none" w="med" len="med"/>
-                    </a:lnL>
-                    <a:lnR w="12700" cap="flat" cmpd="sng" algn="ctr">
-                      <a:solidFill>
-                        <a:srgbClr val="50EE60"/>
-                      </a:solidFill>
-                      <a:prstDash val="solid"/>
-                      <a:round/>
-                      <a:headEnd type="none" w="med" len="med"/>
-                      <a:tailEnd type="none" w="med" len="med"/>
-                    </a:lnR>
-                    <a:lnT w="12700" cap="flat" cmpd="sng" algn="ctr">
-                      <a:solidFill>
-                        <a:srgbClr val="50E060"/>
-                      </a:solidFill>
-                      <a:prstDash val="solid"/>
-                      <a:round/>
-                      <a:headEnd type="none" w="med" len="med"/>
-                      <a:tailEnd type="none" w="med" len="med"/>
-                    </a:lnT>
-                    <a:lnB w="12700" cap="flat" cmpd="sng" algn="ctr">
-                      <a:solidFill>
-                        <a:srgbClr val="90F060"/>
-                      </a:solidFill>
-                      <a:prstDash val="solid"/>
-                      <a:round/>
-                      <a:headEnd type="none" w="med" len="med"/>
-                      <a:tailEnd type="none" w="med" len="med"/>
-                    </a:lnB>
-                    <a:solidFill>
-                      <a:srgbClr val="1F1F1E"/>
-                    </a:solidFill>
-                  </a:tcPr>
+                  <a:tcPr marL="9718" marR="9718" marT="9718" marB="9718" anchor="ctr"/>
                 </a:tc>
                 <a:tc>
                   <a:txBody>
                     <a:bodyPr/>
                     <a:lstStyle/>
                     <a:p>
-                      <a:pPr fontAlgn="t">
+                      <a:pPr marR="221615" algn="just">
+                        <a:lnSpc>
+                          <a:spcPct val="150000"/>
+                        </a:lnSpc>
                         <a:buNone/>
                       </a:pPr>
                       <a:r>
-                        <a:rPr lang="en-IN" sz="2200">
-                          <a:solidFill>
-                            <a:schemeClr val="bg2"/>
-                          </a:solidFill>
+                        <a:rPr lang="en-IN" sz="1400" kern="100">
                           <a:effectLst/>
                         </a:rPr>
-                        <a:t>Store passwords safely</a:t>
+                        <a:t>html-to-image</a:t>
                       </a:r>
+                      <a:endParaRPr lang="en-IN" sz="1400" kern="100">
+                        <a:effectLst/>
+                        <a:latin typeface="Calibri" panose="020F0502020204030204" pitchFamily="34" charset="0"/>
+                        <a:ea typeface="Times New Roman" panose="02020603050405020304" pitchFamily="18" charset="0"/>
+                      </a:endParaRPr>
                     </a:p>
                   </a:txBody>
-                  <a:tcPr>
-                    <a:lnL w="12700" cap="flat" cmpd="sng" algn="ctr">
-                      <a:solidFill>
-                        <a:srgbClr val="50EE60"/>
-                      </a:solidFill>
-                      <a:prstDash val="solid"/>
-                      <a:round/>
-                      <a:headEnd type="none" w="med" len="med"/>
-                      <a:tailEnd type="none" w="med" len="med"/>
-                    </a:lnL>
-                    <a:lnR w="12700" cap="flat" cmpd="sng" algn="ctr">
-                      <a:solidFill>
-                        <a:srgbClr val="50EE60"/>
-                      </a:solidFill>
-                      <a:prstDash val="solid"/>
-                      <a:round/>
-                      <a:headEnd type="none" w="med" len="med"/>
-                      <a:tailEnd type="none" w="med" len="med"/>
-                    </a:lnR>
-                    <a:lnT w="12700" cap="flat" cmpd="sng" algn="ctr">
-                      <a:solidFill>
-                        <a:srgbClr val="50EE60"/>
-                      </a:solidFill>
-                      <a:prstDash val="solid"/>
-                      <a:round/>
-                      <a:headEnd type="none" w="med" len="med"/>
-                      <a:tailEnd type="none" w="med" len="med"/>
-                    </a:lnT>
-                    <a:lnB w="12700" cap="flat" cmpd="sng" algn="ctr">
-                      <a:solidFill>
-                        <a:srgbClr val="90F260"/>
-                      </a:solidFill>
-                      <a:prstDash val="solid"/>
-                      <a:round/>
-                      <a:headEnd type="none" w="med" len="med"/>
-                      <a:tailEnd type="none" w="med" len="med"/>
-                    </a:lnB>
-                    <a:solidFill>
-                      <a:srgbClr val="1F1F1E"/>
-                    </a:solidFill>
-                  </a:tcPr>
+                  <a:tcPr marL="9718" marR="9718" marT="9718" marB="9718" anchor="ctr"/>
                 </a:tc>
                 <a:extLst>
                   <a:ext uri="{0D108BD9-81ED-4DB2-BD59-A6C34878D82A}">
-                    <a16:rowId xmlns:a16="http://schemas.microsoft.com/office/drawing/2014/main" val="3765812300"/>
+                    <a16:rowId xmlns:a16="http://schemas.microsoft.com/office/drawing/2014/main" val="1801886051"/>
                   </a:ext>
                 </a:extLst>
               </a:tr>
-              <a:tr h="517236">
+              <a:tr h="384175">
                 <a:tc>
                   <a:txBody>
                     <a:bodyPr/>
                     <a:lstStyle/>
                     <a:p>
-                      <a:pPr fontAlgn="t">
+                      <a:pPr marR="221615" algn="just">
+                        <a:lnSpc>
+                          <a:spcPct val="150000"/>
+                        </a:lnSpc>
                         <a:buNone/>
                       </a:pPr>
                       <a:r>
-                        <a:rPr lang="en-IN" sz="2200">
-                          <a:solidFill>
-                            <a:schemeClr val="bg2"/>
-                          </a:solidFill>
+                        <a:rPr lang="en-IN" sz="1400" kern="100">
                           <a:effectLst/>
                         </a:rPr>
-                        <a:t>Rule-Based NLP</a:t>
+                        <a:t>SMS OTP</a:t>
                       </a:r>
+                      <a:endParaRPr lang="en-IN" sz="1400" kern="100">
+                        <a:effectLst/>
+                        <a:latin typeface="Calibri" panose="020F0502020204030204" pitchFamily="34" charset="0"/>
+                        <a:ea typeface="Times New Roman" panose="02020603050405020304" pitchFamily="18" charset="0"/>
+                      </a:endParaRPr>
                     </a:p>
                   </a:txBody>
-                  <a:tcPr>
-                    <a:lnL w="12700" cap="flat" cmpd="sng" algn="ctr">
-                      <a:solidFill>
-                        <a:srgbClr val="D0F060"/>
-                      </a:solidFill>
-                      <a:prstDash val="solid"/>
-                      <a:round/>
-                      <a:headEnd type="none" w="med" len="med"/>
-                      <a:tailEnd type="none" w="med" len="med"/>
-                    </a:lnL>
-                    <a:lnR w="12700" cap="flat" cmpd="sng" algn="ctr">
-                      <a:solidFill>
-                        <a:srgbClr val="90F060"/>
-                      </a:solidFill>
-                      <a:prstDash val="solid"/>
-                      <a:round/>
-                      <a:headEnd type="none" w="med" len="med"/>
-                      <a:tailEnd type="none" w="med" len="med"/>
-                    </a:lnR>
-                    <a:lnT w="12700" cap="flat" cmpd="sng" algn="ctr">
-                      <a:solidFill>
-                        <a:srgbClr val="D0F060"/>
-                      </a:solidFill>
-                      <a:prstDash val="solid"/>
-                      <a:round/>
-                      <a:headEnd type="none" w="med" len="med"/>
-                      <a:tailEnd type="none" w="med" len="med"/>
-                    </a:lnT>
-                    <a:lnB w="12700" cap="flat" cmpd="sng" algn="ctr">
-                      <a:solidFill>
-                        <a:srgbClr val="100061"/>
-                      </a:solidFill>
-                      <a:prstDash val="solid"/>
-                      <a:round/>
-                      <a:headEnd type="none" w="med" len="med"/>
-                      <a:tailEnd type="none" w="med" len="med"/>
-                    </a:lnB>
-                    <a:solidFill>
-                      <a:srgbClr val="1F1F1E"/>
-                    </a:solidFill>
-                  </a:tcPr>
+                  <a:tcPr marL="9718" marR="9718" marT="9718" marB="9718" anchor="ctr"/>
                 </a:tc>
                 <a:tc>
                   <a:txBody>
                     <a:bodyPr/>
                     <a:lstStyle/>
                     <a:p>
-                      <a:pPr fontAlgn="t">
+                      <a:pPr marR="221615" algn="just">
+                        <a:lnSpc>
+                          <a:spcPct val="150000"/>
+                        </a:lnSpc>
                         <a:buNone/>
                       </a:pPr>
                       <a:r>
-                        <a:rPr lang="en-IN" sz="2200">
-                          <a:solidFill>
-                            <a:schemeClr val="bg2"/>
-                          </a:solidFill>
+                        <a:rPr lang="en-IN" sz="1400" kern="100">
                           <a:effectLst/>
-                          <a:latin typeface="Anthropic Mono"/>
                         </a:rPr>
-                        <a:t>plain_english_explanation()</a:t>
+                        <a:t>:</a:t>
                       </a:r>
-                      <a:endParaRPr lang="en-IN" sz="2200">
-                        <a:solidFill>
-                          <a:schemeClr val="bg2"/>
-                        </a:solidFill>
+                      <a:endParaRPr lang="en-IN" sz="1400" kern="100">
                         <a:effectLst/>
+                        <a:latin typeface="Calibri" panose="020F0502020204030204" pitchFamily="34" charset="0"/>
+                        <a:ea typeface="Times New Roman" panose="02020603050405020304" pitchFamily="18" charset="0"/>
                       </a:endParaRPr>
                     </a:p>
                   </a:txBody>
-                  <a:tcPr>
-                    <a:lnL w="12700" cap="flat" cmpd="sng" algn="ctr">
-                      <a:solidFill>
-                        <a:srgbClr val="90F060"/>
-                      </a:solidFill>
-                      <a:prstDash val="solid"/>
-                      <a:round/>
-                      <a:headEnd type="none" w="med" len="med"/>
-                      <a:tailEnd type="none" w="med" len="med"/>
-                    </a:lnL>
-                    <a:lnR w="12700" cap="flat" cmpd="sng" algn="ctr">
-                      <a:solidFill>
-                        <a:srgbClr val="90F260"/>
-                      </a:solidFill>
-                      <a:prstDash val="solid"/>
-                      <a:round/>
-                      <a:headEnd type="none" w="med" len="med"/>
-                      <a:tailEnd type="none" w="med" len="med"/>
-                    </a:lnR>
-                    <a:lnT w="12700" cap="flat" cmpd="sng" algn="ctr">
-                      <a:solidFill>
-                        <a:srgbClr val="90F060"/>
-                      </a:solidFill>
-                      <a:prstDash val="solid"/>
-                      <a:round/>
-                      <a:headEnd type="none" w="med" len="med"/>
-                      <a:tailEnd type="none" w="med" len="med"/>
-                    </a:lnT>
-                    <a:lnB w="12700" cap="flat" cmpd="sng" algn="ctr">
-                      <a:solidFill>
-                        <a:srgbClr val="50F560"/>
-                      </a:solidFill>
-                      <a:prstDash val="solid"/>
-                      <a:round/>
-                      <a:headEnd type="none" w="med" len="med"/>
-                      <a:tailEnd type="none" w="med" len="med"/>
-                    </a:lnB>
-                    <a:solidFill>
-                      <a:srgbClr val="1F1F1E"/>
-                    </a:solidFill>
-                  </a:tcPr>
+                  <a:tcPr marL="9718" marR="9718" marT="9718" marB="9718" anchor="ctr"/>
                 </a:tc>
                 <a:tc>
                   <a:txBody>
                     <a:bodyPr/>
                     <a:lstStyle/>
                     <a:p>
-                      <a:pPr fontAlgn="t">
+                      <a:pPr marR="221615" algn="just">
+                        <a:lnSpc>
+                          <a:spcPct val="150000"/>
+                        </a:lnSpc>
                         <a:buNone/>
                       </a:pPr>
                       <a:r>
-                        <a:rPr lang="en-US" sz="2200">
-                          <a:solidFill>
-                            <a:schemeClr val="bg2"/>
-                          </a:solidFill>
+                        <a:rPr lang="en-IN" sz="1400" kern="100">
                           <a:effectLst/>
                         </a:rPr>
-                        <a:t>Explain code in simple English</a:t>
+                        <a:t>Fast2SMS Phone Auth</a:t>
                       </a:r>
+                      <a:endParaRPr lang="en-IN" sz="1400" kern="100">
+                        <a:effectLst/>
+                        <a:latin typeface="Calibri" panose="020F0502020204030204" pitchFamily="34" charset="0"/>
+                        <a:ea typeface="Times New Roman" panose="02020603050405020304" pitchFamily="18" charset="0"/>
+                      </a:endParaRPr>
                     </a:p>
                   </a:txBody>
-                  <a:tcPr>
-                    <a:lnL w="12700" cap="flat" cmpd="sng" algn="ctr">
-                      <a:solidFill>
-                        <a:srgbClr val="90F260"/>
-                      </a:solidFill>
-                      <a:prstDash val="solid"/>
-                      <a:round/>
-                      <a:headEnd type="none" w="med" len="med"/>
-                      <a:tailEnd type="none" w="med" len="med"/>
-                    </a:lnL>
-                    <a:lnR w="12700" cap="flat" cmpd="sng" algn="ctr">
-                      <a:solidFill>
-                        <a:srgbClr val="90F260"/>
-                      </a:solidFill>
-                      <a:prstDash val="solid"/>
-                      <a:round/>
-                      <a:headEnd type="none" w="med" len="med"/>
-                      <a:tailEnd type="none" w="med" len="med"/>
-                    </a:lnR>
-                    <a:lnT w="12700" cap="flat" cmpd="sng" algn="ctr">
-                      <a:solidFill>
-                        <a:srgbClr val="90F260"/>
-                      </a:solidFill>
-                      <a:prstDash val="solid"/>
-                      <a:round/>
-                      <a:headEnd type="none" w="med" len="med"/>
-                      <a:tailEnd type="none" w="med" len="med"/>
-                    </a:lnT>
-                    <a:lnB w="12700" cap="flat" cmpd="sng" algn="ctr">
-                      <a:solidFill>
-                        <a:srgbClr val="90F860"/>
-                      </a:solidFill>
-                      <a:prstDash val="solid"/>
-                      <a:round/>
-                      <a:headEnd type="none" w="med" len="med"/>
-                      <a:tailEnd type="none" w="med" len="med"/>
-                    </a:lnB>
-                    <a:solidFill>
-                      <a:srgbClr val="1F1F1E"/>
-                    </a:solidFill>
-                  </a:tcPr>
+                  <a:tcPr marL="9718" marR="9718" marT="9718" marB="9718" anchor="ctr"/>
                 </a:tc>
                 <a:extLst>
                   <a:ext uri="{0D108BD9-81ED-4DB2-BD59-A6C34878D82A}">
-                    <a16:rowId xmlns:a16="http://schemas.microsoft.com/office/drawing/2014/main" val="1111292141"/>
+                    <a16:rowId xmlns:a16="http://schemas.microsoft.com/office/drawing/2014/main" val="3182803072"/>
                   </a:ext>
                 </a:extLst>
               </a:tr>
-              <a:tr h="923636">
+              <a:tr h="384175">
                 <a:tc>
                   <a:txBody>
                     <a:bodyPr/>
                     <a:lstStyle/>
                     <a:p>
-                      <a:pPr fontAlgn="t">
+                      <a:pPr marR="221615" algn="just">
+                        <a:lnSpc>
+                          <a:spcPct val="150000"/>
+                        </a:lnSpc>
                         <a:buNone/>
                       </a:pPr>
                       <a:r>
-                        <a:rPr lang="en-IN" sz="2200">
-                          <a:solidFill>
-                            <a:schemeClr val="bg2"/>
-                          </a:solidFill>
+                        <a:rPr lang="en-IN" sz="1400" kern="100">
                           <a:effectLst/>
                         </a:rPr>
-                        <a:t>Canvas Drawing</a:t>
+                        <a:t>Code Encryption</a:t>
                       </a:r>
+                      <a:endParaRPr lang="en-IN" sz="1400" kern="100">
+                        <a:effectLst/>
+                        <a:latin typeface="Calibri" panose="020F0502020204030204" pitchFamily="34" charset="0"/>
+                        <a:ea typeface="Times New Roman" panose="02020603050405020304" pitchFamily="18" charset="0"/>
+                      </a:endParaRPr>
                     </a:p>
                   </a:txBody>
-                  <a:tcPr>
-                    <a:lnL w="12700" cap="flat" cmpd="sng" algn="ctr">
-                      <a:solidFill>
-                        <a:srgbClr val="100061"/>
-                      </a:solidFill>
-                      <a:prstDash val="solid"/>
-                      <a:round/>
-                      <a:headEnd type="none" w="med" len="med"/>
-                      <a:tailEnd type="none" w="med" len="med"/>
-                    </a:lnL>
-                    <a:lnR w="12700" cap="flat" cmpd="sng" algn="ctr">
-                      <a:solidFill>
-                        <a:srgbClr val="50F560"/>
-                      </a:solidFill>
-                      <a:prstDash val="solid"/>
-                      <a:round/>
-                      <a:headEnd type="none" w="med" len="med"/>
-                      <a:tailEnd type="none" w="med" len="med"/>
-                    </a:lnR>
-                    <a:lnT w="12700" cap="flat" cmpd="sng" algn="ctr">
-                      <a:solidFill>
-                        <a:srgbClr val="100061"/>
-                      </a:solidFill>
-                      <a:prstDash val="solid"/>
-                      <a:round/>
-                      <a:headEnd type="none" w="med" len="med"/>
-                      <a:tailEnd type="none" w="med" len="med"/>
-                    </a:lnT>
-                    <a:lnB w="4763" cap="flat" cmpd="sng" algn="ctr">
-                      <a:solidFill>
-                        <a:srgbClr val="100061"/>
-                      </a:solidFill>
-                      <a:prstDash val="solid"/>
-                      <a:round/>
-                      <a:headEnd type="none" w="med" len="med"/>
-                      <a:tailEnd type="none" w="med" len="med"/>
-                    </a:lnB>
-                    <a:solidFill>
-                      <a:srgbClr val="1F1F1E"/>
-                    </a:solidFill>
-                  </a:tcPr>
+                  <a:tcPr marL="9718" marR="9718" marT="9718" marB="9718" anchor="ctr"/>
                 </a:tc>
                 <a:tc>
                   <a:txBody>
                     <a:bodyPr/>
                     <a:lstStyle/>
                     <a:p>
-                      <a:pPr fontAlgn="t">
+                      <a:pPr marR="221615" algn="just">
+                        <a:lnSpc>
+                          <a:spcPct val="150000"/>
+                        </a:lnSpc>
                         <a:buNone/>
                       </a:pPr>
                       <a:r>
-                        <a:rPr lang="en-IN" sz="2200" dirty="0" err="1">
-                          <a:solidFill>
-                            <a:schemeClr val="bg2"/>
-                          </a:solidFill>
+                        <a:rPr lang="en-IN" sz="1400" kern="100">
                           <a:effectLst/>
-                          <a:latin typeface="Anthropic Mono"/>
                         </a:rPr>
-                        <a:t>handleDownload</a:t>
+                        <a:t>:</a:t>
                       </a:r>
-                      <a:r>
-                        <a:rPr lang="en-IN" sz="2200" dirty="0">
-                          <a:solidFill>
-                            <a:schemeClr val="bg2"/>
-                          </a:solidFill>
-                          <a:effectLst/>
-                          <a:latin typeface="Anthropic Mono"/>
-                        </a:rPr>
-                        <a:t>()</a:t>
-                      </a:r>
-                      <a:endParaRPr lang="en-IN" sz="2200" dirty="0">
-                        <a:solidFill>
-                          <a:schemeClr val="bg2"/>
-                        </a:solidFill>
+                      <a:endParaRPr lang="en-IN" sz="1400" kern="100">
                         <a:effectLst/>
+                        <a:latin typeface="Calibri" panose="020F0502020204030204" pitchFamily="34" charset="0"/>
+                        <a:ea typeface="Times New Roman" panose="02020603050405020304" pitchFamily="18" charset="0"/>
                       </a:endParaRPr>
                     </a:p>
                   </a:txBody>
-                  <a:tcPr>
-                    <a:lnL w="12700" cap="flat" cmpd="sng" algn="ctr">
-                      <a:solidFill>
-                        <a:srgbClr val="50F560"/>
-                      </a:solidFill>
-                      <a:prstDash val="solid"/>
-                      <a:round/>
-                      <a:headEnd type="none" w="med" len="med"/>
-                      <a:tailEnd type="none" w="med" len="med"/>
-                    </a:lnL>
-                    <a:lnR w="12700" cap="flat" cmpd="sng" algn="ctr">
-                      <a:solidFill>
-                        <a:srgbClr val="90F860"/>
-                      </a:solidFill>
-                      <a:prstDash val="solid"/>
-                      <a:round/>
-                      <a:headEnd type="none" w="med" len="med"/>
-                      <a:tailEnd type="none" w="med" len="med"/>
-                    </a:lnR>
-                    <a:lnT w="12700" cap="flat" cmpd="sng" algn="ctr">
-                      <a:solidFill>
-                        <a:srgbClr val="50F560"/>
-                      </a:solidFill>
-                      <a:prstDash val="solid"/>
-                      <a:round/>
-                      <a:headEnd type="none" w="med" len="med"/>
-                      <a:tailEnd type="none" w="med" len="med"/>
-                    </a:lnT>
-                    <a:lnB w="4763" cap="flat" cmpd="sng" algn="ctr">
-                      <a:solidFill>
-                        <a:srgbClr val="50F560"/>
-                      </a:solidFill>
-                      <a:prstDash val="solid"/>
-                      <a:round/>
-                      <a:headEnd type="none" w="med" len="med"/>
-                      <a:tailEnd type="none" w="med" len="med"/>
-                    </a:lnB>
-                    <a:solidFill>
-                      <a:srgbClr val="1F1F1E"/>
-                    </a:solidFill>
-                  </a:tcPr>
+                  <a:tcPr marL="9718" marR="9718" marT="9718" marB="9718" anchor="ctr"/>
                 </a:tc>
                 <a:tc>
                   <a:txBody>
                     <a:bodyPr/>
                     <a:lstStyle/>
                     <a:p>
-                      <a:pPr fontAlgn="t">
+                      <a:pPr marR="221615" algn="just">
+                        <a:lnSpc>
+                          <a:spcPct val="150000"/>
+                        </a:lnSpc>
                         <a:buNone/>
                       </a:pPr>
                       <a:r>
-                        <a:rPr lang="en-IN" sz="2200" dirty="0">
-                          <a:solidFill>
-                            <a:schemeClr val="bg2"/>
-                          </a:solidFill>
+                        <a:rPr lang="en-IN" sz="1400" kern="100">
                           <a:effectLst/>
                         </a:rPr>
-                        <a:t>Generate downloadable PNG flowchart</a:t>
+                        <a:t>cryptography (Fernet/AES-256)</a:t>
                       </a:r>
+                      <a:endParaRPr lang="en-IN" sz="1400" kern="100">
+                        <a:effectLst/>
+                        <a:latin typeface="Calibri" panose="020F0502020204030204" pitchFamily="34" charset="0"/>
+                        <a:ea typeface="Times New Roman" panose="02020603050405020304" pitchFamily="18" charset="0"/>
+                      </a:endParaRPr>
                     </a:p>
                   </a:txBody>
-                  <a:tcPr>
-                    <a:lnL w="12700" cap="flat" cmpd="sng" algn="ctr">
-                      <a:solidFill>
-                        <a:srgbClr val="90F860"/>
-                      </a:solidFill>
-                      <a:prstDash val="solid"/>
-                      <a:round/>
-                      <a:headEnd type="none" w="med" len="med"/>
-                      <a:tailEnd type="none" w="med" len="med"/>
-                    </a:lnL>
-                    <a:lnR w="12700" cap="flat" cmpd="sng" algn="ctr">
-                      <a:solidFill>
-                        <a:srgbClr val="90F860"/>
-                      </a:solidFill>
-                      <a:prstDash val="solid"/>
-                      <a:round/>
-                      <a:headEnd type="none" w="med" len="med"/>
-                      <a:tailEnd type="none" w="med" len="med"/>
-                    </a:lnR>
-                    <a:lnT w="12700" cap="flat" cmpd="sng" algn="ctr">
-                      <a:solidFill>
-                        <a:srgbClr val="90F860"/>
-                      </a:solidFill>
-                      <a:prstDash val="solid"/>
-                      <a:round/>
-                      <a:headEnd type="none" w="med" len="med"/>
-                      <a:tailEnd type="none" w="med" len="med"/>
-                    </a:lnT>
-                    <a:lnB w="4763" cap="flat" cmpd="sng" algn="ctr">
-                      <a:solidFill>
-                        <a:srgbClr val="90F860"/>
-                      </a:solidFill>
-                      <a:prstDash val="solid"/>
-                      <a:round/>
-                      <a:headEnd type="none" w="med" len="med"/>
-                      <a:tailEnd type="none" w="med" len="med"/>
-                    </a:lnB>
-                    <a:solidFill>
-                      <a:srgbClr val="1F1F1E"/>
-                    </a:solidFill>
-                  </a:tcPr>
+                  <a:tcPr marL="9718" marR="9718" marT="9718" marB="9718" anchor="ctr"/>
                 </a:tc>
                 <a:extLst>
                   <a:ext uri="{0D108BD9-81ED-4DB2-BD59-A6C34878D82A}">
-                    <a16:rowId xmlns:a16="http://schemas.microsoft.com/office/drawing/2014/main" val="3141965883"/>
+                    <a16:rowId xmlns:a16="http://schemas.microsoft.com/office/drawing/2014/main" val="1656096827"/>
+                  </a:ext>
+                </a:extLst>
+              </a:tr>
+              <a:tr h="384175">
+                <a:tc>
+                  <a:txBody>
+                    <a:bodyPr/>
+                    <a:lstStyle/>
+                    <a:p>
+                      <a:pPr marR="221615" algn="just">
+                        <a:lnSpc>
+                          <a:spcPct val="150000"/>
+                        </a:lnSpc>
+                        <a:buNone/>
+                      </a:pPr>
+                      <a:r>
+                        <a:rPr lang="en-IN" sz="1400" kern="100">
+                          <a:effectLst/>
+                        </a:rPr>
+                        <a:t>Password Hashing</a:t>
+                      </a:r>
+                      <a:endParaRPr lang="en-IN" sz="1400" kern="100">
+                        <a:effectLst/>
+                        <a:latin typeface="Calibri" panose="020F0502020204030204" pitchFamily="34" charset="0"/>
+                        <a:ea typeface="Times New Roman" panose="02020603050405020304" pitchFamily="18" charset="0"/>
+                      </a:endParaRPr>
+                    </a:p>
+                  </a:txBody>
+                  <a:tcPr marL="9718" marR="9718" marT="9718" marB="9718" anchor="ctr"/>
+                </a:tc>
+                <a:tc>
+                  <a:txBody>
+                    <a:bodyPr/>
+                    <a:lstStyle/>
+                    <a:p>
+                      <a:pPr marR="221615" algn="just">
+                        <a:lnSpc>
+                          <a:spcPct val="150000"/>
+                        </a:lnSpc>
+                        <a:buNone/>
+                      </a:pPr>
+                      <a:r>
+                        <a:rPr lang="en-IN" sz="1400" kern="100">
+                          <a:effectLst/>
+                        </a:rPr>
+                        <a:t>:</a:t>
+                      </a:r>
+                      <a:endParaRPr lang="en-IN" sz="1400" kern="100">
+                        <a:effectLst/>
+                        <a:latin typeface="Calibri" panose="020F0502020204030204" pitchFamily="34" charset="0"/>
+                        <a:ea typeface="Times New Roman" panose="02020603050405020304" pitchFamily="18" charset="0"/>
+                      </a:endParaRPr>
+                    </a:p>
+                  </a:txBody>
+                  <a:tcPr marL="9718" marR="9718" marT="9718" marB="9718" anchor="ctr"/>
+                </a:tc>
+                <a:tc>
+                  <a:txBody>
+                    <a:bodyPr/>
+                    <a:lstStyle/>
+                    <a:p>
+                      <a:pPr marR="221615" algn="just">
+                        <a:lnSpc>
+                          <a:spcPct val="150000"/>
+                        </a:lnSpc>
+                        <a:buNone/>
+                      </a:pPr>
+                      <a:r>
+                        <a:rPr lang="en-IN" sz="1400" kern="100">
+                          <a:effectLst/>
+                        </a:rPr>
+                        <a:t>hashlib SHA-256</a:t>
+                      </a:r>
+                      <a:endParaRPr lang="en-IN" sz="1400" kern="100">
+                        <a:effectLst/>
+                        <a:latin typeface="Calibri" panose="020F0502020204030204" pitchFamily="34" charset="0"/>
+                        <a:ea typeface="Times New Roman" panose="02020603050405020304" pitchFamily="18" charset="0"/>
+                      </a:endParaRPr>
+                    </a:p>
+                  </a:txBody>
+                  <a:tcPr marL="9718" marR="9718" marT="9718" marB="9718" anchor="ctr"/>
+                </a:tc>
+                <a:extLst>
+                  <a:ext uri="{0D108BD9-81ED-4DB2-BD59-A6C34878D82A}">
+                    <a16:rowId xmlns:a16="http://schemas.microsoft.com/office/drawing/2014/main" val="1299331522"/>
+                  </a:ext>
+                </a:extLst>
+              </a:tr>
+              <a:tr h="384175">
+                <a:tc>
+                  <a:txBody>
+                    <a:bodyPr/>
+                    <a:lstStyle/>
+                    <a:p>
+                      <a:pPr marR="221615" algn="just">
+                        <a:lnSpc>
+                          <a:spcPct val="150000"/>
+                        </a:lnSpc>
+                        <a:buNone/>
+                      </a:pPr>
+                      <a:r>
+                        <a:rPr lang="en-IN" sz="1400" kern="100">
+                          <a:effectLst/>
+                        </a:rPr>
+                        <a:t>Deployment (FE)</a:t>
+                      </a:r>
+                      <a:endParaRPr lang="en-IN" sz="1400" kern="100">
+                        <a:effectLst/>
+                        <a:latin typeface="Calibri" panose="020F0502020204030204" pitchFamily="34" charset="0"/>
+                        <a:ea typeface="Times New Roman" panose="02020603050405020304" pitchFamily="18" charset="0"/>
+                      </a:endParaRPr>
+                    </a:p>
+                  </a:txBody>
+                  <a:tcPr marL="9718" marR="9718" marT="9718" marB="9718" anchor="ctr"/>
+                </a:tc>
+                <a:tc>
+                  <a:txBody>
+                    <a:bodyPr/>
+                    <a:lstStyle/>
+                    <a:p>
+                      <a:pPr marR="221615" algn="just">
+                        <a:lnSpc>
+                          <a:spcPct val="150000"/>
+                        </a:lnSpc>
+                        <a:buNone/>
+                      </a:pPr>
+                      <a:r>
+                        <a:rPr lang="en-IN" sz="1400" kern="100">
+                          <a:effectLst/>
+                        </a:rPr>
+                        <a:t>:</a:t>
+                      </a:r>
+                      <a:endParaRPr lang="en-IN" sz="1400" kern="100">
+                        <a:effectLst/>
+                        <a:latin typeface="Calibri" panose="020F0502020204030204" pitchFamily="34" charset="0"/>
+                        <a:ea typeface="Times New Roman" panose="02020603050405020304" pitchFamily="18" charset="0"/>
+                      </a:endParaRPr>
+                    </a:p>
+                  </a:txBody>
+                  <a:tcPr marL="9718" marR="9718" marT="9718" marB="9718" anchor="ctr"/>
+                </a:tc>
+                <a:tc>
+                  <a:txBody>
+                    <a:bodyPr/>
+                    <a:lstStyle/>
+                    <a:p>
+                      <a:pPr marR="221615" algn="just">
+                        <a:lnSpc>
+                          <a:spcPct val="150000"/>
+                        </a:lnSpc>
+                        <a:buNone/>
+                      </a:pPr>
+                      <a:r>
+                        <a:rPr lang="en-IN" sz="1400" kern="100">
+                          <a:effectLst/>
+                        </a:rPr>
+                        <a:t>Vercel</a:t>
+                      </a:r>
+                      <a:endParaRPr lang="en-IN" sz="1400" kern="100">
+                        <a:effectLst/>
+                        <a:latin typeface="Calibri" panose="020F0502020204030204" pitchFamily="34" charset="0"/>
+                        <a:ea typeface="Times New Roman" panose="02020603050405020304" pitchFamily="18" charset="0"/>
+                      </a:endParaRPr>
+                    </a:p>
+                  </a:txBody>
+                  <a:tcPr marL="9718" marR="9718" marT="9718" marB="9718" anchor="ctr"/>
+                </a:tc>
+                <a:extLst>
+                  <a:ext uri="{0D108BD9-81ED-4DB2-BD59-A6C34878D82A}">
+                    <a16:rowId xmlns:a16="http://schemas.microsoft.com/office/drawing/2014/main" val="1232920675"/>
+                  </a:ext>
+                </a:extLst>
+              </a:tr>
+              <a:tr h="384175">
+                <a:tc>
+                  <a:txBody>
+                    <a:bodyPr/>
+                    <a:lstStyle/>
+                    <a:p>
+                      <a:pPr marR="221615" algn="just">
+                        <a:lnSpc>
+                          <a:spcPct val="150000"/>
+                        </a:lnSpc>
+                        <a:buNone/>
+                      </a:pPr>
+                      <a:r>
+                        <a:rPr lang="en-IN" sz="1400" kern="100">
+                          <a:effectLst/>
+                        </a:rPr>
+                        <a:t>Deployment (BE)</a:t>
+                      </a:r>
+                      <a:endParaRPr lang="en-IN" sz="1400" kern="100">
+                        <a:effectLst/>
+                        <a:latin typeface="Calibri" panose="020F0502020204030204" pitchFamily="34" charset="0"/>
+                        <a:ea typeface="Times New Roman" panose="02020603050405020304" pitchFamily="18" charset="0"/>
+                      </a:endParaRPr>
+                    </a:p>
+                  </a:txBody>
+                  <a:tcPr marL="9718" marR="9718" marT="9718" marB="9718" anchor="ctr"/>
+                </a:tc>
+                <a:tc>
+                  <a:txBody>
+                    <a:bodyPr/>
+                    <a:lstStyle/>
+                    <a:p>
+                      <a:pPr marR="221615" algn="just">
+                        <a:lnSpc>
+                          <a:spcPct val="150000"/>
+                        </a:lnSpc>
+                        <a:buNone/>
+                      </a:pPr>
+                      <a:r>
+                        <a:rPr lang="en-IN" sz="1400" kern="100">
+                          <a:effectLst/>
+                        </a:rPr>
+                        <a:t>:</a:t>
+                      </a:r>
+                      <a:endParaRPr lang="en-IN" sz="1400" kern="100">
+                        <a:effectLst/>
+                        <a:latin typeface="Calibri" panose="020F0502020204030204" pitchFamily="34" charset="0"/>
+                        <a:ea typeface="Times New Roman" panose="02020603050405020304" pitchFamily="18" charset="0"/>
+                      </a:endParaRPr>
+                    </a:p>
+                  </a:txBody>
+                  <a:tcPr marL="9718" marR="9718" marT="9718" marB="9718" anchor="ctr"/>
+                </a:tc>
+                <a:tc>
+                  <a:txBody>
+                    <a:bodyPr/>
+                    <a:lstStyle/>
+                    <a:p>
+                      <a:pPr marR="221615" algn="just">
+                        <a:lnSpc>
+                          <a:spcPct val="150000"/>
+                        </a:lnSpc>
+                        <a:buNone/>
+                      </a:pPr>
+                      <a:r>
+                        <a:rPr lang="en-IN" sz="1400" kern="100">
+                          <a:effectLst/>
+                        </a:rPr>
+                        <a:t>Railway</a:t>
+                      </a:r>
+                      <a:endParaRPr lang="en-IN" sz="1400" kern="100">
+                        <a:effectLst/>
+                        <a:latin typeface="Calibri" panose="020F0502020204030204" pitchFamily="34" charset="0"/>
+                        <a:ea typeface="Times New Roman" panose="02020603050405020304" pitchFamily="18" charset="0"/>
+                      </a:endParaRPr>
+                    </a:p>
+                  </a:txBody>
+                  <a:tcPr marL="9718" marR="9718" marT="9718" marB="9718" anchor="ctr"/>
+                </a:tc>
+                <a:extLst>
+                  <a:ext uri="{0D108BD9-81ED-4DB2-BD59-A6C34878D82A}">
+                    <a16:rowId xmlns:a16="http://schemas.microsoft.com/office/drawing/2014/main" val="2223080128"/>
+                  </a:ext>
+                </a:extLst>
+              </a:tr>
+              <a:tr h="384175">
+                <a:tc>
+                  <a:txBody>
+                    <a:bodyPr/>
+                    <a:lstStyle/>
+                    <a:p>
+                      <a:pPr marR="221615" algn="just">
+                        <a:lnSpc>
+                          <a:spcPct val="150000"/>
+                        </a:lnSpc>
+                        <a:buNone/>
+                      </a:pPr>
+                      <a:r>
+                        <a:rPr lang="en-IN" sz="1400" kern="100">
+                          <a:effectLst/>
+                        </a:rPr>
+                        <a:t>Version Control</a:t>
+                      </a:r>
+                      <a:endParaRPr lang="en-IN" sz="1400" kern="100">
+                        <a:effectLst/>
+                        <a:latin typeface="Calibri" panose="020F0502020204030204" pitchFamily="34" charset="0"/>
+                        <a:ea typeface="Times New Roman" panose="02020603050405020304" pitchFamily="18" charset="0"/>
+                      </a:endParaRPr>
+                    </a:p>
+                  </a:txBody>
+                  <a:tcPr marL="9718" marR="9718" marT="9718" marB="9718" anchor="ctr"/>
+                </a:tc>
+                <a:tc>
+                  <a:txBody>
+                    <a:bodyPr/>
+                    <a:lstStyle/>
+                    <a:p>
+                      <a:pPr marR="221615" algn="just">
+                        <a:lnSpc>
+                          <a:spcPct val="150000"/>
+                        </a:lnSpc>
+                        <a:buNone/>
+                      </a:pPr>
+                      <a:r>
+                        <a:rPr lang="en-IN" sz="1400" kern="100">
+                          <a:effectLst/>
+                        </a:rPr>
+                        <a:t>:</a:t>
+                      </a:r>
+                      <a:endParaRPr lang="en-IN" sz="1400" kern="100">
+                        <a:effectLst/>
+                        <a:latin typeface="Calibri" panose="020F0502020204030204" pitchFamily="34" charset="0"/>
+                        <a:ea typeface="Times New Roman" panose="02020603050405020304" pitchFamily="18" charset="0"/>
+                      </a:endParaRPr>
+                    </a:p>
+                  </a:txBody>
+                  <a:tcPr marL="9718" marR="9718" marT="9718" marB="9718" anchor="ctr"/>
+                </a:tc>
+                <a:tc>
+                  <a:txBody>
+                    <a:bodyPr/>
+                    <a:lstStyle/>
+                    <a:p>
+                      <a:pPr marR="221615" algn="just">
+                        <a:lnSpc>
+                          <a:spcPct val="150000"/>
+                        </a:lnSpc>
+                        <a:buNone/>
+                      </a:pPr>
+                      <a:r>
+                        <a:rPr lang="en-IN" sz="1400" kern="100" dirty="0">
+                          <a:effectLst/>
+                        </a:rPr>
+                        <a:t>Git / GitHub</a:t>
+                      </a:r>
+                      <a:endParaRPr lang="en-IN" sz="1400" kern="100" dirty="0">
+                        <a:effectLst/>
+                        <a:latin typeface="Calibri" panose="020F0502020204030204" pitchFamily="34" charset="0"/>
+                        <a:ea typeface="Times New Roman" panose="02020603050405020304" pitchFamily="18" charset="0"/>
+                      </a:endParaRPr>
+                    </a:p>
+                  </a:txBody>
+                  <a:tcPr marL="9718" marR="9718" marT="9718" marB="9718" anchor="ctr"/>
+                </a:tc>
+                <a:extLst>
+                  <a:ext uri="{0D108BD9-81ED-4DB2-BD59-A6C34878D82A}">
+                    <a16:rowId xmlns:a16="http://schemas.microsoft.com/office/drawing/2014/main" val="93705722"/>
                   </a:ext>
                 </a:extLst>
               </a:tr>
@@ -7844,11 +6797,6 @@
         </a:graphic>
       </p:graphicFrame>
     </p:spTree>
-    <p:extLst>
-      <p:ext uri="{BB962C8B-B14F-4D97-AF65-F5344CB8AC3E}">
-        <p14:creationId xmlns:p14="http://schemas.microsoft.com/office/powerpoint/2010/main" val="3591533837"/>
-      </p:ext>
-    </p:extLst>
   </p:cSld>
   <p:clrMapOvr>
     <a:masterClrMapping/>
@@ -7878,6 +6826,973 @@
           <p:cNvPr id="2" name="Title 1">
             <a:extLst>
               <a:ext uri="{FF2B5EF4-FFF2-40B4-BE49-F238E27FC236}">
+                <a16:creationId xmlns:a16="http://schemas.microsoft.com/office/drawing/2014/main" id="{41C6BB94-0787-E268-E71C-639274FCF28B}"/>
+              </a:ext>
+            </a:extLst>
+          </p:cNvPr>
+          <p:cNvSpPr>
+            <a:spLocks noGrp="1"/>
+          </p:cNvSpPr>
+          <p:nvPr>
+            <p:ph type="title"/>
+          </p:nvPr>
+        </p:nvSpPr>
+        <p:spPr/>
+        <p:txBody>
+          <a:bodyPr/>
+          <a:lstStyle/>
+          <a:p>
+            <a:r>
+              <a:rPr lang="en-US" b="1" dirty="0"/>
+              <a:t>Hardware Specifications</a:t>
+            </a:r>
+            <a:endParaRPr lang="en-IN" dirty="0"/>
+          </a:p>
+        </p:txBody>
+      </p:sp>
+      <p:graphicFrame>
+        <p:nvGraphicFramePr>
+          <p:cNvPr id="4" name="Content Placeholder 3">
+            <a:extLst>
+              <a:ext uri="{FF2B5EF4-FFF2-40B4-BE49-F238E27FC236}">
+                <a16:creationId xmlns:a16="http://schemas.microsoft.com/office/drawing/2014/main" id="{DE954CDA-DFBD-FF70-3B68-171CC2BB6F97}"/>
+              </a:ext>
+            </a:extLst>
+          </p:cNvPr>
+          <p:cNvGraphicFramePr>
+            <a:graphicFrameLocks noGrp="1"/>
+          </p:cNvGraphicFramePr>
+          <p:nvPr>
+            <p:ph idx="1"/>
+            <p:extLst>
+              <p:ext uri="{D42A27DB-BD31-4B8C-83A1-F6EECF244321}">
+                <p14:modId xmlns:p14="http://schemas.microsoft.com/office/powerpoint/2010/main" val="2740501807"/>
+              </p:ext>
+            </p:extLst>
+          </p:nvPr>
+        </p:nvGraphicFramePr>
+        <p:xfrm>
+          <a:off x="827314" y="2028829"/>
+          <a:ext cx="12618722" cy="5395230"/>
+        </p:xfrm>
+        <a:graphic>
+          <a:graphicData uri="http://schemas.openxmlformats.org/drawingml/2006/table">
+            <a:tbl>
+              <a:tblPr firstRow="1" firstCol="1" bandRow="1">
+                <a:tableStyleId>{5C22544A-7EE6-4342-B048-85BDC9FD1C3A}</a:tableStyleId>
+              </a:tblPr>
+              <a:tblGrid>
+                <a:gridCol w="4755450">
+                  <a:extLst>
+                    <a:ext uri="{9D8B030D-6E8A-4147-A177-3AD203B41FA5}">
+                      <a16:colId xmlns:a16="http://schemas.microsoft.com/office/drawing/2014/main" val="2912572900"/>
+                    </a:ext>
+                  </a:extLst>
+                </a:gridCol>
+                <a:gridCol w="44450">
+                  <a:extLst>
+                    <a:ext uri="{9D8B030D-6E8A-4147-A177-3AD203B41FA5}">
+                      <a16:colId xmlns:a16="http://schemas.microsoft.com/office/drawing/2014/main" val="3678530207"/>
+                    </a:ext>
+                  </a:extLst>
+                </a:gridCol>
+                <a:gridCol w="2606274">
+                  <a:extLst>
+                    <a:ext uri="{9D8B030D-6E8A-4147-A177-3AD203B41FA5}">
+                      <a16:colId xmlns:a16="http://schemas.microsoft.com/office/drawing/2014/main" val="2470262006"/>
+                    </a:ext>
+                  </a:extLst>
+                </a:gridCol>
+                <a:gridCol w="44450">
+                  <a:extLst>
+                    <a:ext uri="{9D8B030D-6E8A-4147-A177-3AD203B41FA5}">
+                      <a16:colId xmlns:a16="http://schemas.microsoft.com/office/drawing/2014/main" val="3136968981"/>
+                    </a:ext>
+                  </a:extLst>
+                </a:gridCol>
+                <a:gridCol w="5168098">
+                  <a:extLst>
+                    <a:ext uri="{9D8B030D-6E8A-4147-A177-3AD203B41FA5}">
+                      <a16:colId xmlns:a16="http://schemas.microsoft.com/office/drawing/2014/main" val="1244947786"/>
+                    </a:ext>
+                  </a:extLst>
+                </a:gridCol>
+              </a:tblGrid>
+              <a:tr h="1045206">
+                <a:tc>
+                  <a:txBody>
+                    <a:bodyPr/>
+                    <a:lstStyle/>
+                    <a:p>
+                      <a:pPr marL="107950" algn="l" latinLnBrk="1">
+                        <a:lnSpc>
+                          <a:spcPct val="115000"/>
+                        </a:lnSpc>
+                        <a:buNone/>
+                      </a:pPr>
+                      <a:r>
+                        <a:rPr lang="en-IN" sz="1200" kern="100">
+                          <a:effectLst/>
+                        </a:rPr>
+                        <a:t>Component</a:t>
+                      </a:r>
+                      <a:endParaRPr lang="en-IN" sz="1000" kern="100">
+                        <a:effectLst/>
+                        <a:latin typeface="Batang" panose="02030600000101010101" pitchFamily="18" charset="-127"/>
+                        <a:ea typeface="Batang" panose="02030600000101010101" pitchFamily="18" charset="-127"/>
+                        <a:cs typeface="Times New Roman" panose="02020603050405020304" pitchFamily="18" charset="0"/>
+                      </a:endParaRPr>
+                    </a:p>
+                  </a:txBody>
+                  <a:tcPr marL="9525" marR="9525" marT="9525" marB="9525" anchor="ctr"/>
+                </a:tc>
+                <a:tc>
+                  <a:txBody>
+                    <a:bodyPr/>
+                    <a:lstStyle/>
+                    <a:p>
+                      <a:pPr>
+                        <a:lnSpc>
+                          <a:spcPct val="115000"/>
+                        </a:lnSpc>
+                        <a:buNone/>
+                      </a:pPr>
+                      <a:endParaRPr lang="en-IN" sz="1200" kern="100">
+                        <a:effectLst/>
+                        <a:latin typeface="Aptos" panose="020B0004020202020204" pitchFamily="34" charset="0"/>
+                      </a:endParaRPr>
+                    </a:p>
+                  </a:txBody>
+                  <a:tcPr marL="9525" marR="9525" marT="9525" marB="9525" anchor="ctr"/>
+                </a:tc>
+                <a:tc>
+                  <a:txBody>
+                    <a:bodyPr/>
+                    <a:lstStyle/>
+                    <a:p>
+                      <a:pPr marL="107950" algn="l" latinLnBrk="1">
+                        <a:lnSpc>
+                          <a:spcPct val="115000"/>
+                        </a:lnSpc>
+                        <a:buNone/>
+                      </a:pPr>
+                      <a:r>
+                        <a:rPr lang="en-IN" sz="1200" kern="100">
+                          <a:effectLst/>
+                        </a:rPr>
+                        <a:t>Minimum Requirements</a:t>
+                      </a:r>
+                      <a:endParaRPr lang="en-IN" sz="1000" kern="100">
+                        <a:effectLst/>
+                        <a:latin typeface="Batang" panose="02030600000101010101" pitchFamily="18" charset="-127"/>
+                        <a:ea typeface="Batang" panose="02030600000101010101" pitchFamily="18" charset="-127"/>
+                        <a:cs typeface="Times New Roman" panose="02020603050405020304" pitchFamily="18" charset="0"/>
+                      </a:endParaRPr>
+                    </a:p>
+                  </a:txBody>
+                  <a:tcPr marL="9525" marR="9525" marT="9525" marB="9525" anchor="ctr"/>
+                </a:tc>
+                <a:tc>
+                  <a:txBody>
+                    <a:bodyPr/>
+                    <a:lstStyle/>
+                    <a:p>
+                      <a:pPr>
+                        <a:lnSpc>
+                          <a:spcPct val="115000"/>
+                        </a:lnSpc>
+                        <a:buNone/>
+                      </a:pPr>
+                      <a:endParaRPr lang="en-IN" sz="1200" kern="100">
+                        <a:effectLst/>
+                        <a:latin typeface="Aptos" panose="020B0004020202020204" pitchFamily="34" charset="0"/>
+                      </a:endParaRPr>
+                    </a:p>
+                  </a:txBody>
+                  <a:tcPr marL="9525" marR="9525" marT="9525" marB="9525" anchor="ctr"/>
+                </a:tc>
+                <a:tc>
+                  <a:txBody>
+                    <a:bodyPr/>
+                    <a:lstStyle/>
+                    <a:p>
+                      <a:pPr marL="107950" algn="l" latinLnBrk="1">
+                        <a:lnSpc>
+                          <a:spcPct val="115000"/>
+                        </a:lnSpc>
+                        <a:buNone/>
+                      </a:pPr>
+                      <a:r>
+                        <a:rPr lang="en-IN" sz="1200" kern="100">
+                          <a:effectLst/>
+                        </a:rPr>
+                        <a:t>Recommended Requirements</a:t>
+                      </a:r>
+                      <a:endParaRPr lang="en-IN" sz="1000" kern="100">
+                        <a:effectLst/>
+                        <a:latin typeface="Batang" panose="02030600000101010101" pitchFamily="18" charset="-127"/>
+                        <a:ea typeface="Batang" panose="02030600000101010101" pitchFamily="18" charset="-127"/>
+                        <a:cs typeface="Times New Roman" panose="02020603050405020304" pitchFamily="18" charset="0"/>
+                      </a:endParaRPr>
+                    </a:p>
+                  </a:txBody>
+                  <a:tcPr marL="9525" marR="9525" marT="9525" marB="9525" anchor="ctr"/>
+                </a:tc>
+                <a:extLst>
+                  <a:ext uri="{0D108BD9-81ED-4DB2-BD59-A6C34878D82A}">
+                    <a16:rowId xmlns:a16="http://schemas.microsoft.com/office/drawing/2014/main" val="3266863928"/>
+                  </a:ext>
+                </a:extLst>
+              </a:tr>
+              <a:tr h="1045206">
+                <a:tc>
+                  <a:txBody>
+                    <a:bodyPr/>
+                    <a:lstStyle/>
+                    <a:p>
+                      <a:pPr marL="107950" algn="l" latinLnBrk="1">
+                        <a:lnSpc>
+                          <a:spcPct val="115000"/>
+                        </a:lnSpc>
+                        <a:buNone/>
+                      </a:pPr>
+                      <a:r>
+                        <a:rPr lang="en-IN" sz="1400" kern="100">
+                          <a:effectLst/>
+                        </a:rPr>
+                        <a:t>Processor</a:t>
+                      </a:r>
+                      <a:endParaRPr lang="en-IN" sz="1000" kern="100">
+                        <a:effectLst/>
+                        <a:latin typeface="Batang" panose="02030600000101010101" pitchFamily="18" charset="-127"/>
+                        <a:ea typeface="Batang" panose="02030600000101010101" pitchFamily="18" charset="-127"/>
+                        <a:cs typeface="Times New Roman" panose="02020603050405020304" pitchFamily="18" charset="0"/>
+                      </a:endParaRPr>
+                    </a:p>
+                  </a:txBody>
+                  <a:tcPr marL="9525" marR="9525" marT="9525" marB="9525" anchor="ctr"/>
+                </a:tc>
+                <a:tc>
+                  <a:txBody>
+                    <a:bodyPr/>
+                    <a:lstStyle/>
+                    <a:p>
+                      <a:pPr marL="107950" algn="l" latinLnBrk="1">
+                        <a:lnSpc>
+                          <a:spcPct val="115000"/>
+                        </a:lnSpc>
+                        <a:buNone/>
+                      </a:pPr>
+                      <a:r>
+                        <a:rPr lang="en-IN" sz="1400" kern="100" dirty="0">
+                          <a:effectLst/>
+                        </a:rPr>
+                        <a:t>:</a:t>
+                      </a:r>
+                      <a:endParaRPr lang="en-IN" sz="1000" kern="100" dirty="0">
+                        <a:effectLst/>
+                        <a:latin typeface="Batang" panose="02030600000101010101" pitchFamily="18" charset="-127"/>
+                        <a:ea typeface="Batang" panose="02030600000101010101" pitchFamily="18" charset="-127"/>
+                        <a:cs typeface="Times New Roman" panose="02020603050405020304" pitchFamily="18" charset="0"/>
+                      </a:endParaRPr>
+                    </a:p>
+                  </a:txBody>
+                  <a:tcPr marL="9525" marR="9525" marT="9525" marB="9525" anchor="ctr"/>
+                </a:tc>
+                <a:tc>
+                  <a:txBody>
+                    <a:bodyPr/>
+                    <a:lstStyle/>
+                    <a:p>
+                      <a:pPr marL="107950" algn="l" latinLnBrk="1">
+                        <a:lnSpc>
+                          <a:spcPct val="115000"/>
+                        </a:lnSpc>
+                        <a:buNone/>
+                      </a:pPr>
+                      <a:r>
+                        <a:rPr lang="en-IN" sz="1200" kern="100">
+                          <a:effectLst/>
+                        </a:rPr>
+                        <a:t>Intel Core i3 / AMD Ryzen 3</a:t>
+                      </a:r>
+                      <a:endParaRPr lang="en-IN" sz="1000" kern="100">
+                        <a:effectLst/>
+                        <a:latin typeface="Batang" panose="02030600000101010101" pitchFamily="18" charset="-127"/>
+                        <a:ea typeface="Batang" panose="02030600000101010101" pitchFamily="18" charset="-127"/>
+                        <a:cs typeface="Times New Roman" panose="02020603050405020304" pitchFamily="18" charset="0"/>
+                      </a:endParaRPr>
+                    </a:p>
+                  </a:txBody>
+                  <a:tcPr marL="9525" marR="9525" marT="9525" marB="9525" anchor="ctr"/>
+                </a:tc>
+                <a:tc>
+                  <a:txBody>
+                    <a:bodyPr/>
+                    <a:lstStyle/>
+                    <a:p>
+                      <a:pPr marL="107950" algn="l" latinLnBrk="1">
+                        <a:lnSpc>
+                          <a:spcPct val="115000"/>
+                        </a:lnSpc>
+                        <a:buNone/>
+                      </a:pPr>
+                      <a:r>
+                        <a:rPr lang="en-IN" sz="1200" kern="100">
+                          <a:effectLst/>
+                        </a:rPr>
+                        <a:t>:</a:t>
+                      </a:r>
+                      <a:endParaRPr lang="en-IN" sz="1000" kern="100">
+                        <a:effectLst/>
+                        <a:latin typeface="Batang" panose="02030600000101010101" pitchFamily="18" charset="-127"/>
+                        <a:ea typeface="Batang" panose="02030600000101010101" pitchFamily="18" charset="-127"/>
+                        <a:cs typeface="Times New Roman" panose="02020603050405020304" pitchFamily="18" charset="0"/>
+                      </a:endParaRPr>
+                    </a:p>
+                  </a:txBody>
+                  <a:tcPr marL="9525" marR="9525" marT="9525" marB="9525" anchor="ctr"/>
+                </a:tc>
+                <a:tc>
+                  <a:txBody>
+                    <a:bodyPr/>
+                    <a:lstStyle/>
+                    <a:p>
+                      <a:pPr marL="107950" algn="l" latinLnBrk="1">
+                        <a:lnSpc>
+                          <a:spcPct val="115000"/>
+                        </a:lnSpc>
+                        <a:buNone/>
+                      </a:pPr>
+                      <a:r>
+                        <a:rPr lang="en-IN" sz="1200" kern="100">
+                          <a:effectLst/>
+                        </a:rPr>
+                        <a:t>Intel Core i5 / AMD Ryzen 5</a:t>
+                      </a:r>
+                      <a:endParaRPr lang="en-IN" sz="1000" kern="100">
+                        <a:effectLst/>
+                        <a:latin typeface="Batang" panose="02030600000101010101" pitchFamily="18" charset="-127"/>
+                        <a:ea typeface="Batang" panose="02030600000101010101" pitchFamily="18" charset="-127"/>
+                        <a:cs typeface="Times New Roman" panose="02020603050405020304" pitchFamily="18" charset="0"/>
+                      </a:endParaRPr>
+                    </a:p>
+                  </a:txBody>
+                  <a:tcPr marL="9525" marR="9525" marT="9525" marB="9525" anchor="ctr"/>
+                </a:tc>
+                <a:extLst>
+                  <a:ext uri="{0D108BD9-81ED-4DB2-BD59-A6C34878D82A}">
+                    <a16:rowId xmlns:a16="http://schemas.microsoft.com/office/drawing/2014/main" val="4058043177"/>
+                  </a:ext>
+                </a:extLst>
+              </a:tr>
+              <a:tr h="607203">
+                <a:tc>
+                  <a:txBody>
+                    <a:bodyPr/>
+                    <a:lstStyle/>
+                    <a:p>
+                      <a:pPr marL="107950" algn="l" latinLnBrk="1">
+                        <a:lnSpc>
+                          <a:spcPct val="115000"/>
+                        </a:lnSpc>
+                        <a:buNone/>
+                      </a:pPr>
+                      <a:r>
+                        <a:rPr lang="en-IN" sz="1400" kern="100">
+                          <a:effectLst/>
+                        </a:rPr>
+                        <a:t>RAM</a:t>
+                      </a:r>
+                      <a:endParaRPr lang="en-IN" sz="1000" kern="100">
+                        <a:effectLst/>
+                        <a:latin typeface="Batang" panose="02030600000101010101" pitchFamily="18" charset="-127"/>
+                        <a:ea typeface="Batang" panose="02030600000101010101" pitchFamily="18" charset="-127"/>
+                        <a:cs typeface="Times New Roman" panose="02020603050405020304" pitchFamily="18" charset="0"/>
+                      </a:endParaRPr>
+                    </a:p>
+                  </a:txBody>
+                  <a:tcPr marL="9525" marR="9525" marT="9525" marB="9525" anchor="ctr"/>
+                </a:tc>
+                <a:tc>
+                  <a:txBody>
+                    <a:bodyPr/>
+                    <a:lstStyle/>
+                    <a:p>
+                      <a:pPr marL="107950" algn="l" latinLnBrk="1">
+                        <a:lnSpc>
+                          <a:spcPct val="115000"/>
+                        </a:lnSpc>
+                        <a:buNone/>
+                      </a:pPr>
+                      <a:r>
+                        <a:rPr lang="en-IN" sz="1400" kern="100">
+                          <a:effectLst/>
+                        </a:rPr>
+                        <a:t>:</a:t>
+                      </a:r>
+                      <a:endParaRPr lang="en-IN" sz="1000" kern="100">
+                        <a:effectLst/>
+                        <a:latin typeface="Batang" panose="02030600000101010101" pitchFamily="18" charset="-127"/>
+                        <a:ea typeface="Batang" panose="02030600000101010101" pitchFamily="18" charset="-127"/>
+                        <a:cs typeface="Times New Roman" panose="02020603050405020304" pitchFamily="18" charset="0"/>
+                      </a:endParaRPr>
+                    </a:p>
+                  </a:txBody>
+                  <a:tcPr marL="9525" marR="9525" marT="9525" marB="9525" anchor="ctr"/>
+                </a:tc>
+                <a:tc>
+                  <a:txBody>
+                    <a:bodyPr/>
+                    <a:lstStyle/>
+                    <a:p>
+                      <a:pPr marL="107950" algn="l" latinLnBrk="1">
+                        <a:lnSpc>
+                          <a:spcPct val="115000"/>
+                        </a:lnSpc>
+                        <a:buNone/>
+                      </a:pPr>
+                      <a:r>
+                        <a:rPr lang="en-IN" sz="1200" kern="100">
+                          <a:effectLst/>
+                        </a:rPr>
+                        <a:t>4 GB</a:t>
+                      </a:r>
+                      <a:endParaRPr lang="en-IN" sz="1000" kern="100">
+                        <a:effectLst/>
+                        <a:latin typeface="Batang" panose="02030600000101010101" pitchFamily="18" charset="-127"/>
+                        <a:ea typeface="Batang" panose="02030600000101010101" pitchFamily="18" charset="-127"/>
+                        <a:cs typeface="Times New Roman" panose="02020603050405020304" pitchFamily="18" charset="0"/>
+                      </a:endParaRPr>
+                    </a:p>
+                  </a:txBody>
+                  <a:tcPr marL="9525" marR="9525" marT="9525" marB="9525" anchor="ctr"/>
+                </a:tc>
+                <a:tc>
+                  <a:txBody>
+                    <a:bodyPr/>
+                    <a:lstStyle/>
+                    <a:p>
+                      <a:pPr marL="107950" algn="l" latinLnBrk="1">
+                        <a:lnSpc>
+                          <a:spcPct val="115000"/>
+                        </a:lnSpc>
+                        <a:buNone/>
+                      </a:pPr>
+                      <a:r>
+                        <a:rPr lang="en-IN" sz="1200" kern="100">
+                          <a:effectLst/>
+                        </a:rPr>
+                        <a:t>:</a:t>
+                      </a:r>
+                      <a:endParaRPr lang="en-IN" sz="1000" kern="100">
+                        <a:effectLst/>
+                        <a:latin typeface="Batang" panose="02030600000101010101" pitchFamily="18" charset="-127"/>
+                        <a:ea typeface="Batang" panose="02030600000101010101" pitchFamily="18" charset="-127"/>
+                        <a:cs typeface="Times New Roman" panose="02020603050405020304" pitchFamily="18" charset="0"/>
+                      </a:endParaRPr>
+                    </a:p>
+                  </a:txBody>
+                  <a:tcPr marL="9525" marR="9525" marT="9525" marB="9525" anchor="ctr"/>
+                </a:tc>
+                <a:tc>
+                  <a:txBody>
+                    <a:bodyPr/>
+                    <a:lstStyle/>
+                    <a:p>
+                      <a:pPr marL="107950" algn="l" latinLnBrk="1">
+                        <a:lnSpc>
+                          <a:spcPct val="115000"/>
+                        </a:lnSpc>
+                        <a:buNone/>
+                      </a:pPr>
+                      <a:r>
+                        <a:rPr lang="en-IN" sz="1200" kern="100">
+                          <a:effectLst/>
+                        </a:rPr>
+                        <a:t>8 GB or above</a:t>
+                      </a:r>
+                      <a:endParaRPr lang="en-IN" sz="1000" kern="100">
+                        <a:effectLst/>
+                        <a:latin typeface="Batang" panose="02030600000101010101" pitchFamily="18" charset="-127"/>
+                        <a:ea typeface="Batang" panose="02030600000101010101" pitchFamily="18" charset="-127"/>
+                        <a:cs typeface="Times New Roman" panose="02020603050405020304" pitchFamily="18" charset="0"/>
+                      </a:endParaRPr>
+                    </a:p>
+                  </a:txBody>
+                  <a:tcPr marL="9525" marR="9525" marT="9525" marB="9525" anchor="ctr"/>
+                </a:tc>
+                <a:extLst>
+                  <a:ext uri="{0D108BD9-81ED-4DB2-BD59-A6C34878D82A}">
+                    <a16:rowId xmlns:a16="http://schemas.microsoft.com/office/drawing/2014/main" val="1950216333"/>
+                  </a:ext>
+                </a:extLst>
+              </a:tr>
+              <a:tr h="607203">
+                <a:tc>
+                  <a:txBody>
+                    <a:bodyPr/>
+                    <a:lstStyle/>
+                    <a:p>
+                      <a:pPr marL="107950" algn="l" latinLnBrk="1">
+                        <a:lnSpc>
+                          <a:spcPct val="115000"/>
+                        </a:lnSpc>
+                        <a:buNone/>
+                      </a:pPr>
+                      <a:r>
+                        <a:rPr lang="en-IN" sz="1400" kern="100">
+                          <a:effectLst/>
+                        </a:rPr>
+                        <a:t>Storage</a:t>
+                      </a:r>
+                      <a:endParaRPr lang="en-IN" sz="1000" kern="100">
+                        <a:effectLst/>
+                        <a:latin typeface="Batang" panose="02030600000101010101" pitchFamily="18" charset="-127"/>
+                        <a:ea typeface="Batang" panose="02030600000101010101" pitchFamily="18" charset="-127"/>
+                        <a:cs typeface="Times New Roman" panose="02020603050405020304" pitchFamily="18" charset="0"/>
+                      </a:endParaRPr>
+                    </a:p>
+                  </a:txBody>
+                  <a:tcPr marL="9525" marR="9525" marT="9525" marB="9525" anchor="ctr"/>
+                </a:tc>
+                <a:tc>
+                  <a:txBody>
+                    <a:bodyPr/>
+                    <a:lstStyle/>
+                    <a:p>
+                      <a:pPr marL="107950" algn="l" latinLnBrk="1">
+                        <a:lnSpc>
+                          <a:spcPct val="115000"/>
+                        </a:lnSpc>
+                        <a:buNone/>
+                      </a:pPr>
+                      <a:r>
+                        <a:rPr lang="en-IN" sz="1400" kern="100">
+                          <a:effectLst/>
+                        </a:rPr>
+                        <a:t>:</a:t>
+                      </a:r>
+                      <a:endParaRPr lang="en-IN" sz="1000" kern="100">
+                        <a:effectLst/>
+                        <a:latin typeface="Batang" panose="02030600000101010101" pitchFamily="18" charset="-127"/>
+                        <a:ea typeface="Batang" panose="02030600000101010101" pitchFamily="18" charset="-127"/>
+                        <a:cs typeface="Times New Roman" panose="02020603050405020304" pitchFamily="18" charset="0"/>
+                      </a:endParaRPr>
+                    </a:p>
+                  </a:txBody>
+                  <a:tcPr marL="9525" marR="9525" marT="9525" marB="9525" anchor="ctr"/>
+                </a:tc>
+                <a:tc>
+                  <a:txBody>
+                    <a:bodyPr/>
+                    <a:lstStyle/>
+                    <a:p>
+                      <a:pPr marL="107950" algn="l" latinLnBrk="1">
+                        <a:lnSpc>
+                          <a:spcPct val="115000"/>
+                        </a:lnSpc>
+                        <a:buNone/>
+                      </a:pPr>
+                      <a:r>
+                        <a:rPr lang="en-IN" sz="1200" kern="100">
+                          <a:effectLst/>
+                        </a:rPr>
+                        <a:t>256 GB HDD</a:t>
+                      </a:r>
+                      <a:endParaRPr lang="en-IN" sz="1000" kern="100">
+                        <a:effectLst/>
+                        <a:latin typeface="Batang" panose="02030600000101010101" pitchFamily="18" charset="-127"/>
+                        <a:ea typeface="Batang" panose="02030600000101010101" pitchFamily="18" charset="-127"/>
+                        <a:cs typeface="Times New Roman" panose="02020603050405020304" pitchFamily="18" charset="0"/>
+                      </a:endParaRPr>
+                    </a:p>
+                  </a:txBody>
+                  <a:tcPr marL="9525" marR="9525" marT="9525" marB="9525" anchor="ctr"/>
+                </a:tc>
+                <a:tc>
+                  <a:txBody>
+                    <a:bodyPr/>
+                    <a:lstStyle/>
+                    <a:p>
+                      <a:pPr marL="107950" algn="l" latinLnBrk="1">
+                        <a:lnSpc>
+                          <a:spcPct val="115000"/>
+                        </a:lnSpc>
+                        <a:buNone/>
+                      </a:pPr>
+                      <a:r>
+                        <a:rPr lang="en-IN" sz="1200" kern="100">
+                          <a:effectLst/>
+                        </a:rPr>
+                        <a:t>:</a:t>
+                      </a:r>
+                      <a:endParaRPr lang="en-IN" sz="1000" kern="100">
+                        <a:effectLst/>
+                        <a:latin typeface="Batang" panose="02030600000101010101" pitchFamily="18" charset="-127"/>
+                        <a:ea typeface="Batang" panose="02030600000101010101" pitchFamily="18" charset="-127"/>
+                        <a:cs typeface="Times New Roman" panose="02020603050405020304" pitchFamily="18" charset="0"/>
+                      </a:endParaRPr>
+                    </a:p>
+                  </a:txBody>
+                  <a:tcPr marL="9525" marR="9525" marT="9525" marB="9525" anchor="ctr"/>
+                </a:tc>
+                <a:tc>
+                  <a:txBody>
+                    <a:bodyPr/>
+                    <a:lstStyle/>
+                    <a:p>
+                      <a:pPr marL="107950" algn="l" latinLnBrk="1">
+                        <a:lnSpc>
+                          <a:spcPct val="115000"/>
+                        </a:lnSpc>
+                        <a:buNone/>
+                      </a:pPr>
+                      <a:r>
+                        <a:rPr lang="en-IN" sz="1200" kern="100">
+                          <a:effectLst/>
+                        </a:rPr>
+                        <a:t>512 GB SSD</a:t>
+                      </a:r>
+                      <a:endParaRPr lang="en-IN" sz="1000" kern="100">
+                        <a:effectLst/>
+                        <a:latin typeface="Batang" panose="02030600000101010101" pitchFamily="18" charset="-127"/>
+                        <a:ea typeface="Batang" panose="02030600000101010101" pitchFamily="18" charset="-127"/>
+                        <a:cs typeface="Times New Roman" panose="02020603050405020304" pitchFamily="18" charset="0"/>
+                      </a:endParaRPr>
+                    </a:p>
+                  </a:txBody>
+                  <a:tcPr marL="9525" marR="9525" marT="9525" marB="9525" anchor="ctr"/>
+                </a:tc>
+                <a:extLst>
+                  <a:ext uri="{0D108BD9-81ED-4DB2-BD59-A6C34878D82A}">
+                    <a16:rowId xmlns:a16="http://schemas.microsoft.com/office/drawing/2014/main" val="3306937550"/>
+                  </a:ext>
+                </a:extLst>
+              </a:tr>
+              <a:tr h="1045206">
+                <a:tc>
+                  <a:txBody>
+                    <a:bodyPr/>
+                    <a:lstStyle/>
+                    <a:p>
+                      <a:pPr marL="107950" algn="l" latinLnBrk="1">
+                        <a:lnSpc>
+                          <a:spcPct val="115000"/>
+                        </a:lnSpc>
+                        <a:buNone/>
+                      </a:pPr>
+                      <a:r>
+                        <a:rPr lang="en-IN" sz="1400" kern="100">
+                          <a:effectLst/>
+                        </a:rPr>
+                        <a:t>Network</a:t>
+                      </a:r>
+                      <a:endParaRPr lang="en-IN" sz="1000" kern="100">
+                        <a:effectLst/>
+                        <a:latin typeface="Batang" panose="02030600000101010101" pitchFamily="18" charset="-127"/>
+                        <a:ea typeface="Batang" panose="02030600000101010101" pitchFamily="18" charset="-127"/>
+                        <a:cs typeface="Times New Roman" panose="02020603050405020304" pitchFamily="18" charset="0"/>
+                      </a:endParaRPr>
+                    </a:p>
+                  </a:txBody>
+                  <a:tcPr marL="9525" marR="9525" marT="9525" marB="9525" anchor="ctr"/>
+                </a:tc>
+                <a:tc>
+                  <a:txBody>
+                    <a:bodyPr/>
+                    <a:lstStyle/>
+                    <a:p>
+                      <a:pPr marL="107950" algn="l" latinLnBrk="1">
+                        <a:lnSpc>
+                          <a:spcPct val="115000"/>
+                        </a:lnSpc>
+                        <a:buNone/>
+                      </a:pPr>
+                      <a:r>
+                        <a:rPr lang="en-IN" sz="1400" kern="100">
+                          <a:effectLst/>
+                        </a:rPr>
+                        <a:t>:</a:t>
+                      </a:r>
+                      <a:endParaRPr lang="en-IN" sz="1000" kern="100">
+                        <a:effectLst/>
+                        <a:latin typeface="Batang" panose="02030600000101010101" pitchFamily="18" charset="-127"/>
+                        <a:ea typeface="Batang" panose="02030600000101010101" pitchFamily="18" charset="-127"/>
+                        <a:cs typeface="Times New Roman" panose="02020603050405020304" pitchFamily="18" charset="0"/>
+                      </a:endParaRPr>
+                    </a:p>
+                  </a:txBody>
+                  <a:tcPr marL="9525" marR="9525" marT="9525" marB="9525" anchor="ctr"/>
+                </a:tc>
+                <a:tc>
+                  <a:txBody>
+                    <a:bodyPr/>
+                    <a:lstStyle/>
+                    <a:p>
+                      <a:pPr marL="107950" algn="l" latinLnBrk="1">
+                        <a:lnSpc>
+                          <a:spcPct val="115000"/>
+                        </a:lnSpc>
+                        <a:buNone/>
+                      </a:pPr>
+                      <a:r>
+                        <a:rPr lang="en-IN" sz="1200" kern="100">
+                          <a:effectLst/>
+                        </a:rPr>
+                        <a:t>Broadband 1 Mbps</a:t>
+                      </a:r>
+                      <a:endParaRPr lang="en-IN" sz="1000" kern="100">
+                        <a:effectLst/>
+                        <a:latin typeface="Batang" panose="02030600000101010101" pitchFamily="18" charset="-127"/>
+                        <a:ea typeface="Batang" panose="02030600000101010101" pitchFamily="18" charset="-127"/>
+                        <a:cs typeface="Times New Roman" panose="02020603050405020304" pitchFamily="18" charset="0"/>
+                      </a:endParaRPr>
+                    </a:p>
+                  </a:txBody>
+                  <a:tcPr marL="9525" marR="9525" marT="9525" marB="9525" anchor="ctr"/>
+                </a:tc>
+                <a:tc>
+                  <a:txBody>
+                    <a:bodyPr/>
+                    <a:lstStyle/>
+                    <a:p>
+                      <a:pPr marL="107950" algn="l" latinLnBrk="1">
+                        <a:lnSpc>
+                          <a:spcPct val="115000"/>
+                        </a:lnSpc>
+                        <a:buNone/>
+                      </a:pPr>
+                      <a:r>
+                        <a:rPr lang="en-IN" sz="1200" kern="100">
+                          <a:effectLst/>
+                        </a:rPr>
+                        <a:t>:</a:t>
+                      </a:r>
+                      <a:endParaRPr lang="en-IN" sz="1000" kern="100">
+                        <a:effectLst/>
+                        <a:latin typeface="Batang" panose="02030600000101010101" pitchFamily="18" charset="-127"/>
+                        <a:ea typeface="Batang" panose="02030600000101010101" pitchFamily="18" charset="-127"/>
+                        <a:cs typeface="Times New Roman" panose="02020603050405020304" pitchFamily="18" charset="0"/>
+                      </a:endParaRPr>
+                    </a:p>
+                  </a:txBody>
+                  <a:tcPr marL="9525" marR="9525" marT="9525" marB="9525" anchor="ctr"/>
+                </a:tc>
+                <a:tc>
+                  <a:txBody>
+                    <a:bodyPr/>
+                    <a:lstStyle/>
+                    <a:p>
+                      <a:pPr marL="107950" algn="l" latinLnBrk="1">
+                        <a:lnSpc>
+                          <a:spcPct val="115000"/>
+                        </a:lnSpc>
+                        <a:buNone/>
+                      </a:pPr>
+                      <a:r>
+                        <a:rPr lang="en-IN" sz="1200" kern="100">
+                          <a:effectLst/>
+                        </a:rPr>
+                        <a:t>Broadband 10 Mbps or higher</a:t>
+                      </a:r>
+                      <a:endParaRPr lang="en-IN" sz="1000" kern="100">
+                        <a:effectLst/>
+                        <a:latin typeface="Batang" panose="02030600000101010101" pitchFamily="18" charset="-127"/>
+                        <a:ea typeface="Batang" panose="02030600000101010101" pitchFamily="18" charset="-127"/>
+                        <a:cs typeface="Times New Roman" panose="02020603050405020304" pitchFamily="18" charset="0"/>
+                      </a:endParaRPr>
+                    </a:p>
+                  </a:txBody>
+                  <a:tcPr marL="9525" marR="9525" marT="9525" marB="9525" anchor="ctr"/>
+                </a:tc>
+                <a:extLst>
+                  <a:ext uri="{0D108BD9-81ED-4DB2-BD59-A6C34878D82A}">
+                    <a16:rowId xmlns:a16="http://schemas.microsoft.com/office/drawing/2014/main" val="2852864263"/>
+                  </a:ext>
+                </a:extLst>
+              </a:tr>
+              <a:tr h="1045206">
+                <a:tc>
+                  <a:txBody>
+                    <a:bodyPr/>
+                    <a:lstStyle/>
+                    <a:p>
+                      <a:pPr marL="107950" algn="l" latinLnBrk="1">
+                        <a:lnSpc>
+                          <a:spcPct val="115000"/>
+                        </a:lnSpc>
+                        <a:buNone/>
+                      </a:pPr>
+                      <a:r>
+                        <a:rPr lang="en-IN" sz="1400" kern="100">
+                          <a:effectLst/>
+                        </a:rPr>
+                        <a:t>Display</a:t>
+                      </a:r>
+                      <a:endParaRPr lang="en-IN" sz="1000" kern="100">
+                        <a:effectLst/>
+                        <a:latin typeface="Batang" panose="02030600000101010101" pitchFamily="18" charset="-127"/>
+                        <a:ea typeface="Batang" panose="02030600000101010101" pitchFamily="18" charset="-127"/>
+                        <a:cs typeface="Times New Roman" panose="02020603050405020304" pitchFamily="18" charset="0"/>
+                      </a:endParaRPr>
+                    </a:p>
+                  </a:txBody>
+                  <a:tcPr marL="9525" marR="9525" marT="9525" marB="9525" anchor="ctr"/>
+                </a:tc>
+                <a:tc>
+                  <a:txBody>
+                    <a:bodyPr/>
+                    <a:lstStyle/>
+                    <a:p>
+                      <a:pPr marL="107950" algn="l" latinLnBrk="1">
+                        <a:lnSpc>
+                          <a:spcPct val="115000"/>
+                        </a:lnSpc>
+                        <a:buNone/>
+                      </a:pPr>
+                      <a:r>
+                        <a:rPr lang="en-IN" sz="1400" kern="100">
+                          <a:effectLst/>
+                        </a:rPr>
+                        <a:t>:</a:t>
+                      </a:r>
+                      <a:endParaRPr lang="en-IN" sz="1000" kern="100">
+                        <a:effectLst/>
+                        <a:latin typeface="Batang" panose="02030600000101010101" pitchFamily="18" charset="-127"/>
+                        <a:ea typeface="Batang" panose="02030600000101010101" pitchFamily="18" charset="-127"/>
+                        <a:cs typeface="Times New Roman" panose="02020603050405020304" pitchFamily="18" charset="0"/>
+                      </a:endParaRPr>
+                    </a:p>
+                  </a:txBody>
+                  <a:tcPr marL="9525" marR="9525" marT="9525" marB="9525" anchor="ctr"/>
+                </a:tc>
+                <a:tc>
+                  <a:txBody>
+                    <a:bodyPr/>
+                    <a:lstStyle/>
+                    <a:p>
+                      <a:pPr marL="107950" algn="l" latinLnBrk="1">
+                        <a:lnSpc>
+                          <a:spcPct val="115000"/>
+                        </a:lnSpc>
+                        <a:buNone/>
+                      </a:pPr>
+                      <a:r>
+                        <a:rPr lang="en-IN" sz="1200" kern="100">
+                          <a:effectLst/>
+                        </a:rPr>
+                        <a:t>1280 × 720</a:t>
+                      </a:r>
+                      <a:endParaRPr lang="en-IN" sz="1000" kern="100">
+                        <a:effectLst/>
+                        <a:latin typeface="Batang" panose="02030600000101010101" pitchFamily="18" charset="-127"/>
+                        <a:ea typeface="Batang" panose="02030600000101010101" pitchFamily="18" charset="-127"/>
+                        <a:cs typeface="Times New Roman" panose="02020603050405020304" pitchFamily="18" charset="0"/>
+                      </a:endParaRPr>
+                    </a:p>
+                  </a:txBody>
+                  <a:tcPr marL="9525" marR="9525" marT="9525" marB="9525" anchor="ctr"/>
+                </a:tc>
+                <a:tc>
+                  <a:txBody>
+                    <a:bodyPr/>
+                    <a:lstStyle/>
+                    <a:p>
+                      <a:pPr marL="107950" algn="l" latinLnBrk="1">
+                        <a:lnSpc>
+                          <a:spcPct val="115000"/>
+                        </a:lnSpc>
+                        <a:buNone/>
+                      </a:pPr>
+                      <a:r>
+                        <a:rPr lang="en-IN" sz="1200" kern="100">
+                          <a:effectLst/>
+                        </a:rPr>
+                        <a:t>:</a:t>
+                      </a:r>
+                      <a:endParaRPr lang="en-IN" sz="1000" kern="100">
+                        <a:effectLst/>
+                        <a:latin typeface="Batang" panose="02030600000101010101" pitchFamily="18" charset="-127"/>
+                        <a:ea typeface="Batang" panose="02030600000101010101" pitchFamily="18" charset="-127"/>
+                        <a:cs typeface="Times New Roman" panose="02020603050405020304" pitchFamily="18" charset="0"/>
+                      </a:endParaRPr>
+                    </a:p>
+                  </a:txBody>
+                  <a:tcPr marL="9525" marR="9525" marT="9525" marB="9525" anchor="ctr"/>
+                </a:tc>
+                <a:tc>
+                  <a:txBody>
+                    <a:bodyPr/>
+                    <a:lstStyle/>
+                    <a:p>
+                      <a:pPr marL="107950" algn="l" latinLnBrk="1">
+                        <a:lnSpc>
+                          <a:spcPct val="115000"/>
+                        </a:lnSpc>
+                        <a:buNone/>
+                      </a:pPr>
+                      <a:r>
+                        <a:rPr lang="en-IN" sz="1200" kern="100" dirty="0">
+                          <a:effectLst/>
+                        </a:rPr>
+                        <a:t>1920 × 1080 or higher</a:t>
+                      </a:r>
+                      <a:endParaRPr lang="en-IN" sz="1000" kern="100" dirty="0">
+                        <a:effectLst/>
+                        <a:latin typeface="Batang" panose="02030600000101010101" pitchFamily="18" charset="-127"/>
+                        <a:ea typeface="Batang" panose="02030600000101010101" pitchFamily="18" charset="-127"/>
+                        <a:cs typeface="Times New Roman" panose="02020603050405020304" pitchFamily="18" charset="0"/>
+                      </a:endParaRPr>
+                    </a:p>
+                  </a:txBody>
+                  <a:tcPr marL="9525" marR="9525" marT="9525" marB="9525" anchor="ctr"/>
+                </a:tc>
+                <a:extLst>
+                  <a:ext uri="{0D108BD9-81ED-4DB2-BD59-A6C34878D82A}">
+                    <a16:rowId xmlns:a16="http://schemas.microsoft.com/office/drawing/2014/main" val="744659257"/>
+                  </a:ext>
+                </a:extLst>
+              </a:tr>
+            </a:tbl>
+          </a:graphicData>
+        </a:graphic>
+      </p:graphicFrame>
+    </p:spTree>
+    <p:extLst>
+      <p:ext uri="{BB962C8B-B14F-4D97-AF65-F5344CB8AC3E}">
+        <p14:creationId xmlns:p14="http://schemas.microsoft.com/office/powerpoint/2010/main" val="2895803639"/>
+      </p:ext>
+    </p:extLst>
+  </p:cSld>
+  <p:clrMapOvr>
+    <a:masterClrMapping/>
+  </p:clrMapOvr>
+</p:sld>
+</file>
+
+<file path=ppt/slides/slide13.xml><?xml version="1.0" encoding="utf-8"?>
+<p:sld xmlns:a="http://schemas.openxmlformats.org/drawingml/2006/main" xmlns:r="http://schemas.openxmlformats.org/officeDocument/2006/relationships" xmlns:p="http://schemas.openxmlformats.org/presentationml/2006/main">
+  <p:cSld>
+    <p:spTree>
+      <p:nvGrpSpPr>
+        <p:cNvPr id="1" name=""/>
+        <p:cNvGrpSpPr/>
+        <p:nvPr/>
+      </p:nvGrpSpPr>
+      <p:grpSpPr>
+        <a:xfrm>
+          <a:off x="0" y="0"/>
+          <a:ext cx="0" cy="0"/>
+          <a:chOff x="0" y="0"/>
+          <a:chExt cx="0" cy="0"/>
+        </a:xfrm>
+      </p:grpSpPr>
+      <p:sp>
+        <p:nvSpPr>
+          <p:cNvPr id="2" name="Title 1">
+            <a:extLst>
+              <a:ext uri="{FF2B5EF4-FFF2-40B4-BE49-F238E27FC236}">
                 <a16:creationId xmlns:a16="http://schemas.microsoft.com/office/drawing/2014/main" id="{1DBBFFD4-CCAA-C3F1-66CF-EE79B189A5EC}"/>
               </a:ext>
             </a:extLst>
@@ -7902,23 +7817,19 @@
           <a:lstStyle/>
           <a:p>
             <a:r>
-              <a:rPr lang="en-US" sz="3600" b="1" dirty="0">
-                <a:latin typeface="Abadi" panose="020B0604020104020204" pitchFamily="34" charset="0"/>
-              </a:rPr>
+              <a:rPr lang="en-US" b="1"/>
               <a:t>GANTT CHART</a:t>
             </a:r>
-            <a:endParaRPr lang="en-IN" sz="3600" b="1" dirty="0">
-              <a:latin typeface="Abadi" panose="020B0604020104020204" pitchFamily="34" charset="0"/>
-            </a:endParaRPr>
+            <a:endParaRPr lang="en-IN" b="1"/>
           </a:p>
         </p:txBody>
       </p:sp>
       <p:pic>
         <p:nvPicPr>
-          <p:cNvPr id="5" name="Content Placeholder 4">
+          <p:cNvPr id="9" name="Content Placeholder 8">
             <a:extLst>
               <a:ext uri="{FF2B5EF4-FFF2-40B4-BE49-F238E27FC236}">
-                <a16:creationId xmlns:a16="http://schemas.microsoft.com/office/drawing/2014/main" id="{337A818E-0FC2-22F9-1E04-14D0BD0D3382}"/>
+                <a16:creationId xmlns:a16="http://schemas.microsoft.com/office/drawing/2014/main" id="{CCBE4962-5792-CCC1-8221-E978B3FD9F57}"/>
               </a:ext>
             </a:extLst>
           </p:cNvPr>
@@ -7930,15 +7841,22 @@
           </p:nvPr>
         </p:nvPicPr>
         <p:blipFill>
-          <a:blip r:embed="rId2"/>
+          <a:blip r:embed="rId2">
+            <a:extLst>
+              <a:ext uri="{28A0092B-C50C-407E-A947-70E740481C1C}">
+                <a14:useLocalDpi xmlns:a14="http://schemas.microsoft.com/office/drawing/2010/main" val="0"/>
+              </a:ext>
+            </a:extLst>
+          </a:blip>
+          <a:srcRect t="22985" r="1" b="1438"/>
           <a:stretch>
             <a:fillRect/>
           </a:stretch>
         </p:blipFill>
         <p:spPr>
           <a:xfrm>
-            <a:off x="795867" y="1608667"/>
-            <a:ext cx="12828693" cy="5803689"/>
+            <a:off x="1005840" y="2190750"/>
+            <a:ext cx="12618720" cy="5221606"/>
           </a:xfrm>
           <a:prstGeom prst="rect">
             <a:avLst/>
@@ -7959,7 +7877,7 @@
 </p:sld>
 </file>
 
-<file path=ppt/slides/slide13.xml><?xml version="1.0" encoding="utf-8"?>
+<file path=ppt/slides/slide14.xml><?xml version="1.0" encoding="utf-8"?>
 <p:sld xmlns:a="http://schemas.openxmlformats.org/drawingml/2006/main" xmlns:r="http://schemas.openxmlformats.org/officeDocument/2006/relationships" xmlns:p="http://schemas.openxmlformats.org/presentationml/2006/main">
   <p:cSld>
     <p:spTree>
@@ -8400,8 +8318,15 @@
             </a:r>
           </a:p>
           <a:p>
-            <a:pPr marL="0" indent="0">
-              <a:buNone/>
+            <a:r>
+              <a:rPr lang="en-US" sz="2800" dirty="0"/>
+              <a:t>Requires minimal training for users</a:t>
+            </a:r>
+          </a:p>
+          <a:p>
+            <a:pPr>
+              <a:buFont typeface="Arial" panose="020B0604020202020204" pitchFamily="34" charset="0"/>
+              <a:buChar char="•"/>
             </a:pPr>
             <a:endParaRPr lang="en-IN" b="1" dirty="0"/>
           </a:p>
@@ -8669,7 +8594,7 @@
           <a:p>
             <a:r>
               <a:rPr lang="en-IN" sz="3300" dirty="0"/>
-              <a:t> </a:t>
+              <a:t>Automatic </a:t>
             </a:r>
             <a:r>
               <a:rPr lang="en-IN" sz="3300" b="1" dirty="0"/>
@@ -8984,40 +8909,667 @@
           </a:p>
         </p:txBody>
       </p:sp>
-      <p:pic>
-        <p:nvPicPr>
-          <p:cNvPr id="6" name="Content Placeholder 5">
+      <p:graphicFrame>
+        <p:nvGraphicFramePr>
+          <p:cNvPr id="5" name="Content Placeholder 4">
             <a:extLst>
               <a:ext uri="{FF2B5EF4-FFF2-40B4-BE49-F238E27FC236}">
-                <a16:creationId xmlns:a16="http://schemas.microsoft.com/office/drawing/2014/main" id="{654147F7-A72F-CA40-1686-0B40A04F3974}"/>
+                <a16:creationId xmlns:a16="http://schemas.microsoft.com/office/drawing/2014/main" id="{826765E8-8550-6A6B-891E-3E54D6052B7F}"/>
               </a:ext>
             </a:extLst>
           </p:cNvPr>
-          <p:cNvPicPr>
-            <a:picLocks noGrp="1" noChangeAspect="1"/>
-          </p:cNvPicPr>
+          <p:cNvGraphicFramePr>
+            <a:graphicFrameLocks noGrp="1"/>
+          </p:cNvGraphicFramePr>
           <p:nvPr>
             <p:ph idx="1"/>
-          </p:nvPr>
-        </p:nvPicPr>
-        <p:blipFill>
-          <a:blip r:embed="rId2"/>
-          <a:srcRect t="17036" r="1" b="7038"/>
-          <a:stretch>
-            <a:fillRect/>
-          </a:stretch>
-        </p:blipFill>
-        <p:spPr>
-          <a:xfrm>
-            <a:off x="1005840" y="2190750"/>
-            <a:ext cx="12618720" cy="5221606"/>
-          </a:xfrm>
-          <a:prstGeom prst="rect">
-            <a:avLst/>
-          </a:prstGeom>
-          <a:noFill/>
-        </p:spPr>
-      </p:pic>
+            <p:extLst>
+              <p:ext uri="{D42A27DB-BD31-4B8C-83A1-F6EECF244321}">
+                <p14:modId xmlns:p14="http://schemas.microsoft.com/office/powerpoint/2010/main" val="2346310593"/>
+              </p:ext>
+            </p:extLst>
+          </p:nvPr>
+        </p:nvGraphicFramePr>
+        <p:xfrm>
+          <a:off x="1005840" y="1785257"/>
+          <a:ext cx="12209418" cy="6006188"/>
+        </p:xfrm>
+        <a:graphic>
+          <a:graphicData uri="http://schemas.openxmlformats.org/drawingml/2006/table">
+            <a:tbl>
+              <a:tblPr firstRow="1" firstCol="1" bandRow="1">
+                <a:tableStyleId>{5C22544A-7EE6-4342-B048-85BDC9FD1C3A}</a:tableStyleId>
+              </a:tblPr>
+              <a:tblGrid>
+                <a:gridCol w="4367975">
+                  <a:extLst>
+                    <a:ext uri="{9D8B030D-6E8A-4147-A177-3AD203B41FA5}">
+                      <a16:colId xmlns:a16="http://schemas.microsoft.com/office/drawing/2014/main" val="284706558"/>
+                    </a:ext>
+                  </a:extLst>
+                </a:gridCol>
+                <a:gridCol w="7841443">
+                  <a:extLst>
+                    <a:ext uri="{9D8B030D-6E8A-4147-A177-3AD203B41FA5}">
+                      <a16:colId xmlns:a16="http://schemas.microsoft.com/office/drawing/2014/main" val="3480284550"/>
+                    </a:ext>
+                  </a:extLst>
+                </a:gridCol>
+              </a:tblGrid>
+              <a:tr h="502638">
+                <a:tc>
+                  <a:txBody>
+                    <a:bodyPr/>
+                    <a:lstStyle/>
+                    <a:p>
+                      <a:pPr algn="l" latinLnBrk="1">
+                        <a:lnSpc>
+                          <a:spcPct val="115000"/>
+                        </a:lnSpc>
+                        <a:buNone/>
+                      </a:pPr>
+                      <a:r>
+                        <a:rPr lang="en-US" sz="1100" kern="100">
+                          <a:effectLst/>
+                        </a:rPr>
+                        <a:t>Module</a:t>
+                      </a:r>
+                      <a:endParaRPr lang="en-IN" sz="1000" kern="100">
+                        <a:effectLst/>
+                        <a:latin typeface="Batang" panose="02030600000101010101" pitchFamily="18" charset="-127"/>
+                        <a:ea typeface="Batang" panose="02030600000101010101" pitchFamily="18" charset="-127"/>
+                        <a:cs typeface="Times New Roman" panose="02020603050405020304" pitchFamily="18" charset="0"/>
+                      </a:endParaRPr>
+                    </a:p>
+                  </a:txBody>
+                  <a:tcPr marL="95250" marR="95250" marT="63500" marB="63500"/>
+                </a:tc>
+                <a:tc>
+                  <a:txBody>
+                    <a:bodyPr/>
+                    <a:lstStyle/>
+                    <a:p>
+                      <a:pPr algn="l" latinLnBrk="1">
+                        <a:lnSpc>
+                          <a:spcPct val="115000"/>
+                        </a:lnSpc>
+                        <a:buNone/>
+                      </a:pPr>
+                      <a:r>
+                        <a:rPr lang="en-US" sz="1100" kern="100">
+                          <a:effectLst/>
+                        </a:rPr>
+                        <a:t>Key Functionalities</a:t>
+                      </a:r>
+                      <a:endParaRPr lang="en-IN" sz="1000" kern="100">
+                        <a:effectLst/>
+                        <a:latin typeface="Batang" panose="02030600000101010101" pitchFamily="18" charset="-127"/>
+                        <a:ea typeface="Batang" panose="02030600000101010101" pitchFamily="18" charset="-127"/>
+                        <a:cs typeface="Times New Roman" panose="02020603050405020304" pitchFamily="18" charset="0"/>
+                      </a:endParaRPr>
+                    </a:p>
+                  </a:txBody>
+                  <a:tcPr marL="95250" marR="95250" marT="63500" marB="63500"/>
+                </a:tc>
+                <a:extLst>
+                  <a:ext uri="{0D108BD9-81ED-4DB2-BD59-A6C34878D82A}">
+                    <a16:rowId xmlns:a16="http://schemas.microsoft.com/office/drawing/2014/main" val="2492791415"/>
+                  </a:ext>
+                </a:extLst>
+              </a:tr>
+              <a:tr h="777753">
+                <a:tc>
+                  <a:txBody>
+                    <a:bodyPr/>
+                    <a:lstStyle/>
+                    <a:p>
+                      <a:pPr algn="l" latinLnBrk="1">
+                        <a:lnSpc>
+                          <a:spcPct val="115000"/>
+                        </a:lnSpc>
+                        <a:buNone/>
+                      </a:pPr>
+                      <a:r>
+                        <a:rPr lang="en-US" sz="1100" kern="100">
+                          <a:effectLst/>
+                        </a:rPr>
+                        <a:t>Authentication Module</a:t>
+                      </a:r>
+                      <a:endParaRPr lang="en-IN" sz="1000" kern="100">
+                        <a:effectLst/>
+                        <a:latin typeface="Batang" panose="02030600000101010101" pitchFamily="18" charset="-127"/>
+                        <a:ea typeface="Batang" panose="02030600000101010101" pitchFamily="18" charset="-127"/>
+                        <a:cs typeface="Times New Roman" panose="02020603050405020304" pitchFamily="18" charset="0"/>
+                      </a:endParaRPr>
+                    </a:p>
+                  </a:txBody>
+                  <a:tcPr marL="95250" marR="95250" marT="50800" marB="50800"/>
+                </a:tc>
+                <a:tc>
+                  <a:txBody>
+                    <a:bodyPr/>
+                    <a:lstStyle/>
+                    <a:p>
+                      <a:pPr algn="l" latinLnBrk="1">
+                        <a:lnSpc>
+                          <a:spcPct val="115000"/>
+                        </a:lnSpc>
+                        <a:buNone/>
+                      </a:pPr>
+                      <a:r>
+                        <a:rPr lang="en-US" sz="1100" kern="100">
+                          <a:effectLst/>
+                        </a:rPr>
+                        <a:t>Register, login, logout, session management, forgot password (SMS OTP), admin detection, 24-hour session expiry</a:t>
+                      </a:r>
+                      <a:endParaRPr lang="en-IN" sz="1000" kern="100">
+                        <a:effectLst/>
+                        <a:latin typeface="Batang" panose="02030600000101010101" pitchFamily="18" charset="-127"/>
+                        <a:ea typeface="Batang" panose="02030600000101010101" pitchFamily="18" charset="-127"/>
+                        <a:cs typeface="Times New Roman" panose="02020603050405020304" pitchFamily="18" charset="0"/>
+                      </a:endParaRPr>
+                    </a:p>
+                  </a:txBody>
+                  <a:tcPr marL="95250" marR="95250" marT="50800" marB="50800"/>
+                </a:tc>
+                <a:extLst>
+                  <a:ext uri="{0D108BD9-81ED-4DB2-BD59-A6C34878D82A}">
+                    <a16:rowId xmlns:a16="http://schemas.microsoft.com/office/drawing/2014/main" val="4165846730"/>
+                  </a:ext>
+                </a:extLst>
+              </a:tr>
+              <a:tr h="460890">
+                <a:tc>
+                  <a:txBody>
+                    <a:bodyPr/>
+                    <a:lstStyle/>
+                    <a:p>
+                      <a:pPr algn="l" latinLnBrk="1">
+                        <a:lnSpc>
+                          <a:spcPct val="115000"/>
+                        </a:lnSpc>
+                        <a:buNone/>
+                      </a:pPr>
+                      <a:r>
+                        <a:rPr lang="en-US" sz="1100" kern="100">
+                          <a:effectLst/>
+                        </a:rPr>
+                        <a:t>Dashboard Module</a:t>
+                      </a:r>
+                      <a:endParaRPr lang="en-IN" sz="1000" kern="100">
+                        <a:effectLst/>
+                        <a:latin typeface="Batang" panose="02030600000101010101" pitchFamily="18" charset="-127"/>
+                        <a:ea typeface="Batang" panose="02030600000101010101" pitchFamily="18" charset="-127"/>
+                        <a:cs typeface="Times New Roman" panose="02020603050405020304" pitchFamily="18" charset="0"/>
+                      </a:endParaRPr>
+                    </a:p>
+                  </a:txBody>
+                  <a:tcPr marL="95250" marR="95250" marT="50800" marB="50800"/>
+                </a:tc>
+                <a:tc>
+                  <a:txBody>
+                    <a:bodyPr/>
+                    <a:lstStyle/>
+                    <a:p>
+                      <a:pPr algn="l" latinLnBrk="1">
+                        <a:lnSpc>
+                          <a:spcPct val="115000"/>
+                        </a:lnSpc>
+                        <a:buNone/>
+                      </a:pPr>
+                      <a:r>
+                        <a:rPr lang="en-US" sz="1100" kern="100">
+                          <a:effectLst/>
+                        </a:rPr>
+                        <a:t>Language selection (Python Basics / JavaScript Basics), user greeting, navigation to editor</a:t>
+                      </a:r>
+                      <a:endParaRPr lang="en-IN" sz="1000" kern="100">
+                        <a:effectLst/>
+                        <a:latin typeface="Batang" panose="02030600000101010101" pitchFamily="18" charset="-127"/>
+                        <a:ea typeface="Batang" panose="02030600000101010101" pitchFamily="18" charset="-127"/>
+                        <a:cs typeface="Times New Roman" panose="02020603050405020304" pitchFamily="18" charset="0"/>
+                      </a:endParaRPr>
+                    </a:p>
+                  </a:txBody>
+                  <a:tcPr marL="95250" marR="95250" marT="50800" marB="50800"/>
+                </a:tc>
+                <a:extLst>
+                  <a:ext uri="{0D108BD9-81ED-4DB2-BD59-A6C34878D82A}">
+                    <a16:rowId xmlns:a16="http://schemas.microsoft.com/office/drawing/2014/main" val="3663595877"/>
+                  </a:ext>
+                </a:extLst>
+              </a:tr>
+              <a:tr h="460890">
+                <a:tc>
+                  <a:txBody>
+                    <a:bodyPr/>
+                    <a:lstStyle/>
+                    <a:p>
+                      <a:pPr algn="l" latinLnBrk="1">
+                        <a:lnSpc>
+                          <a:spcPct val="115000"/>
+                        </a:lnSpc>
+                        <a:buNone/>
+                      </a:pPr>
+                      <a:r>
+                        <a:rPr lang="en-US" sz="1100" kern="100">
+                          <a:effectLst/>
+                        </a:rPr>
+                        <a:t>Code Editor Module</a:t>
+                      </a:r>
+                      <a:endParaRPr lang="en-IN" sz="1000" kern="100">
+                        <a:effectLst/>
+                        <a:latin typeface="Batang" panose="02030600000101010101" pitchFamily="18" charset="-127"/>
+                        <a:ea typeface="Batang" panose="02030600000101010101" pitchFamily="18" charset="-127"/>
+                        <a:cs typeface="Times New Roman" panose="02020603050405020304" pitchFamily="18" charset="0"/>
+                      </a:endParaRPr>
+                    </a:p>
+                  </a:txBody>
+                  <a:tcPr marL="95250" marR="95250" marT="50800" marB="50800"/>
+                </a:tc>
+                <a:tc>
+                  <a:txBody>
+                    <a:bodyPr/>
+                    <a:lstStyle/>
+                    <a:p>
+                      <a:pPr algn="l" latinLnBrk="1">
+                        <a:lnSpc>
+                          <a:spcPct val="115000"/>
+                        </a:lnSpc>
+                        <a:buNone/>
+                      </a:pPr>
+                      <a:r>
+                        <a:rPr lang="en-US" sz="1100" kern="100">
+                          <a:effectLst/>
+                        </a:rPr>
+                        <a:t>Code input text area, sample code loader, language indicator, run/generate triggers</a:t>
+                      </a:r>
+                      <a:endParaRPr lang="en-IN" sz="1000" kern="100">
+                        <a:effectLst/>
+                        <a:latin typeface="Batang" panose="02030600000101010101" pitchFamily="18" charset="-127"/>
+                        <a:ea typeface="Batang" panose="02030600000101010101" pitchFamily="18" charset="-127"/>
+                        <a:cs typeface="Times New Roman" panose="02020603050405020304" pitchFamily="18" charset="0"/>
+                      </a:endParaRPr>
+                    </a:p>
+                  </a:txBody>
+                  <a:tcPr marL="95250" marR="95250" marT="50800" marB="50800"/>
+                </a:tc>
+                <a:extLst>
+                  <a:ext uri="{0D108BD9-81ED-4DB2-BD59-A6C34878D82A}">
+                    <a16:rowId xmlns:a16="http://schemas.microsoft.com/office/drawing/2014/main" val="3134410047"/>
+                  </a:ext>
+                </a:extLst>
+              </a:tr>
+              <a:tr h="777753">
+                <a:tc>
+                  <a:txBody>
+                    <a:bodyPr/>
+                    <a:lstStyle/>
+                    <a:p>
+                      <a:pPr algn="l" latinLnBrk="1">
+                        <a:lnSpc>
+                          <a:spcPct val="115000"/>
+                        </a:lnSpc>
+                        <a:buNone/>
+                      </a:pPr>
+                      <a:r>
+                        <a:rPr lang="en-US" sz="1100" kern="100">
+                          <a:effectLst/>
+                        </a:rPr>
+                        <a:t>Flowchart Engine</a:t>
+                      </a:r>
+                      <a:endParaRPr lang="en-IN" sz="1000" kern="100">
+                        <a:effectLst/>
+                        <a:latin typeface="Batang" panose="02030600000101010101" pitchFamily="18" charset="-127"/>
+                        <a:ea typeface="Batang" panose="02030600000101010101" pitchFamily="18" charset="-127"/>
+                        <a:cs typeface="Times New Roman" panose="02020603050405020304" pitchFamily="18" charset="0"/>
+                      </a:endParaRPr>
+                    </a:p>
+                  </a:txBody>
+                  <a:tcPr marL="95250" marR="95250" marT="50800" marB="50800"/>
+                </a:tc>
+                <a:tc>
+                  <a:txBody>
+                    <a:bodyPr/>
+                    <a:lstStyle/>
+                    <a:p>
+                      <a:pPr algn="l" latinLnBrk="1">
+                        <a:lnSpc>
+                          <a:spcPct val="115000"/>
+                        </a:lnSpc>
+                        <a:buNone/>
+                      </a:pPr>
+                      <a:r>
+                        <a:rPr lang="en-US" sz="1100" kern="100">
+                          <a:effectLst/>
+                        </a:rPr>
+                        <a:t>AST parsing, node/edge JSON generation, Dagre layout, React Flow rendering, interactive drag/zoom, PNG export</a:t>
+                      </a:r>
+                      <a:endParaRPr lang="en-IN" sz="1000" kern="100">
+                        <a:effectLst/>
+                        <a:latin typeface="Batang" panose="02030600000101010101" pitchFamily="18" charset="-127"/>
+                        <a:ea typeface="Batang" panose="02030600000101010101" pitchFamily="18" charset="-127"/>
+                        <a:cs typeface="Times New Roman" panose="02020603050405020304" pitchFamily="18" charset="0"/>
+                      </a:endParaRPr>
+                    </a:p>
+                  </a:txBody>
+                  <a:tcPr marL="95250" marR="95250" marT="50800" marB="50800"/>
+                </a:tc>
+                <a:extLst>
+                  <a:ext uri="{0D108BD9-81ED-4DB2-BD59-A6C34878D82A}">
+                    <a16:rowId xmlns:a16="http://schemas.microsoft.com/office/drawing/2014/main" val="1552204520"/>
+                  </a:ext>
+                </a:extLst>
+              </a:tr>
+              <a:tr h="777753">
+                <a:tc>
+                  <a:txBody>
+                    <a:bodyPr/>
+                    <a:lstStyle/>
+                    <a:p>
+                      <a:pPr algn="l" latinLnBrk="1">
+                        <a:lnSpc>
+                          <a:spcPct val="115000"/>
+                        </a:lnSpc>
+                        <a:buNone/>
+                      </a:pPr>
+                      <a:r>
+                        <a:rPr lang="en-US" sz="1100" kern="100" dirty="0">
+                          <a:effectLst/>
+                        </a:rPr>
+                        <a:t>Execution Engine</a:t>
+                      </a:r>
+                      <a:endParaRPr lang="en-IN" sz="1000" kern="100" dirty="0">
+                        <a:effectLst/>
+                        <a:latin typeface="Batang" panose="02030600000101010101" pitchFamily="18" charset="-127"/>
+                        <a:ea typeface="Batang" panose="02030600000101010101" pitchFamily="18" charset="-127"/>
+                        <a:cs typeface="Times New Roman" panose="02020603050405020304" pitchFamily="18" charset="0"/>
+                      </a:endParaRPr>
+                    </a:p>
+                  </a:txBody>
+                  <a:tcPr marL="95250" marR="95250" marT="50800" marB="50800"/>
+                </a:tc>
+                <a:tc>
+                  <a:txBody>
+                    <a:bodyPr/>
+                    <a:lstStyle/>
+                    <a:p>
+                      <a:pPr algn="l" latinLnBrk="1">
+                        <a:lnSpc>
+                          <a:spcPct val="115000"/>
+                        </a:lnSpc>
+                        <a:buNone/>
+                      </a:pPr>
+                      <a:r>
+                        <a:rPr lang="en-US" sz="1100" kern="100">
+                          <a:effectLst/>
+                        </a:rPr>
+                        <a:t>Sandboxed Python subprocess, Node.js child process, input scanning modal, stdout /stderr capture, 5s timeout</a:t>
+                      </a:r>
+                      <a:endParaRPr lang="en-IN" sz="1000" kern="100">
+                        <a:effectLst/>
+                        <a:latin typeface="Batang" panose="02030600000101010101" pitchFamily="18" charset="-127"/>
+                        <a:ea typeface="Batang" panose="02030600000101010101" pitchFamily="18" charset="-127"/>
+                        <a:cs typeface="Times New Roman" panose="02020603050405020304" pitchFamily="18" charset="0"/>
+                      </a:endParaRPr>
+                    </a:p>
+                  </a:txBody>
+                  <a:tcPr marL="95250" marR="95250" marT="50800" marB="50800"/>
+                </a:tc>
+                <a:extLst>
+                  <a:ext uri="{0D108BD9-81ED-4DB2-BD59-A6C34878D82A}">
+                    <a16:rowId xmlns:a16="http://schemas.microsoft.com/office/drawing/2014/main" val="3041190816"/>
+                  </a:ext>
+                </a:extLst>
+              </a:tr>
+              <a:tr h="460890">
+                <a:tc>
+                  <a:txBody>
+                    <a:bodyPr/>
+                    <a:lstStyle/>
+                    <a:p>
+                      <a:pPr algn="l" latinLnBrk="1">
+                        <a:lnSpc>
+                          <a:spcPct val="115000"/>
+                        </a:lnSpc>
+                        <a:buNone/>
+                      </a:pPr>
+                      <a:r>
+                        <a:rPr lang="en-US" sz="1100" kern="100">
+                          <a:effectLst/>
+                        </a:rPr>
+                        <a:t>Explanation Module</a:t>
+                      </a:r>
+                      <a:endParaRPr lang="en-IN" sz="1000" kern="100">
+                        <a:effectLst/>
+                        <a:latin typeface="Batang" panose="02030600000101010101" pitchFamily="18" charset="-127"/>
+                        <a:ea typeface="Batang" panose="02030600000101010101" pitchFamily="18" charset="-127"/>
+                        <a:cs typeface="Times New Roman" panose="02020603050405020304" pitchFamily="18" charset="0"/>
+                      </a:endParaRPr>
+                    </a:p>
+                  </a:txBody>
+                  <a:tcPr marL="95250" marR="95250" marT="50800" marB="50800"/>
+                </a:tc>
+                <a:tc>
+                  <a:txBody>
+                    <a:bodyPr/>
+                    <a:lstStyle/>
+                    <a:p>
+                      <a:pPr algn="l" latinLnBrk="1">
+                        <a:lnSpc>
+                          <a:spcPct val="115000"/>
+                        </a:lnSpc>
+                        <a:buNone/>
+                      </a:pPr>
+                      <a:r>
+                        <a:rPr lang="en-US" sz="1100" kern="100">
+                          <a:effectLst/>
+                        </a:rPr>
+                        <a:t>AI-powered plain-English explanation of submitted code structure and logic</a:t>
+                      </a:r>
+                      <a:endParaRPr lang="en-IN" sz="1000" kern="100">
+                        <a:effectLst/>
+                        <a:latin typeface="Batang" panose="02030600000101010101" pitchFamily="18" charset="-127"/>
+                        <a:ea typeface="Batang" panose="02030600000101010101" pitchFamily="18" charset="-127"/>
+                        <a:cs typeface="Times New Roman" panose="02020603050405020304" pitchFamily="18" charset="0"/>
+                      </a:endParaRPr>
+                    </a:p>
+                  </a:txBody>
+                  <a:tcPr marL="95250" marR="95250" marT="50800" marB="50800"/>
+                </a:tc>
+                <a:extLst>
+                  <a:ext uri="{0D108BD9-81ED-4DB2-BD59-A6C34878D82A}">
+                    <a16:rowId xmlns:a16="http://schemas.microsoft.com/office/drawing/2014/main" val="338603999"/>
+                  </a:ext>
+                </a:extLst>
+              </a:tr>
+              <a:tr h="460890">
+                <a:tc>
+                  <a:txBody>
+                    <a:bodyPr/>
+                    <a:lstStyle/>
+                    <a:p>
+                      <a:pPr algn="l" latinLnBrk="1">
+                        <a:lnSpc>
+                          <a:spcPct val="115000"/>
+                        </a:lnSpc>
+                        <a:buNone/>
+                      </a:pPr>
+                      <a:r>
+                        <a:rPr lang="en-US" sz="1100" kern="100">
+                          <a:effectLst/>
+                        </a:rPr>
+                        <a:t>Recent Activity Module</a:t>
+                      </a:r>
+                      <a:endParaRPr lang="en-IN" sz="1000" kern="100">
+                        <a:effectLst/>
+                        <a:latin typeface="Batang" panose="02030600000101010101" pitchFamily="18" charset="-127"/>
+                        <a:ea typeface="Batang" panose="02030600000101010101" pitchFamily="18" charset="-127"/>
+                        <a:cs typeface="Times New Roman" panose="02020603050405020304" pitchFamily="18" charset="0"/>
+                      </a:endParaRPr>
+                    </a:p>
+                  </a:txBody>
+                  <a:tcPr marL="95250" marR="95250" marT="50800" marB="50800"/>
+                </a:tc>
+                <a:tc>
+                  <a:txBody>
+                    <a:bodyPr/>
+                    <a:lstStyle/>
+                    <a:p>
+                      <a:pPr algn="l" latinLnBrk="1">
+                        <a:lnSpc>
+                          <a:spcPct val="115000"/>
+                        </a:lnSpc>
+                        <a:buNone/>
+                      </a:pPr>
+                      <a:r>
+                        <a:rPr lang="en-US" sz="1100" kern="100">
+                          <a:effectLst/>
+                        </a:rPr>
+                        <a:t>Submission history display, code restore with correct language, activity log</a:t>
+                      </a:r>
+                      <a:endParaRPr lang="en-IN" sz="1000" kern="100">
+                        <a:effectLst/>
+                        <a:latin typeface="Batang" panose="02030600000101010101" pitchFamily="18" charset="-127"/>
+                        <a:ea typeface="Batang" panose="02030600000101010101" pitchFamily="18" charset="-127"/>
+                        <a:cs typeface="Times New Roman" panose="02020603050405020304" pitchFamily="18" charset="0"/>
+                      </a:endParaRPr>
+                    </a:p>
+                  </a:txBody>
+                  <a:tcPr marL="95250" marR="95250" marT="50800" marB="50800"/>
+                </a:tc>
+                <a:extLst>
+                  <a:ext uri="{0D108BD9-81ED-4DB2-BD59-A6C34878D82A}">
+                    <a16:rowId xmlns:a16="http://schemas.microsoft.com/office/drawing/2014/main" val="2982340788"/>
+                  </a:ext>
+                </a:extLst>
+              </a:tr>
+              <a:tr h="777753">
+                <a:tc>
+                  <a:txBody>
+                    <a:bodyPr/>
+                    <a:lstStyle/>
+                    <a:p>
+                      <a:pPr algn="l" latinLnBrk="1">
+                        <a:lnSpc>
+                          <a:spcPct val="115000"/>
+                        </a:lnSpc>
+                        <a:buNone/>
+                      </a:pPr>
+                      <a:r>
+                        <a:rPr lang="en-US" sz="1100" kern="100">
+                          <a:effectLst/>
+                        </a:rPr>
+                        <a:t>Admin Dashboard Module</a:t>
+                      </a:r>
+                      <a:endParaRPr lang="en-IN" sz="1000" kern="100">
+                        <a:effectLst/>
+                        <a:latin typeface="Batang" panose="02030600000101010101" pitchFamily="18" charset="-127"/>
+                        <a:ea typeface="Batang" panose="02030600000101010101" pitchFamily="18" charset="-127"/>
+                        <a:cs typeface="Times New Roman" panose="02020603050405020304" pitchFamily="18" charset="0"/>
+                      </a:endParaRPr>
+                    </a:p>
+                  </a:txBody>
+                  <a:tcPr marL="95250" marR="95250" marT="50800" marB="50800"/>
+                </a:tc>
+                <a:tc>
+                  <a:txBody>
+                    <a:bodyPr/>
+                    <a:lstStyle/>
+                    <a:p>
+                      <a:pPr algn="l" latinLnBrk="1">
+                        <a:lnSpc>
+                          <a:spcPct val="115000"/>
+                        </a:lnSpc>
+                        <a:buNone/>
+                      </a:pPr>
+                      <a:r>
+                        <a:rPr lang="en-US" sz="1100" kern="100">
+                          <a:effectLst/>
+                        </a:rPr>
+                        <a:t>User management (view/delete), submission monitoring, platform statistics, security status display</a:t>
+                      </a:r>
+                      <a:endParaRPr lang="en-IN" sz="1000" kern="100">
+                        <a:effectLst/>
+                        <a:latin typeface="Batang" panose="02030600000101010101" pitchFamily="18" charset="-127"/>
+                        <a:ea typeface="Batang" panose="02030600000101010101" pitchFamily="18" charset="-127"/>
+                        <a:cs typeface="Times New Roman" panose="02020603050405020304" pitchFamily="18" charset="0"/>
+                      </a:endParaRPr>
+                    </a:p>
+                  </a:txBody>
+                  <a:tcPr marL="95250" marR="95250" marT="50800" marB="50800"/>
+                </a:tc>
+                <a:extLst>
+                  <a:ext uri="{0D108BD9-81ED-4DB2-BD59-A6C34878D82A}">
+                    <a16:rowId xmlns:a16="http://schemas.microsoft.com/office/drawing/2014/main" val="3802992458"/>
+                  </a:ext>
+                </a:extLst>
+              </a:tr>
+              <a:tr h="548978">
+                <a:tc>
+                  <a:txBody>
+                    <a:bodyPr/>
+                    <a:lstStyle/>
+                    <a:p>
+                      <a:pPr algn="l" latinLnBrk="1">
+                        <a:lnSpc>
+                          <a:spcPct val="115000"/>
+                        </a:lnSpc>
+                        <a:buNone/>
+                      </a:pPr>
+                      <a:r>
+                        <a:rPr lang="en-US" sz="1100" kern="100">
+                          <a:effectLst/>
+                        </a:rPr>
+                        <a:t>Database Module</a:t>
+                      </a:r>
+                      <a:endParaRPr lang="en-IN" sz="1000" kern="100">
+                        <a:effectLst/>
+                        <a:latin typeface="Batang" panose="02030600000101010101" pitchFamily="18" charset="-127"/>
+                        <a:ea typeface="Batang" panose="02030600000101010101" pitchFamily="18" charset="-127"/>
+                        <a:cs typeface="Times New Roman" panose="02020603050405020304" pitchFamily="18" charset="0"/>
+                      </a:endParaRPr>
+                    </a:p>
+                  </a:txBody>
+                  <a:tcPr marL="95250" marR="95250" marT="50800" marB="50800"/>
+                </a:tc>
+                <a:tc>
+                  <a:txBody>
+                    <a:bodyPr/>
+                    <a:lstStyle/>
+                    <a:p>
+                      <a:pPr algn="l" latinLnBrk="1">
+                        <a:lnSpc>
+                          <a:spcPct val="115000"/>
+                        </a:lnSpc>
+                        <a:buNone/>
+                      </a:pPr>
+                      <a:r>
+                        <a:rPr lang="en-US" sz="1100" kern="100" dirty="0">
+                          <a:effectLst/>
+                        </a:rPr>
+                        <a:t>SQL CRUD operations, Fernet AES-256 encrypt/decrypt, session store, OTP management</a:t>
+                      </a:r>
+                      <a:endParaRPr lang="en-IN" sz="1000" kern="100" dirty="0">
+                        <a:effectLst/>
+                        <a:latin typeface="Batang" panose="02030600000101010101" pitchFamily="18" charset="-127"/>
+                        <a:ea typeface="Batang" panose="02030600000101010101" pitchFamily="18" charset="-127"/>
+                        <a:cs typeface="Times New Roman" panose="02020603050405020304" pitchFamily="18" charset="0"/>
+                      </a:endParaRPr>
+                    </a:p>
+                  </a:txBody>
+                  <a:tcPr marL="95250" marR="95250" marT="50800" marB="50800"/>
+                </a:tc>
+                <a:extLst>
+                  <a:ext uri="{0D108BD9-81ED-4DB2-BD59-A6C34878D82A}">
+                    <a16:rowId xmlns:a16="http://schemas.microsoft.com/office/drawing/2014/main" val="4112110002"/>
+                  </a:ext>
+                </a:extLst>
+              </a:tr>
+            </a:tbl>
+          </a:graphicData>
+        </a:graphic>
+      </p:graphicFrame>
     </p:spTree>
     <p:extLst>
       <p:ext uri="{BB962C8B-B14F-4D97-AF65-F5344CB8AC3E}">
@@ -9179,32 +9731,29 @@
           <a:lstStyle/>
           <a:p>
             <a:r>
-              <a:rPr lang="en-US" sz="3600" b="1" dirty="0">
-                <a:latin typeface="Abadi" panose="020B0604020104020204" pitchFamily="34" charset="0"/>
-              </a:rPr>
-              <a:t>DBD &amp; ERD</a:t>
-            </a:r>
-            <a:endParaRPr lang="en-IN" sz="3600" b="1" dirty="0">
-              <a:latin typeface="Abadi" panose="020B0604020104020204" pitchFamily="34" charset="0"/>
-            </a:endParaRPr>
+              <a:rPr lang="en-US" b="1" dirty="0"/>
+              <a:t> ER-DIAGRAM</a:t>
+            </a:r>
+            <a:br>
+              <a:rPr lang="en-US" b="1" dirty="0"/>
+            </a:br>
+            <a:endParaRPr lang="en-IN" b="1" dirty="0"/>
           </a:p>
         </p:txBody>
       </p:sp>
       <p:pic>
         <p:nvPicPr>
-          <p:cNvPr id="24" name="Content Placeholder 23">
+          <p:cNvPr id="3" name="Picture 2">
             <a:extLst>
               <a:ext uri="{FF2B5EF4-FFF2-40B4-BE49-F238E27FC236}">
-                <a16:creationId xmlns:a16="http://schemas.microsoft.com/office/drawing/2014/main" id="{0A3BA160-3F7C-D2BF-9DE4-16A19DC2CC3E}"/>
+                <a16:creationId xmlns:a16="http://schemas.microsoft.com/office/drawing/2014/main" id="{32E5AEEE-F8D5-CF3A-4812-BBB67B978A25}"/>
               </a:ext>
             </a:extLst>
           </p:cNvPr>
           <p:cNvPicPr>
-            <a:picLocks noGrp="1" noChangeAspect="1"/>
+            <a:picLocks noChangeAspect="1"/>
           </p:cNvPicPr>
-          <p:nvPr>
-            <p:ph sz="half" idx="1"/>
-          </p:nvPr>
+          <p:nvPr/>
         </p:nvPicPr>
         <p:blipFill>
           <a:blip r:embed="rId3"/>
@@ -9214,41 +9763,8 @@
         </p:blipFill>
         <p:spPr>
           <a:xfrm>
-            <a:off x="1005840" y="1727200"/>
-            <a:ext cx="6217920" cy="5685156"/>
-          </a:xfrm>
-          <a:prstGeom prst="rect">
-            <a:avLst/>
-          </a:prstGeom>
-          <a:noFill/>
-        </p:spPr>
-      </p:pic>
-      <p:pic>
-        <p:nvPicPr>
-          <p:cNvPr id="26" name="Content Placeholder 25">
-            <a:extLst>
-              <a:ext uri="{FF2B5EF4-FFF2-40B4-BE49-F238E27FC236}">
-                <a16:creationId xmlns:a16="http://schemas.microsoft.com/office/drawing/2014/main" id="{BC9089C7-48C9-FDEE-C5B6-264CAFA308E0}"/>
-              </a:ext>
-            </a:extLst>
-          </p:cNvPr>
-          <p:cNvPicPr>
-            <a:picLocks noGrp="1" noChangeAspect="1"/>
-          </p:cNvPicPr>
-          <p:nvPr>
-            <p:ph sz="half" idx="2"/>
-          </p:nvPr>
-        </p:nvPicPr>
-        <p:blipFill>
-          <a:blip r:embed="rId4"/>
-          <a:stretch>
-            <a:fillRect/>
-          </a:stretch>
-        </p:blipFill>
-        <p:spPr>
-          <a:xfrm>
-            <a:off x="7407275" y="1727200"/>
-            <a:ext cx="6216650" cy="5685155"/>
+            <a:off x="370853" y="1780226"/>
+            <a:ext cx="13253707" cy="5605254"/>
           </a:xfrm>
           <a:prstGeom prst="rect">
             <a:avLst/>
